--- a/proposal/PharmaColdOps-Final-Presentation.pptx
+++ b/proposal/PharmaColdOps-Final-Presentation.pptx
@@ -2,22 +2,22 @@
 <file path=ppt/presentation.xml><?xml version="1.0" encoding="utf-8"?>
 <p:presentation xmlns:p="http://schemas.openxmlformats.org/presentationml/2006/main">
   <p:sldMasterIdLst>
-    <p:sldMasterId xmlns:r="http://schemas.openxmlformats.org/officeDocument/2006/relationships" id="2147483648" r:id="Rb3c636cfeda64e8b"/>
+    <p:sldMasterId xmlns:r="http://schemas.openxmlformats.org/officeDocument/2006/relationships" id="2147483648" r:id="Rf70838d5a54b43cc"/>
   </p:sldMasterIdLst>
   <p:notesMasterIdLst>
-    <p:notesMasterId xmlns:r="http://schemas.openxmlformats.org/officeDocument/2006/relationships" r:id="R5e3c09b74c8c44eb"/>
+    <p:notesMasterId xmlns:r="http://schemas.openxmlformats.org/officeDocument/2006/relationships" r:id="Rde3ebcb0ec474b08"/>
   </p:notesMasterIdLst>
   <p:sldIdLst>
-    <p:sldId xmlns:r="http://schemas.openxmlformats.org/officeDocument/2006/relationships" id="256" r:id="R9d0dde41cb7442cc"/>
-    <p:sldId xmlns:r="http://schemas.openxmlformats.org/officeDocument/2006/relationships" id="257" r:id="R115a48693598491c"/>
-    <p:sldId xmlns:r="http://schemas.openxmlformats.org/officeDocument/2006/relationships" id="258" r:id="R0512a0feed7b41f6"/>
-    <p:sldId xmlns:r="http://schemas.openxmlformats.org/officeDocument/2006/relationships" id="259" r:id="R93dc39bd3a99470b"/>
-    <p:sldId xmlns:r="http://schemas.openxmlformats.org/officeDocument/2006/relationships" id="260" r:id="R01d91783149749e1"/>
-    <p:sldId xmlns:r="http://schemas.openxmlformats.org/officeDocument/2006/relationships" id="261" r:id="R36dbef0a7fb843f0"/>
-    <p:sldId xmlns:r="http://schemas.openxmlformats.org/officeDocument/2006/relationships" id="262" r:id="Radffe8f5de764ba7"/>
-    <p:sldId xmlns:r="http://schemas.openxmlformats.org/officeDocument/2006/relationships" id="263" r:id="R379602904926448d"/>
-    <p:sldId xmlns:r="http://schemas.openxmlformats.org/officeDocument/2006/relationships" id="264" r:id="R1491b9dfcc7a4e82"/>
-    <p:sldId xmlns:r="http://schemas.openxmlformats.org/officeDocument/2006/relationships" id="265" r:id="Reb053b3483404167"/>
+    <p:sldId xmlns:r="http://schemas.openxmlformats.org/officeDocument/2006/relationships" id="256" r:id="R9eff58f2ed804454"/>
+    <p:sldId xmlns:r="http://schemas.openxmlformats.org/officeDocument/2006/relationships" id="257" r:id="R47bf2247acd34284"/>
+    <p:sldId xmlns:r="http://schemas.openxmlformats.org/officeDocument/2006/relationships" id="258" r:id="R53a35562347c4d86"/>
+    <p:sldId xmlns:r="http://schemas.openxmlformats.org/officeDocument/2006/relationships" id="259" r:id="Rbd69510d55324af2"/>
+    <p:sldId xmlns:r="http://schemas.openxmlformats.org/officeDocument/2006/relationships" id="260" r:id="R82d6003ef60a4065"/>
+    <p:sldId xmlns:r="http://schemas.openxmlformats.org/officeDocument/2006/relationships" id="261" r:id="R5118b34e419e4f30"/>
+    <p:sldId xmlns:r="http://schemas.openxmlformats.org/officeDocument/2006/relationships" id="262" r:id="R6b36444d3ab4426c"/>
+    <p:sldId xmlns:r="http://schemas.openxmlformats.org/officeDocument/2006/relationships" id="263" r:id="Rc2e26f5d33394ce6"/>
+    <p:sldId xmlns:r="http://schemas.openxmlformats.org/officeDocument/2006/relationships" id="264" r:id="R8947df98f9564080"/>
+    <p:sldId xmlns:r="http://schemas.openxmlformats.org/officeDocument/2006/relationships" id="265" r:id="Rf2516a548d0f46d0"/>
   </p:sldIdLst>
   <p:sldSz cx="12192000" cy="6858000"/>
   <p:notesSz cx="6858000" cy="9144000"/>
@@ -521,7 +521,7 @@
           <a:lstStyle xmlns:a="http://schemas.openxmlformats.org/drawingml/2006/main"/>
           <a:p xmlns:a="http://schemas.openxmlformats.org/drawingml/2006/main">
             <a:r>
-              <a:t>D, 20 seconds. Close with supported capabilities and honest limits. Remaining human items include B review/provenance, recordings, individual reflection and confidential peer evaluation. Original proposal slides are historical, and the current group is 41.</a:t>
+              <a:t>D, 20 seconds. Close with supported capabilities and honest limits. The current descriptive M6 review is archived. Independent evaluation requires historical process verification and third-person adjudication or a new question set. Remaining delivery tasks include human recordings, individual reflection and confidential peer evaluation. Original proposal slides are historical, and the current group is 41.</a:t>
             </a:r>
           </a:p>
           <a:p xmlns:a="http://schemas.openxmlformats.org/drawingml/2006/main">
@@ -1161,12 +1161,12 @@
           <a:lstStyle xmlns:a="http://schemas.openxmlformats.org/drawingml/2006/main"/>
           <a:p xmlns:a="http://schemas.openxmlformats.org/drawingml/2006/main">
             <a:r>
-              <a:t>D, 25 seconds. State the software verification evidence. If B is missing, say so. Human process declarations are not identity authentication. Do not substitute developer-authored checks for an independent benchmark.</a:t>
+              <a:t>D, 25 seconds. State the software verification evidence with its historical date. Current A/B descriptive review covers 53 questions each, with 15 matching intent judgements and 38 unresolved disagreements. B confirmed personal judgement and source consultation; A historical process remains unverified. No independent metric or adjudicated gold is available from this closeout. Process declarations do not authenticate identity.</a:t>
             </a:r>
           </a:p>
           <a:p xmlns:a="http://schemas.openxmlformats.org/drawingml/2006/main">
             <a:r>
-              <a:t>Sources: PROGRESS.md; process-validated M6 report when supplied</a:t>
+              <a:t>Sources: PROGRESS.md; docs/M6评审收尾.md; supplied M6 report</a:t>
             </a:r>
           </a:p>
           <a:p xmlns:a="http://schemas.openxmlformats.org/drawingml/2006/main">
@@ -1218,7 +1218,7 @@
           <p:cNvPr id="3" name="Title">
             <a:extLst xmlns:a="http://schemas.openxmlformats.org/drawingml/2006/main">
               <a:ext uri="{FF2B5EF4-FFF2-40B4-BE49-F238E27FC236}">
-                <a16:creationId xmlns:a16="http://schemas.microsoft.com/office/drawing/2014/main" id="{3683576E-1F5C-490D-ABCB-AC847359F617}"/>
+                <a16:creationId xmlns:a16="http://schemas.microsoft.com/office/drawing/2014/main" id="{B12D4E7B-1CF6-4A1B-A947-19AF9CA30240}"/>
               </a:ext>
             </a:extLst>
           </p:cNvPr>
@@ -1258,7 +1258,7 @@
                 <a:cs typeface="+mj-lt"/>
               </a:defRPr>
             </a:defPPr>
-            <a:lvl1pPr marL="0" indent="0">
+            <a:lvl1pPr marL="0" indent="0" algn="ctr">
               <a:lnSpc>
                 <a:spcPct val="110000"/>
               </a:lnSpc>
@@ -1269,8 +1269,16 @@
                 <a:spcPts val="0"/>
               </a:spcAft>
               <a:buNone/>
+              <a:defRPr sz="4800" b="1">
+                <a:solidFill>
+                  <a:schemeClr val="tx1"/>
+                </a:solidFill>
+                <a:latin typeface="+mj-lt"/>
+                <a:ea typeface="+mj-lt"/>
+                <a:cs typeface="+mj-lt"/>
+              </a:defRPr>
             </a:lvl1pPr>
-            <a:lvl2pPr marL="0" indent="0">
+            <a:lvl2pPr marL="0" indent="0" algn="ctr">
               <a:lnSpc>
                 <a:spcPct val="110000"/>
               </a:lnSpc>
@@ -1281,8 +1289,16 @@
                 <a:spcPts val="0"/>
               </a:spcAft>
               <a:buNone/>
+              <a:defRPr sz="4800" b="1">
+                <a:solidFill>
+                  <a:schemeClr val="tx1"/>
+                </a:solidFill>
+                <a:latin typeface="+mj-lt"/>
+                <a:ea typeface="+mj-lt"/>
+                <a:cs typeface="+mj-lt"/>
+              </a:defRPr>
             </a:lvl2pPr>
-            <a:lvl3pPr marL="0" indent="0">
+            <a:lvl3pPr marL="0" indent="0" algn="ctr">
               <a:lnSpc>
                 <a:spcPct val="110000"/>
               </a:lnSpc>
@@ -1293,8 +1309,16 @@
                 <a:spcPts val="0"/>
               </a:spcAft>
               <a:buNone/>
+              <a:defRPr sz="4800" b="1">
+                <a:solidFill>
+                  <a:schemeClr val="tx1"/>
+                </a:solidFill>
+                <a:latin typeface="+mj-lt"/>
+                <a:ea typeface="+mj-lt"/>
+                <a:cs typeface="+mj-lt"/>
+              </a:defRPr>
             </a:lvl3pPr>
-            <a:lvl4pPr marL="0" indent="0">
+            <a:lvl4pPr marL="0" indent="0" algn="ctr">
               <a:lnSpc>
                 <a:spcPct val="110000"/>
               </a:lnSpc>
@@ -1305,8 +1329,16 @@
                 <a:spcPts val="0"/>
               </a:spcAft>
               <a:buNone/>
+              <a:defRPr sz="4800" b="1">
+                <a:solidFill>
+                  <a:schemeClr val="tx1"/>
+                </a:solidFill>
+                <a:latin typeface="+mj-lt"/>
+                <a:ea typeface="+mj-lt"/>
+                <a:cs typeface="+mj-lt"/>
+              </a:defRPr>
             </a:lvl4pPr>
-            <a:lvl5pPr marL="0" indent="0">
+            <a:lvl5pPr marL="0" indent="0" algn="ctr">
               <a:lnSpc>
                 <a:spcPct val="110000"/>
               </a:lnSpc>
@@ -1317,8 +1349,16 @@
                 <a:spcPts val="0"/>
               </a:spcAft>
               <a:buNone/>
+              <a:defRPr sz="4800" b="1">
+                <a:solidFill>
+                  <a:schemeClr val="tx1"/>
+                </a:solidFill>
+                <a:latin typeface="+mj-lt"/>
+                <a:ea typeface="+mj-lt"/>
+                <a:cs typeface="+mj-lt"/>
+              </a:defRPr>
             </a:lvl5pPr>
-            <a:lvl6pPr marL="0" indent="0">
+            <a:lvl6pPr marL="0" indent="0" algn="ctr">
               <a:lnSpc>
                 <a:spcPct val="110000"/>
               </a:lnSpc>
@@ -1329,8 +1369,16 @@
                 <a:spcPts val="0"/>
               </a:spcAft>
               <a:buNone/>
+              <a:defRPr sz="4800" b="1">
+                <a:solidFill>
+                  <a:schemeClr val="tx1"/>
+                </a:solidFill>
+                <a:latin typeface="+mj-lt"/>
+                <a:ea typeface="+mj-lt"/>
+                <a:cs typeface="+mj-lt"/>
+              </a:defRPr>
             </a:lvl6pPr>
-            <a:lvl7pPr marL="0" indent="0">
+            <a:lvl7pPr marL="0" indent="0" algn="ctr">
               <a:lnSpc>
                 <a:spcPct val="110000"/>
               </a:lnSpc>
@@ -1341,8 +1389,16 @@
                 <a:spcPts val="0"/>
               </a:spcAft>
               <a:buNone/>
+              <a:defRPr sz="4800" b="1">
+                <a:solidFill>
+                  <a:schemeClr val="tx1"/>
+                </a:solidFill>
+                <a:latin typeface="+mj-lt"/>
+                <a:ea typeface="+mj-lt"/>
+                <a:cs typeface="+mj-lt"/>
+              </a:defRPr>
             </a:lvl7pPr>
-            <a:lvl8pPr marL="0" indent="0">
+            <a:lvl8pPr marL="0" indent="0" algn="ctr">
               <a:lnSpc>
                 <a:spcPct val="110000"/>
               </a:lnSpc>
@@ -1353,8 +1409,16 @@
                 <a:spcPts val="0"/>
               </a:spcAft>
               <a:buNone/>
+              <a:defRPr sz="4800" b="1">
+                <a:solidFill>
+                  <a:schemeClr val="tx1"/>
+                </a:solidFill>
+                <a:latin typeface="+mj-lt"/>
+                <a:ea typeface="+mj-lt"/>
+                <a:cs typeface="+mj-lt"/>
+              </a:defRPr>
             </a:lvl8pPr>
-            <a:lvl9pPr marL="0" indent="0">
+            <a:lvl9pPr marL="0" indent="0" algn="ctr">
               <a:lnSpc>
                 <a:spcPct val="110000"/>
               </a:lnSpc>
@@ -1365,6 +1429,14 @@
                 <a:spcPts val="0"/>
               </a:spcAft>
               <a:buNone/>
+              <a:defRPr sz="4800" b="1">
+                <a:solidFill>
+                  <a:schemeClr val="tx1"/>
+                </a:solidFill>
+                <a:latin typeface="+mj-lt"/>
+                <a:ea typeface="+mj-lt"/>
+                <a:cs typeface="+mj-lt"/>
+              </a:defRPr>
             </a:lvl9pPr>
           </a:lstStyle>
           <a:p xmlns:a="http://schemas.openxmlformats.org/drawingml/2006/main"/>
@@ -1375,7 +1447,7 @@
           <p:cNvPr id="2" name="Subtitle">
             <a:extLst xmlns:a="http://schemas.openxmlformats.org/drawingml/2006/main">
               <a:ext uri="{FF2B5EF4-FFF2-40B4-BE49-F238E27FC236}">
-                <a16:creationId xmlns:a16="http://schemas.microsoft.com/office/drawing/2014/main" id="{9C9DCEE7-7E2C-4CA2-992B-F34450810AF9}"/>
+                <a16:creationId xmlns:a16="http://schemas.microsoft.com/office/drawing/2014/main" id="{B1EE145A-F7CC-4C1B-AB56-AB753BE3C8CB}"/>
               </a:ext>
             </a:extLst>
           </p:cNvPr>
@@ -1415,7 +1487,7 @@
                 <a:cs typeface="+mn-lt"/>
               </a:defRPr>
             </a:defPPr>
-            <a:lvl1pPr marL="0" indent="0">
+            <a:lvl1pPr marL="0" indent="0" algn="ctr">
               <a:lnSpc>
                 <a:spcPct val="110000"/>
               </a:lnSpc>
@@ -1426,8 +1498,16 @@
                 <a:spcPts val="0"/>
               </a:spcAft>
               <a:buNone/>
+              <a:defRPr sz="2100" b="0">
+                <a:solidFill>
+                  <a:schemeClr val="tx1"/>
+                </a:solidFill>
+                <a:latin typeface="+mn-lt"/>
+                <a:ea typeface="+mn-lt"/>
+                <a:cs typeface="+mn-lt"/>
+              </a:defRPr>
             </a:lvl1pPr>
-            <a:lvl2pPr marL="0" indent="0">
+            <a:lvl2pPr marL="0" indent="0" algn="ctr">
               <a:lnSpc>
                 <a:spcPct val="110000"/>
               </a:lnSpc>
@@ -1438,8 +1518,16 @@
                 <a:spcPts val="0"/>
               </a:spcAft>
               <a:buNone/>
+              <a:defRPr sz="2100" b="0">
+                <a:solidFill>
+                  <a:schemeClr val="tx1"/>
+                </a:solidFill>
+                <a:latin typeface="+mn-lt"/>
+                <a:ea typeface="+mn-lt"/>
+                <a:cs typeface="+mn-lt"/>
+              </a:defRPr>
             </a:lvl2pPr>
-            <a:lvl3pPr marL="0" indent="0">
+            <a:lvl3pPr marL="0" indent="0" algn="ctr">
               <a:lnSpc>
                 <a:spcPct val="110000"/>
               </a:lnSpc>
@@ -1450,8 +1538,16 @@
                 <a:spcPts val="0"/>
               </a:spcAft>
               <a:buNone/>
+              <a:defRPr sz="2100" b="0">
+                <a:solidFill>
+                  <a:schemeClr val="tx1"/>
+                </a:solidFill>
+                <a:latin typeface="+mn-lt"/>
+                <a:ea typeface="+mn-lt"/>
+                <a:cs typeface="+mn-lt"/>
+              </a:defRPr>
             </a:lvl3pPr>
-            <a:lvl4pPr marL="0" indent="0">
+            <a:lvl4pPr marL="0" indent="0" algn="ctr">
               <a:lnSpc>
                 <a:spcPct val="110000"/>
               </a:lnSpc>
@@ -1462,8 +1558,16 @@
                 <a:spcPts val="0"/>
               </a:spcAft>
               <a:buNone/>
+              <a:defRPr sz="2100" b="0">
+                <a:solidFill>
+                  <a:schemeClr val="tx1"/>
+                </a:solidFill>
+                <a:latin typeface="+mn-lt"/>
+                <a:ea typeface="+mn-lt"/>
+                <a:cs typeface="+mn-lt"/>
+              </a:defRPr>
             </a:lvl4pPr>
-            <a:lvl5pPr marL="0" indent="0">
+            <a:lvl5pPr marL="0" indent="0" algn="ctr">
               <a:lnSpc>
                 <a:spcPct val="110000"/>
               </a:lnSpc>
@@ -1474,8 +1578,16 @@
                 <a:spcPts val="0"/>
               </a:spcAft>
               <a:buNone/>
+              <a:defRPr sz="2100" b="0">
+                <a:solidFill>
+                  <a:schemeClr val="tx1"/>
+                </a:solidFill>
+                <a:latin typeface="+mn-lt"/>
+                <a:ea typeface="+mn-lt"/>
+                <a:cs typeface="+mn-lt"/>
+              </a:defRPr>
             </a:lvl5pPr>
-            <a:lvl6pPr marL="0" indent="0">
+            <a:lvl6pPr marL="0" indent="0" algn="ctr">
               <a:lnSpc>
                 <a:spcPct val="110000"/>
               </a:lnSpc>
@@ -1486,8 +1598,16 @@
                 <a:spcPts val="0"/>
               </a:spcAft>
               <a:buNone/>
+              <a:defRPr sz="2100" b="0">
+                <a:solidFill>
+                  <a:schemeClr val="tx1"/>
+                </a:solidFill>
+                <a:latin typeface="+mn-lt"/>
+                <a:ea typeface="+mn-lt"/>
+                <a:cs typeface="+mn-lt"/>
+              </a:defRPr>
             </a:lvl6pPr>
-            <a:lvl7pPr marL="0" indent="0">
+            <a:lvl7pPr marL="0" indent="0" algn="ctr">
               <a:lnSpc>
                 <a:spcPct val="110000"/>
               </a:lnSpc>
@@ -1498,8 +1618,16 @@
                 <a:spcPts val="0"/>
               </a:spcAft>
               <a:buNone/>
+              <a:defRPr sz="2100" b="0">
+                <a:solidFill>
+                  <a:schemeClr val="tx1"/>
+                </a:solidFill>
+                <a:latin typeface="+mn-lt"/>
+                <a:ea typeface="+mn-lt"/>
+                <a:cs typeface="+mn-lt"/>
+              </a:defRPr>
             </a:lvl7pPr>
-            <a:lvl8pPr marL="0" indent="0">
+            <a:lvl8pPr marL="0" indent="0" algn="ctr">
               <a:lnSpc>
                 <a:spcPct val="110000"/>
               </a:lnSpc>
@@ -1510,8 +1638,16 @@
                 <a:spcPts val="0"/>
               </a:spcAft>
               <a:buNone/>
+              <a:defRPr sz="2100" b="0">
+                <a:solidFill>
+                  <a:schemeClr val="tx1"/>
+                </a:solidFill>
+                <a:latin typeface="+mn-lt"/>
+                <a:ea typeface="+mn-lt"/>
+                <a:cs typeface="+mn-lt"/>
+              </a:defRPr>
             </a:lvl8pPr>
-            <a:lvl9pPr marL="0" indent="0">
+            <a:lvl9pPr marL="0" indent="0" algn="ctr">
               <a:lnSpc>
                 <a:spcPct val="110000"/>
               </a:lnSpc>
@@ -1522,6 +1658,14 @@
                 <a:spcPts val="0"/>
               </a:spcAft>
               <a:buNone/>
+              <a:defRPr sz="2100" b="0">
+                <a:solidFill>
+                  <a:schemeClr val="tx1"/>
+                </a:solidFill>
+                <a:latin typeface="+mn-lt"/>
+                <a:ea typeface="+mn-lt"/>
+                <a:cs typeface="+mn-lt"/>
+              </a:defRPr>
             </a:lvl9pPr>
           </a:lstStyle>
           <a:p xmlns:a="http://schemas.openxmlformats.org/drawingml/2006/main"/>
@@ -1549,7 +1693,7 @@
           <p:cNvPr id="2" name="Section title">
             <a:extLst xmlns:a="http://schemas.openxmlformats.org/drawingml/2006/main">
               <a:ext uri="{FF2B5EF4-FFF2-40B4-BE49-F238E27FC236}">
-                <a16:creationId xmlns:a16="http://schemas.microsoft.com/office/drawing/2014/main" id="{FC317417-419A-42F4-8E6A-AF7BF77090FA}"/>
+                <a16:creationId xmlns:a16="http://schemas.microsoft.com/office/drawing/2014/main" id="{10296A5E-CD86-41BE-A4A6-AAB69C66CCB8}"/>
               </a:ext>
             </a:extLst>
           </p:cNvPr>
@@ -1589,7 +1733,7 @@
                 <a:cs typeface="+mj-lt"/>
               </a:defRPr>
             </a:defPPr>
-            <a:lvl1pPr marL="0" indent="0">
+            <a:lvl1pPr marL="0" indent="0" algn="ctr">
               <a:lnSpc>
                 <a:spcPct val="110000"/>
               </a:lnSpc>
@@ -1600,8 +1744,16 @@
                 <a:spcPts val="0"/>
               </a:spcAft>
               <a:buNone/>
+              <a:defRPr sz="4200" b="1">
+                <a:solidFill>
+                  <a:schemeClr val="tx1"/>
+                </a:solidFill>
+                <a:latin typeface="+mj-lt"/>
+                <a:ea typeface="+mj-lt"/>
+                <a:cs typeface="+mj-lt"/>
+              </a:defRPr>
             </a:lvl1pPr>
-            <a:lvl2pPr marL="0" indent="0">
+            <a:lvl2pPr marL="0" indent="0" algn="ctr">
               <a:lnSpc>
                 <a:spcPct val="110000"/>
               </a:lnSpc>
@@ -1612,8 +1764,16 @@
                 <a:spcPts val="0"/>
               </a:spcAft>
               <a:buNone/>
+              <a:defRPr sz="4200" b="1">
+                <a:solidFill>
+                  <a:schemeClr val="tx1"/>
+                </a:solidFill>
+                <a:latin typeface="+mj-lt"/>
+                <a:ea typeface="+mj-lt"/>
+                <a:cs typeface="+mj-lt"/>
+              </a:defRPr>
             </a:lvl2pPr>
-            <a:lvl3pPr marL="0" indent="0">
+            <a:lvl3pPr marL="0" indent="0" algn="ctr">
               <a:lnSpc>
                 <a:spcPct val="110000"/>
               </a:lnSpc>
@@ -1624,8 +1784,16 @@
                 <a:spcPts val="0"/>
               </a:spcAft>
               <a:buNone/>
+              <a:defRPr sz="4200" b="1">
+                <a:solidFill>
+                  <a:schemeClr val="tx1"/>
+                </a:solidFill>
+                <a:latin typeface="+mj-lt"/>
+                <a:ea typeface="+mj-lt"/>
+                <a:cs typeface="+mj-lt"/>
+              </a:defRPr>
             </a:lvl3pPr>
-            <a:lvl4pPr marL="0" indent="0">
+            <a:lvl4pPr marL="0" indent="0" algn="ctr">
               <a:lnSpc>
                 <a:spcPct val="110000"/>
               </a:lnSpc>
@@ -1636,8 +1804,16 @@
                 <a:spcPts val="0"/>
               </a:spcAft>
               <a:buNone/>
+              <a:defRPr sz="4200" b="1">
+                <a:solidFill>
+                  <a:schemeClr val="tx1"/>
+                </a:solidFill>
+                <a:latin typeface="+mj-lt"/>
+                <a:ea typeface="+mj-lt"/>
+                <a:cs typeface="+mj-lt"/>
+              </a:defRPr>
             </a:lvl4pPr>
-            <a:lvl5pPr marL="0" indent="0">
+            <a:lvl5pPr marL="0" indent="0" algn="ctr">
               <a:lnSpc>
                 <a:spcPct val="110000"/>
               </a:lnSpc>
@@ -1648,8 +1824,16 @@
                 <a:spcPts val="0"/>
               </a:spcAft>
               <a:buNone/>
+              <a:defRPr sz="4200" b="1">
+                <a:solidFill>
+                  <a:schemeClr val="tx1"/>
+                </a:solidFill>
+                <a:latin typeface="+mj-lt"/>
+                <a:ea typeface="+mj-lt"/>
+                <a:cs typeface="+mj-lt"/>
+              </a:defRPr>
             </a:lvl5pPr>
-            <a:lvl6pPr marL="0" indent="0">
+            <a:lvl6pPr marL="0" indent="0" algn="ctr">
               <a:lnSpc>
                 <a:spcPct val="110000"/>
               </a:lnSpc>
@@ -1660,8 +1844,16 @@
                 <a:spcPts val="0"/>
               </a:spcAft>
               <a:buNone/>
+              <a:defRPr sz="4200" b="1">
+                <a:solidFill>
+                  <a:schemeClr val="tx1"/>
+                </a:solidFill>
+                <a:latin typeface="+mj-lt"/>
+                <a:ea typeface="+mj-lt"/>
+                <a:cs typeface="+mj-lt"/>
+              </a:defRPr>
             </a:lvl6pPr>
-            <a:lvl7pPr marL="0" indent="0">
+            <a:lvl7pPr marL="0" indent="0" algn="ctr">
               <a:lnSpc>
                 <a:spcPct val="110000"/>
               </a:lnSpc>
@@ -1672,8 +1864,16 @@
                 <a:spcPts val="0"/>
               </a:spcAft>
               <a:buNone/>
+              <a:defRPr sz="4200" b="1">
+                <a:solidFill>
+                  <a:schemeClr val="tx1"/>
+                </a:solidFill>
+                <a:latin typeface="+mj-lt"/>
+                <a:ea typeface="+mj-lt"/>
+                <a:cs typeface="+mj-lt"/>
+              </a:defRPr>
             </a:lvl7pPr>
-            <a:lvl8pPr marL="0" indent="0">
+            <a:lvl8pPr marL="0" indent="0" algn="ctr">
               <a:lnSpc>
                 <a:spcPct val="110000"/>
               </a:lnSpc>
@@ -1684,8 +1884,16 @@
                 <a:spcPts val="0"/>
               </a:spcAft>
               <a:buNone/>
+              <a:defRPr sz="4200" b="1">
+                <a:solidFill>
+                  <a:schemeClr val="tx1"/>
+                </a:solidFill>
+                <a:latin typeface="+mj-lt"/>
+                <a:ea typeface="+mj-lt"/>
+                <a:cs typeface="+mj-lt"/>
+              </a:defRPr>
             </a:lvl8pPr>
-            <a:lvl9pPr marL="0" indent="0">
+            <a:lvl9pPr marL="0" indent="0" algn="ctr">
               <a:lnSpc>
                 <a:spcPct val="110000"/>
               </a:lnSpc>
@@ -1696,6 +1904,14 @@
                 <a:spcPts val="0"/>
               </a:spcAft>
               <a:buNone/>
+              <a:defRPr sz="4200" b="1">
+                <a:solidFill>
+                  <a:schemeClr val="tx1"/>
+                </a:solidFill>
+                <a:latin typeface="+mj-lt"/>
+                <a:ea typeface="+mj-lt"/>
+                <a:cs typeface="+mj-lt"/>
+              </a:defRPr>
             </a:lvl9pPr>
           </a:lstStyle>
           <a:p xmlns:a="http://schemas.openxmlformats.org/drawingml/2006/main"/>
@@ -1723,7 +1939,7 @@
           <p:cNvPr id="3" name="Title">
             <a:extLst xmlns:a="http://schemas.openxmlformats.org/drawingml/2006/main">
               <a:ext uri="{FF2B5EF4-FFF2-40B4-BE49-F238E27FC236}">
-                <a16:creationId xmlns:a16="http://schemas.microsoft.com/office/drawing/2014/main" id="{8A78DB97-DDFF-46DC-B79D-AB47ACAFF50E}"/>
+                <a16:creationId xmlns:a16="http://schemas.microsoft.com/office/drawing/2014/main" id="{42719D2A-3695-4E78-BED2-0739802E8D13}"/>
               </a:ext>
             </a:extLst>
           </p:cNvPr>
@@ -1763,7 +1979,7 @@
                 <a:cs typeface="+mj-lt"/>
               </a:defRPr>
             </a:defPPr>
-            <a:lvl1pPr marL="0" indent="0">
+            <a:lvl1pPr marL="0" indent="0" algn="l">
               <a:lnSpc>
                 <a:spcPct val="110000"/>
               </a:lnSpc>
@@ -1774,8 +1990,16 @@
                 <a:spcPts val="0"/>
               </a:spcAft>
               <a:buNone/>
+              <a:defRPr sz="3300" b="1">
+                <a:solidFill>
+                  <a:schemeClr val="tx1"/>
+                </a:solidFill>
+                <a:latin typeface="+mj-lt"/>
+                <a:ea typeface="+mj-lt"/>
+                <a:cs typeface="+mj-lt"/>
+              </a:defRPr>
             </a:lvl1pPr>
-            <a:lvl2pPr marL="0" indent="0">
+            <a:lvl2pPr marL="0" indent="0" algn="l">
               <a:lnSpc>
                 <a:spcPct val="110000"/>
               </a:lnSpc>
@@ -1786,8 +2010,16 @@
                 <a:spcPts val="0"/>
               </a:spcAft>
               <a:buNone/>
+              <a:defRPr sz="3300" b="1">
+                <a:solidFill>
+                  <a:schemeClr val="tx1"/>
+                </a:solidFill>
+                <a:latin typeface="+mj-lt"/>
+                <a:ea typeface="+mj-lt"/>
+                <a:cs typeface="+mj-lt"/>
+              </a:defRPr>
             </a:lvl2pPr>
-            <a:lvl3pPr marL="0" indent="0">
+            <a:lvl3pPr marL="0" indent="0" algn="l">
               <a:lnSpc>
                 <a:spcPct val="110000"/>
               </a:lnSpc>
@@ -1798,8 +2030,16 @@
                 <a:spcPts val="0"/>
               </a:spcAft>
               <a:buNone/>
+              <a:defRPr sz="3300" b="1">
+                <a:solidFill>
+                  <a:schemeClr val="tx1"/>
+                </a:solidFill>
+                <a:latin typeface="+mj-lt"/>
+                <a:ea typeface="+mj-lt"/>
+                <a:cs typeface="+mj-lt"/>
+              </a:defRPr>
             </a:lvl3pPr>
-            <a:lvl4pPr marL="0" indent="0">
+            <a:lvl4pPr marL="0" indent="0" algn="l">
               <a:lnSpc>
                 <a:spcPct val="110000"/>
               </a:lnSpc>
@@ -1810,8 +2050,16 @@
                 <a:spcPts val="0"/>
               </a:spcAft>
               <a:buNone/>
+              <a:defRPr sz="3300" b="1">
+                <a:solidFill>
+                  <a:schemeClr val="tx1"/>
+                </a:solidFill>
+                <a:latin typeface="+mj-lt"/>
+                <a:ea typeface="+mj-lt"/>
+                <a:cs typeface="+mj-lt"/>
+              </a:defRPr>
             </a:lvl4pPr>
-            <a:lvl5pPr marL="0" indent="0">
+            <a:lvl5pPr marL="0" indent="0" algn="l">
               <a:lnSpc>
                 <a:spcPct val="110000"/>
               </a:lnSpc>
@@ -1822,8 +2070,16 @@
                 <a:spcPts val="0"/>
               </a:spcAft>
               <a:buNone/>
+              <a:defRPr sz="3300" b="1">
+                <a:solidFill>
+                  <a:schemeClr val="tx1"/>
+                </a:solidFill>
+                <a:latin typeface="+mj-lt"/>
+                <a:ea typeface="+mj-lt"/>
+                <a:cs typeface="+mj-lt"/>
+              </a:defRPr>
             </a:lvl5pPr>
-            <a:lvl6pPr marL="0" indent="0">
+            <a:lvl6pPr marL="0" indent="0" algn="l">
               <a:lnSpc>
                 <a:spcPct val="110000"/>
               </a:lnSpc>
@@ -1834,8 +2090,16 @@
                 <a:spcPts val="0"/>
               </a:spcAft>
               <a:buNone/>
+              <a:defRPr sz="3300" b="1">
+                <a:solidFill>
+                  <a:schemeClr val="tx1"/>
+                </a:solidFill>
+                <a:latin typeface="+mj-lt"/>
+                <a:ea typeface="+mj-lt"/>
+                <a:cs typeface="+mj-lt"/>
+              </a:defRPr>
             </a:lvl6pPr>
-            <a:lvl7pPr marL="0" indent="0">
+            <a:lvl7pPr marL="0" indent="0" algn="l">
               <a:lnSpc>
                 <a:spcPct val="110000"/>
               </a:lnSpc>
@@ -1846,8 +2110,16 @@
                 <a:spcPts val="0"/>
               </a:spcAft>
               <a:buNone/>
+              <a:defRPr sz="3300" b="1">
+                <a:solidFill>
+                  <a:schemeClr val="tx1"/>
+                </a:solidFill>
+                <a:latin typeface="+mj-lt"/>
+                <a:ea typeface="+mj-lt"/>
+                <a:cs typeface="+mj-lt"/>
+              </a:defRPr>
             </a:lvl7pPr>
-            <a:lvl8pPr marL="0" indent="0">
+            <a:lvl8pPr marL="0" indent="0" algn="l">
               <a:lnSpc>
                 <a:spcPct val="110000"/>
               </a:lnSpc>
@@ -1858,8 +2130,16 @@
                 <a:spcPts val="0"/>
               </a:spcAft>
               <a:buNone/>
+              <a:defRPr sz="3300" b="1">
+                <a:solidFill>
+                  <a:schemeClr val="tx1"/>
+                </a:solidFill>
+                <a:latin typeface="+mj-lt"/>
+                <a:ea typeface="+mj-lt"/>
+                <a:cs typeface="+mj-lt"/>
+              </a:defRPr>
             </a:lvl8pPr>
-            <a:lvl9pPr marL="0" indent="0">
+            <a:lvl9pPr marL="0" indent="0" algn="l">
               <a:lnSpc>
                 <a:spcPct val="110000"/>
               </a:lnSpc>
@@ -1870,6 +2150,14 @@
                 <a:spcPts val="0"/>
               </a:spcAft>
               <a:buNone/>
+              <a:defRPr sz="3300" b="1">
+                <a:solidFill>
+                  <a:schemeClr val="tx1"/>
+                </a:solidFill>
+                <a:latin typeface="+mj-lt"/>
+                <a:ea typeface="+mj-lt"/>
+                <a:cs typeface="+mj-lt"/>
+              </a:defRPr>
             </a:lvl9pPr>
           </a:lstStyle>
           <a:p xmlns:a="http://schemas.openxmlformats.org/drawingml/2006/main"/>
@@ -1880,7 +2168,7 @@
           <p:cNvPr id="2" name="Body">
             <a:extLst xmlns:a="http://schemas.openxmlformats.org/drawingml/2006/main">
               <a:ext uri="{FF2B5EF4-FFF2-40B4-BE49-F238E27FC236}">
-                <a16:creationId xmlns:a16="http://schemas.microsoft.com/office/drawing/2014/main" id="{7AAE547C-FC67-4B2B-9AC7-FF34716589EC}"/>
+                <a16:creationId xmlns:a16="http://schemas.microsoft.com/office/drawing/2014/main" id="{CD29A08C-2F83-4413-88D6-96899F0C97C8}"/>
               </a:ext>
             </a:extLst>
           </p:cNvPr>
@@ -1920,7 +2208,7 @@
                 <a:cs typeface="+mn-lt"/>
               </a:defRPr>
             </a:defPPr>
-            <a:lvl1pPr marL="228600" indent="-228600">
+            <a:lvl1pPr marL="228600" indent="-228600" algn="l">
               <a:lnSpc>
                 <a:spcPct val="110000"/>
               </a:lnSpc>
@@ -1931,8 +2219,16 @@
                 <a:spcPts val="1200"/>
               </a:spcAft>
               <a:buChar char="•"/>
+              <a:defRPr sz="2250" b="0">
+                <a:solidFill>
+                  <a:schemeClr val="tx1"/>
+                </a:solidFill>
+                <a:latin typeface="+mn-lt"/>
+                <a:ea typeface="+mn-lt"/>
+                <a:cs typeface="+mn-lt"/>
+              </a:defRPr>
             </a:lvl1pPr>
-            <a:lvl2pPr marL="533400" indent="-228600">
+            <a:lvl2pPr marL="533400" indent="-228600" algn="l">
               <a:lnSpc>
                 <a:spcPct val="110000"/>
               </a:lnSpc>
@@ -1943,8 +2239,16 @@
                 <a:spcPts val="1200"/>
               </a:spcAft>
               <a:buChar char="•"/>
+              <a:defRPr sz="2250" b="0">
+                <a:solidFill>
+                  <a:schemeClr val="tx1"/>
+                </a:solidFill>
+                <a:latin typeface="+mn-lt"/>
+                <a:ea typeface="+mn-lt"/>
+                <a:cs typeface="+mn-lt"/>
+              </a:defRPr>
             </a:lvl2pPr>
-            <a:lvl3pPr marL="838200" indent="-228600">
+            <a:lvl3pPr marL="838200" indent="-228600" algn="l">
               <a:lnSpc>
                 <a:spcPct val="110000"/>
               </a:lnSpc>
@@ -1955,8 +2259,16 @@
                 <a:spcPts val="1200"/>
               </a:spcAft>
               <a:buChar char="•"/>
+              <a:defRPr sz="2250" b="0">
+                <a:solidFill>
+                  <a:schemeClr val="tx1"/>
+                </a:solidFill>
+                <a:latin typeface="+mn-lt"/>
+                <a:ea typeface="+mn-lt"/>
+                <a:cs typeface="+mn-lt"/>
+              </a:defRPr>
             </a:lvl3pPr>
-            <a:lvl4pPr marL="1143000" indent="-228600">
+            <a:lvl4pPr marL="1143000" indent="-228600" algn="l">
               <a:lnSpc>
                 <a:spcPct val="110000"/>
               </a:lnSpc>
@@ -1967,8 +2279,16 @@
                 <a:spcPts val="1200"/>
               </a:spcAft>
               <a:buChar char="•"/>
+              <a:defRPr sz="2250" b="0">
+                <a:solidFill>
+                  <a:schemeClr val="tx1"/>
+                </a:solidFill>
+                <a:latin typeface="+mn-lt"/>
+                <a:ea typeface="+mn-lt"/>
+                <a:cs typeface="+mn-lt"/>
+              </a:defRPr>
             </a:lvl4pPr>
-            <a:lvl5pPr marL="1447800" indent="-228600">
+            <a:lvl5pPr marL="1447800" indent="-228600" algn="l">
               <a:lnSpc>
                 <a:spcPct val="110000"/>
               </a:lnSpc>
@@ -1979,8 +2299,16 @@
                 <a:spcPts val="1200"/>
               </a:spcAft>
               <a:buChar char="•"/>
+              <a:defRPr sz="2250" b="0">
+                <a:solidFill>
+                  <a:schemeClr val="tx1"/>
+                </a:solidFill>
+                <a:latin typeface="+mn-lt"/>
+                <a:ea typeface="+mn-lt"/>
+                <a:cs typeface="+mn-lt"/>
+              </a:defRPr>
             </a:lvl5pPr>
-            <a:lvl6pPr marL="1752600" indent="-228600">
+            <a:lvl6pPr marL="1752600" indent="-228600" algn="l">
               <a:lnSpc>
                 <a:spcPct val="110000"/>
               </a:lnSpc>
@@ -1991,8 +2319,16 @@
                 <a:spcPts val="1200"/>
               </a:spcAft>
               <a:buChar char="•"/>
+              <a:defRPr sz="2250" b="0">
+                <a:solidFill>
+                  <a:schemeClr val="tx1"/>
+                </a:solidFill>
+                <a:latin typeface="+mn-lt"/>
+                <a:ea typeface="+mn-lt"/>
+                <a:cs typeface="+mn-lt"/>
+              </a:defRPr>
             </a:lvl6pPr>
-            <a:lvl7pPr marL="2057400" indent="-228600">
+            <a:lvl7pPr marL="2057400" indent="-228600" algn="l">
               <a:lnSpc>
                 <a:spcPct val="110000"/>
               </a:lnSpc>
@@ -2003,8 +2339,16 @@
                 <a:spcPts val="1200"/>
               </a:spcAft>
               <a:buChar char="•"/>
+              <a:defRPr sz="2250" b="0">
+                <a:solidFill>
+                  <a:schemeClr val="tx1"/>
+                </a:solidFill>
+                <a:latin typeface="+mn-lt"/>
+                <a:ea typeface="+mn-lt"/>
+                <a:cs typeface="+mn-lt"/>
+              </a:defRPr>
             </a:lvl7pPr>
-            <a:lvl8pPr marL="2362200" indent="-228600">
+            <a:lvl8pPr marL="2362200" indent="-228600" algn="l">
               <a:lnSpc>
                 <a:spcPct val="110000"/>
               </a:lnSpc>
@@ -2015,8 +2359,16 @@
                 <a:spcPts val="1200"/>
               </a:spcAft>
               <a:buChar char="•"/>
+              <a:defRPr sz="2250" b="0">
+                <a:solidFill>
+                  <a:schemeClr val="tx1"/>
+                </a:solidFill>
+                <a:latin typeface="+mn-lt"/>
+                <a:ea typeface="+mn-lt"/>
+                <a:cs typeface="+mn-lt"/>
+              </a:defRPr>
             </a:lvl8pPr>
-            <a:lvl9pPr marL="2667000" indent="-228600">
+            <a:lvl9pPr marL="2667000" indent="-228600" algn="l">
               <a:lnSpc>
                 <a:spcPct val="110000"/>
               </a:lnSpc>
@@ -2027,6 +2379,14 @@
                 <a:spcPts val="1200"/>
               </a:spcAft>
               <a:buChar char="•"/>
+              <a:defRPr sz="2250" b="0">
+                <a:solidFill>
+                  <a:schemeClr val="tx1"/>
+                </a:solidFill>
+                <a:latin typeface="+mn-lt"/>
+                <a:ea typeface="+mn-lt"/>
+                <a:cs typeface="+mn-lt"/>
+              </a:defRPr>
             </a:lvl9pPr>
           </a:lstStyle>
           <a:p xmlns:a="http://schemas.openxmlformats.org/drawingml/2006/main"/>
@@ -2054,7 +2414,7 @@
           <p:cNvPr id="4" name="Title">
             <a:extLst xmlns:a="http://schemas.openxmlformats.org/drawingml/2006/main">
               <a:ext uri="{FF2B5EF4-FFF2-40B4-BE49-F238E27FC236}">
-                <a16:creationId xmlns:a16="http://schemas.microsoft.com/office/drawing/2014/main" id="{BED10F5E-32A9-4C53-A638-413DF5E6C252}"/>
+                <a16:creationId xmlns:a16="http://schemas.microsoft.com/office/drawing/2014/main" id="{117F0052-FF56-4EFD-B9F5-24584A063FC5}"/>
               </a:ext>
             </a:extLst>
           </p:cNvPr>
@@ -2094,7 +2454,7 @@
                 <a:cs typeface="+mj-lt"/>
               </a:defRPr>
             </a:defPPr>
-            <a:lvl1pPr marL="0" indent="0">
+            <a:lvl1pPr marL="0" indent="0" algn="l">
               <a:lnSpc>
                 <a:spcPct val="110000"/>
               </a:lnSpc>
@@ -2105,8 +2465,16 @@
                 <a:spcPts val="0"/>
               </a:spcAft>
               <a:buNone/>
+              <a:defRPr sz="3300" b="1">
+                <a:solidFill>
+                  <a:schemeClr val="tx1"/>
+                </a:solidFill>
+                <a:latin typeface="+mj-lt"/>
+                <a:ea typeface="+mj-lt"/>
+                <a:cs typeface="+mj-lt"/>
+              </a:defRPr>
             </a:lvl1pPr>
-            <a:lvl2pPr marL="0" indent="0">
+            <a:lvl2pPr marL="0" indent="0" algn="l">
               <a:lnSpc>
                 <a:spcPct val="110000"/>
               </a:lnSpc>
@@ -2117,8 +2485,16 @@
                 <a:spcPts val="0"/>
               </a:spcAft>
               <a:buNone/>
+              <a:defRPr sz="3300" b="1">
+                <a:solidFill>
+                  <a:schemeClr val="tx1"/>
+                </a:solidFill>
+                <a:latin typeface="+mj-lt"/>
+                <a:ea typeface="+mj-lt"/>
+                <a:cs typeface="+mj-lt"/>
+              </a:defRPr>
             </a:lvl2pPr>
-            <a:lvl3pPr marL="0" indent="0">
+            <a:lvl3pPr marL="0" indent="0" algn="l">
               <a:lnSpc>
                 <a:spcPct val="110000"/>
               </a:lnSpc>
@@ -2129,8 +2505,16 @@
                 <a:spcPts val="0"/>
               </a:spcAft>
               <a:buNone/>
+              <a:defRPr sz="3300" b="1">
+                <a:solidFill>
+                  <a:schemeClr val="tx1"/>
+                </a:solidFill>
+                <a:latin typeface="+mj-lt"/>
+                <a:ea typeface="+mj-lt"/>
+                <a:cs typeface="+mj-lt"/>
+              </a:defRPr>
             </a:lvl3pPr>
-            <a:lvl4pPr marL="0" indent="0">
+            <a:lvl4pPr marL="0" indent="0" algn="l">
               <a:lnSpc>
                 <a:spcPct val="110000"/>
               </a:lnSpc>
@@ -2141,8 +2525,16 @@
                 <a:spcPts val="0"/>
               </a:spcAft>
               <a:buNone/>
+              <a:defRPr sz="3300" b="1">
+                <a:solidFill>
+                  <a:schemeClr val="tx1"/>
+                </a:solidFill>
+                <a:latin typeface="+mj-lt"/>
+                <a:ea typeface="+mj-lt"/>
+                <a:cs typeface="+mj-lt"/>
+              </a:defRPr>
             </a:lvl4pPr>
-            <a:lvl5pPr marL="0" indent="0">
+            <a:lvl5pPr marL="0" indent="0" algn="l">
               <a:lnSpc>
                 <a:spcPct val="110000"/>
               </a:lnSpc>
@@ -2153,8 +2545,16 @@
                 <a:spcPts val="0"/>
               </a:spcAft>
               <a:buNone/>
+              <a:defRPr sz="3300" b="1">
+                <a:solidFill>
+                  <a:schemeClr val="tx1"/>
+                </a:solidFill>
+                <a:latin typeface="+mj-lt"/>
+                <a:ea typeface="+mj-lt"/>
+                <a:cs typeface="+mj-lt"/>
+              </a:defRPr>
             </a:lvl5pPr>
-            <a:lvl6pPr marL="0" indent="0">
+            <a:lvl6pPr marL="0" indent="0" algn="l">
               <a:lnSpc>
                 <a:spcPct val="110000"/>
               </a:lnSpc>
@@ -2165,8 +2565,16 @@
                 <a:spcPts val="0"/>
               </a:spcAft>
               <a:buNone/>
+              <a:defRPr sz="3300" b="1">
+                <a:solidFill>
+                  <a:schemeClr val="tx1"/>
+                </a:solidFill>
+                <a:latin typeface="+mj-lt"/>
+                <a:ea typeface="+mj-lt"/>
+                <a:cs typeface="+mj-lt"/>
+              </a:defRPr>
             </a:lvl6pPr>
-            <a:lvl7pPr marL="0" indent="0">
+            <a:lvl7pPr marL="0" indent="0" algn="l">
               <a:lnSpc>
                 <a:spcPct val="110000"/>
               </a:lnSpc>
@@ -2177,8 +2585,16 @@
                 <a:spcPts val="0"/>
               </a:spcAft>
               <a:buNone/>
+              <a:defRPr sz="3300" b="1">
+                <a:solidFill>
+                  <a:schemeClr val="tx1"/>
+                </a:solidFill>
+                <a:latin typeface="+mj-lt"/>
+                <a:ea typeface="+mj-lt"/>
+                <a:cs typeface="+mj-lt"/>
+              </a:defRPr>
             </a:lvl7pPr>
-            <a:lvl8pPr marL="0" indent="0">
+            <a:lvl8pPr marL="0" indent="0" algn="l">
               <a:lnSpc>
                 <a:spcPct val="110000"/>
               </a:lnSpc>
@@ -2189,8 +2605,16 @@
                 <a:spcPts val="0"/>
               </a:spcAft>
               <a:buNone/>
+              <a:defRPr sz="3300" b="1">
+                <a:solidFill>
+                  <a:schemeClr val="tx1"/>
+                </a:solidFill>
+                <a:latin typeface="+mj-lt"/>
+                <a:ea typeface="+mj-lt"/>
+                <a:cs typeface="+mj-lt"/>
+              </a:defRPr>
             </a:lvl8pPr>
-            <a:lvl9pPr marL="0" indent="0">
+            <a:lvl9pPr marL="0" indent="0" algn="l">
               <a:lnSpc>
                 <a:spcPct val="110000"/>
               </a:lnSpc>
@@ -2201,6 +2625,14 @@
                 <a:spcPts val="0"/>
               </a:spcAft>
               <a:buNone/>
+              <a:defRPr sz="3300" b="1">
+                <a:solidFill>
+                  <a:schemeClr val="tx1"/>
+                </a:solidFill>
+                <a:latin typeface="+mj-lt"/>
+                <a:ea typeface="+mj-lt"/>
+                <a:cs typeface="+mj-lt"/>
+              </a:defRPr>
             </a:lvl9pPr>
           </a:lstStyle>
           <a:p xmlns:a="http://schemas.openxmlformats.org/drawingml/2006/main"/>
@@ -2211,7 +2643,7 @@
           <p:cNvPr id="2" name="Left column">
             <a:extLst xmlns:a="http://schemas.openxmlformats.org/drawingml/2006/main">
               <a:ext uri="{FF2B5EF4-FFF2-40B4-BE49-F238E27FC236}">
-                <a16:creationId xmlns:a16="http://schemas.microsoft.com/office/drawing/2014/main" id="{997C9C9C-AE83-4B57-B27F-128F8862495E}"/>
+                <a16:creationId xmlns:a16="http://schemas.microsoft.com/office/drawing/2014/main" id="{7DC8B87B-C262-4F1C-99E9-BAB7B205093C}"/>
               </a:ext>
             </a:extLst>
           </p:cNvPr>
@@ -2251,7 +2683,7 @@
                 <a:cs typeface="+mn-lt"/>
               </a:defRPr>
             </a:defPPr>
-            <a:lvl1pPr marL="228600" indent="-228600">
+            <a:lvl1pPr marL="228600" indent="-228600" algn="l">
               <a:lnSpc>
                 <a:spcPct val="110000"/>
               </a:lnSpc>
@@ -2262,8 +2694,16 @@
                 <a:spcPts val="1200"/>
               </a:spcAft>
               <a:buChar char="•"/>
+              <a:defRPr sz="2100" b="0">
+                <a:solidFill>
+                  <a:schemeClr val="tx1"/>
+                </a:solidFill>
+                <a:latin typeface="+mn-lt"/>
+                <a:ea typeface="+mn-lt"/>
+                <a:cs typeface="+mn-lt"/>
+              </a:defRPr>
             </a:lvl1pPr>
-            <a:lvl2pPr marL="533400" indent="-228600">
+            <a:lvl2pPr marL="533400" indent="-228600" algn="l">
               <a:lnSpc>
                 <a:spcPct val="110000"/>
               </a:lnSpc>
@@ -2274,8 +2714,16 @@
                 <a:spcPts val="1200"/>
               </a:spcAft>
               <a:buChar char="•"/>
+              <a:defRPr sz="2100" b="0">
+                <a:solidFill>
+                  <a:schemeClr val="tx1"/>
+                </a:solidFill>
+                <a:latin typeface="+mn-lt"/>
+                <a:ea typeface="+mn-lt"/>
+                <a:cs typeface="+mn-lt"/>
+              </a:defRPr>
             </a:lvl2pPr>
-            <a:lvl3pPr marL="838200" indent="-228600">
+            <a:lvl3pPr marL="838200" indent="-228600" algn="l">
               <a:lnSpc>
                 <a:spcPct val="110000"/>
               </a:lnSpc>
@@ -2286,8 +2734,16 @@
                 <a:spcPts val="1200"/>
               </a:spcAft>
               <a:buChar char="•"/>
+              <a:defRPr sz="2100" b="0">
+                <a:solidFill>
+                  <a:schemeClr val="tx1"/>
+                </a:solidFill>
+                <a:latin typeface="+mn-lt"/>
+                <a:ea typeface="+mn-lt"/>
+                <a:cs typeface="+mn-lt"/>
+              </a:defRPr>
             </a:lvl3pPr>
-            <a:lvl4pPr marL="1143000" indent="-228600">
+            <a:lvl4pPr marL="1143000" indent="-228600" algn="l">
               <a:lnSpc>
                 <a:spcPct val="110000"/>
               </a:lnSpc>
@@ -2298,8 +2754,16 @@
                 <a:spcPts val="1200"/>
               </a:spcAft>
               <a:buChar char="•"/>
+              <a:defRPr sz="2100" b="0">
+                <a:solidFill>
+                  <a:schemeClr val="tx1"/>
+                </a:solidFill>
+                <a:latin typeface="+mn-lt"/>
+                <a:ea typeface="+mn-lt"/>
+                <a:cs typeface="+mn-lt"/>
+              </a:defRPr>
             </a:lvl4pPr>
-            <a:lvl5pPr marL="1447800" indent="-228600">
+            <a:lvl5pPr marL="1447800" indent="-228600" algn="l">
               <a:lnSpc>
                 <a:spcPct val="110000"/>
               </a:lnSpc>
@@ -2310,8 +2774,16 @@
                 <a:spcPts val="1200"/>
               </a:spcAft>
               <a:buChar char="•"/>
+              <a:defRPr sz="2100" b="0">
+                <a:solidFill>
+                  <a:schemeClr val="tx1"/>
+                </a:solidFill>
+                <a:latin typeface="+mn-lt"/>
+                <a:ea typeface="+mn-lt"/>
+                <a:cs typeface="+mn-lt"/>
+              </a:defRPr>
             </a:lvl5pPr>
-            <a:lvl6pPr marL="1752600" indent="-228600">
+            <a:lvl6pPr marL="1752600" indent="-228600" algn="l">
               <a:lnSpc>
                 <a:spcPct val="110000"/>
               </a:lnSpc>
@@ -2322,8 +2794,16 @@
                 <a:spcPts val="1200"/>
               </a:spcAft>
               <a:buChar char="•"/>
+              <a:defRPr sz="2100" b="0">
+                <a:solidFill>
+                  <a:schemeClr val="tx1"/>
+                </a:solidFill>
+                <a:latin typeface="+mn-lt"/>
+                <a:ea typeface="+mn-lt"/>
+                <a:cs typeface="+mn-lt"/>
+              </a:defRPr>
             </a:lvl6pPr>
-            <a:lvl7pPr marL="2057400" indent="-228600">
+            <a:lvl7pPr marL="2057400" indent="-228600" algn="l">
               <a:lnSpc>
                 <a:spcPct val="110000"/>
               </a:lnSpc>
@@ -2334,8 +2814,16 @@
                 <a:spcPts val="1200"/>
               </a:spcAft>
               <a:buChar char="•"/>
+              <a:defRPr sz="2100" b="0">
+                <a:solidFill>
+                  <a:schemeClr val="tx1"/>
+                </a:solidFill>
+                <a:latin typeface="+mn-lt"/>
+                <a:ea typeface="+mn-lt"/>
+                <a:cs typeface="+mn-lt"/>
+              </a:defRPr>
             </a:lvl7pPr>
-            <a:lvl8pPr marL="2362200" indent="-228600">
+            <a:lvl8pPr marL="2362200" indent="-228600" algn="l">
               <a:lnSpc>
                 <a:spcPct val="110000"/>
               </a:lnSpc>
@@ -2346,8 +2834,16 @@
                 <a:spcPts val="1200"/>
               </a:spcAft>
               <a:buChar char="•"/>
+              <a:defRPr sz="2100" b="0">
+                <a:solidFill>
+                  <a:schemeClr val="tx1"/>
+                </a:solidFill>
+                <a:latin typeface="+mn-lt"/>
+                <a:ea typeface="+mn-lt"/>
+                <a:cs typeface="+mn-lt"/>
+              </a:defRPr>
             </a:lvl8pPr>
-            <a:lvl9pPr marL="2667000" indent="-228600">
+            <a:lvl9pPr marL="2667000" indent="-228600" algn="l">
               <a:lnSpc>
                 <a:spcPct val="110000"/>
               </a:lnSpc>
@@ -2358,6 +2854,14 @@
                 <a:spcPts val="1200"/>
               </a:spcAft>
               <a:buChar char="•"/>
+              <a:defRPr sz="2100" b="0">
+                <a:solidFill>
+                  <a:schemeClr val="tx1"/>
+                </a:solidFill>
+                <a:latin typeface="+mn-lt"/>
+                <a:ea typeface="+mn-lt"/>
+                <a:cs typeface="+mn-lt"/>
+              </a:defRPr>
             </a:lvl9pPr>
           </a:lstStyle>
           <a:p xmlns:a="http://schemas.openxmlformats.org/drawingml/2006/main"/>
@@ -2368,7 +2872,7 @@
           <p:cNvPr id="3" name="Right column">
             <a:extLst xmlns:a="http://schemas.openxmlformats.org/drawingml/2006/main">
               <a:ext uri="{FF2B5EF4-FFF2-40B4-BE49-F238E27FC236}">
-                <a16:creationId xmlns:a16="http://schemas.microsoft.com/office/drawing/2014/main" id="{47424E82-7400-451F-806D-9282FB892A4B}"/>
+                <a16:creationId xmlns:a16="http://schemas.microsoft.com/office/drawing/2014/main" id="{D15F0896-ADEC-46A5-8940-E19DC8E310B1}"/>
               </a:ext>
             </a:extLst>
           </p:cNvPr>
@@ -2408,7 +2912,7 @@
                 <a:cs typeface="+mn-lt"/>
               </a:defRPr>
             </a:defPPr>
-            <a:lvl1pPr marL="228600" indent="-228600">
+            <a:lvl1pPr marL="228600" indent="-228600" algn="l">
               <a:lnSpc>
                 <a:spcPct val="110000"/>
               </a:lnSpc>
@@ -2419,8 +2923,16 @@
                 <a:spcPts val="1200"/>
               </a:spcAft>
               <a:buChar char="•"/>
+              <a:defRPr sz="2100" b="0">
+                <a:solidFill>
+                  <a:schemeClr val="tx1"/>
+                </a:solidFill>
+                <a:latin typeface="+mn-lt"/>
+                <a:ea typeface="+mn-lt"/>
+                <a:cs typeface="+mn-lt"/>
+              </a:defRPr>
             </a:lvl1pPr>
-            <a:lvl2pPr marL="533400" indent="-228600">
+            <a:lvl2pPr marL="533400" indent="-228600" algn="l">
               <a:lnSpc>
                 <a:spcPct val="110000"/>
               </a:lnSpc>
@@ -2431,8 +2943,16 @@
                 <a:spcPts val="1200"/>
               </a:spcAft>
               <a:buChar char="•"/>
+              <a:defRPr sz="2100" b="0">
+                <a:solidFill>
+                  <a:schemeClr val="tx1"/>
+                </a:solidFill>
+                <a:latin typeface="+mn-lt"/>
+                <a:ea typeface="+mn-lt"/>
+                <a:cs typeface="+mn-lt"/>
+              </a:defRPr>
             </a:lvl2pPr>
-            <a:lvl3pPr marL="838200" indent="-228600">
+            <a:lvl3pPr marL="838200" indent="-228600" algn="l">
               <a:lnSpc>
                 <a:spcPct val="110000"/>
               </a:lnSpc>
@@ -2443,8 +2963,16 @@
                 <a:spcPts val="1200"/>
               </a:spcAft>
               <a:buChar char="•"/>
+              <a:defRPr sz="2100" b="0">
+                <a:solidFill>
+                  <a:schemeClr val="tx1"/>
+                </a:solidFill>
+                <a:latin typeface="+mn-lt"/>
+                <a:ea typeface="+mn-lt"/>
+                <a:cs typeface="+mn-lt"/>
+              </a:defRPr>
             </a:lvl3pPr>
-            <a:lvl4pPr marL="1143000" indent="-228600">
+            <a:lvl4pPr marL="1143000" indent="-228600" algn="l">
               <a:lnSpc>
                 <a:spcPct val="110000"/>
               </a:lnSpc>
@@ -2455,8 +2983,16 @@
                 <a:spcPts val="1200"/>
               </a:spcAft>
               <a:buChar char="•"/>
+              <a:defRPr sz="2100" b="0">
+                <a:solidFill>
+                  <a:schemeClr val="tx1"/>
+                </a:solidFill>
+                <a:latin typeface="+mn-lt"/>
+                <a:ea typeface="+mn-lt"/>
+                <a:cs typeface="+mn-lt"/>
+              </a:defRPr>
             </a:lvl4pPr>
-            <a:lvl5pPr marL="1447800" indent="-228600">
+            <a:lvl5pPr marL="1447800" indent="-228600" algn="l">
               <a:lnSpc>
                 <a:spcPct val="110000"/>
               </a:lnSpc>
@@ -2467,8 +3003,16 @@
                 <a:spcPts val="1200"/>
               </a:spcAft>
               <a:buChar char="•"/>
+              <a:defRPr sz="2100" b="0">
+                <a:solidFill>
+                  <a:schemeClr val="tx1"/>
+                </a:solidFill>
+                <a:latin typeface="+mn-lt"/>
+                <a:ea typeface="+mn-lt"/>
+                <a:cs typeface="+mn-lt"/>
+              </a:defRPr>
             </a:lvl5pPr>
-            <a:lvl6pPr marL="1752600" indent="-228600">
+            <a:lvl6pPr marL="1752600" indent="-228600" algn="l">
               <a:lnSpc>
                 <a:spcPct val="110000"/>
               </a:lnSpc>
@@ -2479,8 +3023,16 @@
                 <a:spcPts val="1200"/>
               </a:spcAft>
               <a:buChar char="•"/>
+              <a:defRPr sz="2100" b="0">
+                <a:solidFill>
+                  <a:schemeClr val="tx1"/>
+                </a:solidFill>
+                <a:latin typeface="+mn-lt"/>
+                <a:ea typeface="+mn-lt"/>
+                <a:cs typeface="+mn-lt"/>
+              </a:defRPr>
             </a:lvl6pPr>
-            <a:lvl7pPr marL="2057400" indent="-228600">
+            <a:lvl7pPr marL="2057400" indent="-228600" algn="l">
               <a:lnSpc>
                 <a:spcPct val="110000"/>
               </a:lnSpc>
@@ -2491,8 +3043,16 @@
                 <a:spcPts val="1200"/>
               </a:spcAft>
               <a:buChar char="•"/>
+              <a:defRPr sz="2100" b="0">
+                <a:solidFill>
+                  <a:schemeClr val="tx1"/>
+                </a:solidFill>
+                <a:latin typeface="+mn-lt"/>
+                <a:ea typeface="+mn-lt"/>
+                <a:cs typeface="+mn-lt"/>
+              </a:defRPr>
             </a:lvl7pPr>
-            <a:lvl8pPr marL="2362200" indent="-228600">
+            <a:lvl8pPr marL="2362200" indent="-228600" algn="l">
               <a:lnSpc>
                 <a:spcPct val="110000"/>
               </a:lnSpc>
@@ -2503,8 +3063,16 @@
                 <a:spcPts val="1200"/>
               </a:spcAft>
               <a:buChar char="•"/>
+              <a:defRPr sz="2100" b="0">
+                <a:solidFill>
+                  <a:schemeClr val="tx1"/>
+                </a:solidFill>
+                <a:latin typeface="+mn-lt"/>
+                <a:ea typeface="+mn-lt"/>
+                <a:cs typeface="+mn-lt"/>
+              </a:defRPr>
             </a:lvl8pPr>
-            <a:lvl9pPr marL="2667000" indent="-228600">
+            <a:lvl9pPr marL="2667000" indent="-228600" algn="l">
               <a:lnSpc>
                 <a:spcPct val="110000"/>
               </a:lnSpc>
@@ -2515,6 +3083,14 @@
                 <a:spcPts val="1200"/>
               </a:spcAft>
               <a:buChar char="•"/>
+              <a:defRPr sz="2100" b="0">
+                <a:solidFill>
+                  <a:schemeClr val="tx1"/>
+                </a:solidFill>
+                <a:latin typeface="+mn-lt"/>
+                <a:ea typeface="+mn-lt"/>
+                <a:cs typeface="+mn-lt"/>
+              </a:defRPr>
             </a:lvl9pPr>
           </a:lstStyle>
           <a:p xmlns:a="http://schemas.openxmlformats.org/drawingml/2006/main"/>
@@ -2542,7 +3118,7 @@
           <p:cNvPr id="3" name="Title">
             <a:extLst xmlns:a="http://schemas.openxmlformats.org/drawingml/2006/main">
               <a:ext uri="{FF2B5EF4-FFF2-40B4-BE49-F238E27FC236}">
-                <a16:creationId xmlns:a16="http://schemas.microsoft.com/office/drawing/2014/main" id="{A59831FD-21A6-4C25-AB7A-A8657E8113D6}"/>
+                <a16:creationId xmlns:a16="http://schemas.microsoft.com/office/drawing/2014/main" id="{3F21BB8D-24EA-440A-8BB6-F1109C99D397}"/>
               </a:ext>
             </a:extLst>
           </p:cNvPr>
@@ -2582,7 +3158,7 @@
                 <a:cs typeface="+mj-lt"/>
               </a:defRPr>
             </a:defPPr>
-            <a:lvl1pPr marL="0" indent="0">
+            <a:lvl1pPr marL="0" indent="0" algn="l">
               <a:lnSpc>
                 <a:spcPct val="110000"/>
               </a:lnSpc>
@@ -2593,8 +3169,16 @@
                 <a:spcPts val="0"/>
               </a:spcAft>
               <a:buNone/>
+              <a:defRPr sz="3300" b="1">
+                <a:solidFill>
+                  <a:schemeClr val="tx1"/>
+                </a:solidFill>
+                <a:latin typeface="+mj-lt"/>
+                <a:ea typeface="+mj-lt"/>
+                <a:cs typeface="+mj-lt"/>
+              </a:defRPr>
             </a:lvl1pPr>
-            <a:lvl2pPr marL="0" indent="0">
+            <a:lvl2pPr marL="0" indent="0" algn="l">
               <a:lnSpc>
                 <a:spcPct val="110000"/>
               </a:lnSpc>
@@ -2605,8 +3189,16 @@
                 <a:spcPts val="0"/>
               </a:spcAft>
               <a:buNone/>
+              <a:defRPr sz="3300" b="1">
+                <a:solidFill>
+                  <a:schemeClr val="tx1"/>
+                </a:solidFill>
+                <a:latin typeface="+mj-lt"/>
+                <a:ea typeface="+mj-lt"/>
+                <a:cs typeface="+mj-lt"/>
+              </a:defRPr>
             </a:lvl2pPr>
-            <a:lvl3pPr marL="0" indent="0">
+            <a:lvl3pPr marL="0" indent="0" algn="l">
               <a:lnSpc>
                 <a:spcPct val="110000"/>
               </a:lnSpc>
@@ -2617,8 +3209,16 @@
                 <a:spcPts val="0"/>
               </a:spcAft>
               <a:buNone/>
+              <a:defRPr sz="3300" b="1">
+                <a:solidFill>
+                  <a:schemeClr val="tx1"/>
+                </a:solidFill>
+                <a:latin typeface="+mj-lt"/>
+                <a:ea typeface="+mj-lt"/>
+                <a:cs typeface="+mj-lt"/>
+              </a:defRPr>
             </a:lvl3pPr>
-            <a:lvl4pPr marL="0" indent="0">
+            <a:lvl4pPr marL="0" indent="0" algn="l">
               <a:lnSpc>
                 <a:spcPct val="110000"/>
               </a:lnSpc>
@@ -2629,8 +3229,16 @@
                 <a:spcPts val="0"/>
               </a:spcAft>
               <a:buNone/>
+              <a:defRPr sz="3300" b="1">
+                <a:solidFill>
+                  <a:schemeClr val="tx1"/>
+                </a:solidFill>
+                <a:latin typeface="+mj-lt"/>
+                <a:ea typeface="+mj-lt"/>
+                <a:cs typeface="+mj-lt"/>
+              </a:defRPr>
             </a:lvl4pPr>
-            <a:lvl5pPr marL="0" indent="0">
+            <a:lvl5pPr marL="0" indent="0" algn="l">
               <a:lnSpc>
                 <a:spcPct val="110000"/>
               </a:lnSpc>
@@ -2641,8 +3249,16 @@
                 <a:spcPts val="0"/>
               </a:spcAft>
               <a:buNone/>
+              <a:defRPr sz="3300" b="1">
+                <a:solidFill>
+                  <a:schemeClr val="tx1"/>
+                </a:solidFill>
+                <a:latin typeface="+mj-lt"/>
+                <a:ea typeface="+mj-lt"/>
+                <a:cs typeface="+mj-lt"/>
+              </a:defRPr>
             </a:lvl5pPr>
-            <a:lvl6pPr marL="0" indent="0">
+            <a:lvl6pPr marL="0" indent="0" algn="l">
               <a:lnSpc>
                 <a:spcPct val="110000"/>
               </a:lnSpc>
@@ -2653,8 +3269,16 @@
                 <a:spcPts val="0"/>
               </a:spcAft>
               <a:buNone/>
+              <a:defRPr sz="3300" b="1">
+                <a:solidFill>
+                  <a:schemeClr val="tx1"/>
+                </a:solidFill>
+                <a:latin typeface="+mj-lt"/>
+                <a:ea typeface="+mj-lt"/>
+                <a:cs typeface="+mj-lt"/>
+              </a:defRPr>
             </a:lvl6pPr>
-            <a:lvl7pPr marL="0" indent="0">
+            <a:lvl7pPr marL="0" indent="0" algn="l">
               <a:lnSpc>
                 <a:spcPct val="110000"/>
               </a:lnSpc>
@@ -2665,8 +3289,16 @@
                 <a:spcPts val="0"/>
               </a:spcAft>
               <a:buNone/>
+              <a:defRPr sz="3300" b="1">
+                <a:solidFill>
+                  <a:schemeClr val="tx1"/>
+                </a:solidFill>
+                <a:latin typeface="+mj-lt"/>
+                <a:ea typeface="+mj-lt"/>
+                <a:cs typeface="+mj-lt"/>
+              </a:defRPr>
             </a:lvl7pPr>
-            <a:lvl8pPr marL="0" indent="0">
+            <a:lvl8pPr marL="0" indent="0" algn="l">
               <a:lnSpc>
                 <a:spcPct val="110000"/>
               </a:lnSpc>
@@ -2677,8 +3309,16 @@
                 <a:spcPts val="0"/>
               </a:spcAft>
               <a:buNone/>
+              <a:defRPr sz="3300" b="1">
+                <a:solidFill>
+                  <a:schemeClr val="tx1"/>
+                </a:solidFill>
+                <a:latin typeface="+mj-lt"/>
+                <a:ea typeface="+mj-lt"/>
+                <a:cs typeface="+mj-lt"/>
+              </a:defRPr>
             </a:lvl8pPr>
-            <a:lvl9pPr marL="0" indent="0">
+            <a:lvl9pPr marL="0" indent="0" algn="l">
               <a:lnSpc>
                 <a:spcPct val="110000"/>
               </a:lnSpc>
@@ -2689,6 +3329,14 @@
                 <a:spcPts val="0"/>
               </a:spcAft>
               <a:buNone/>
+              <a:defRPr sz="3300" b="1">
+                <a:solidFill>
+                  <a:schemeClr val="tx1"/>
+                </a:solidFill>
+                <a:latin typeface="+mj-lt"/>
+                <a:ea typeface="+mj-lt"/>
+                <a:cs typeface="+mj-lt"/>
+              </a:defRPr>
             </a:lvl9pPr>
           </a:lstStyle>
           <a:p xmlns:a="http://schemas.openxmlformats.org/drawingml/2006/main"/>
@@ -2699,7 +3347,7 @@
           <p:cNvPr id="2" name="Left column">
             <a:extLst xmlns:a="http://schemas.openxmlformats.org/drawingml/2006/main">
               <a:ext uri="{FF2B5EF4-FFF2-40B4-BE49-F238E27FC236}">
-                <a16:creationId xmlns:a16="http://schemas.microsoft.com/office/drawing/2014/main" id="{6F159180-EF0F-463E-8869-DA2231930F51}"/>
+                <a16:creationId xmlns:a16="http://schemas.microsoft.com/office/drawing/2014/main" id="{CD8DAF9D-C4E7-413C-9AFE-7BE8E0136E41}"/>
               </a:ext>
             </a:extLst>
           </p:cNvPr>
@@ -2739,7 +3387,7 @@
                 <a:cs typeface="+mn-lt"/>
               </a:defRPr>
             </a:defPPr>
-            <a:lvl1pPr marL="228600" indent="-228600">
+            <a:lvl1pPr marL="228600" indent="-228600" algn="l">
               <a:lnSpc>
                 <a:spcPct val="110000"/>
               </a:lnSpc>
@@ -2750,8 +3398,16 @@
                 <a:spcPts val="1200"/>
               </a:spcAft>
               <a:buChar char="•"/>
+              <a:defRPr sz="2250" b="0">
+                <a:solidFill>
+                  <a:schemeClr val="tx1"/>
+                </a:solidFill>
+                <a:latin typeface="+mn-lt"/>
+                <a:ea typeface="+mn-lt"/>
+                <a:cs typeface="+mn-lt"/>
+              </a:defRPr>
             </a:lvl1pPr>
-            <a:lvl2pPr marL="533400" indent="-228600">
+            <a:lvl2pPr marL="533400" indent="-228600" algn="l">
               <a:lnSpc>
                 <a:spcPct val="110000"/>
               </a:lnSpc>
@@ -2762,8 +3418,16 @@
                 <a:spcPts val="1200"/>
               </a:spcAft>
               <a:buChar char="•"/>
+              <a:defRPr sz="2250" b="0">
+                <a:solidFill>
+                  <a:schemeClr val="tx1"/>
+                </a:solidFill>
+                <a:latin typeface="+mn-lt"/>
+                <a:ea typeface="+mn-lt"/>
+                <a:cs typeface="+mn-lt"/>
+              </a:defRPr>
             </a:lvl2pPr>
-            <a:lvl3pPr marL="838200" indent="-228600">
+            <a:lvl3pPr marL="838200" indent="-228600" algn="l">
               <a:lnSpc>
                 <a:spcPct val="110000"/>
               </a:lnSpc>
@@ -2774,8 +3438,16 @@
                 <a:spcPts val="1200"/>
               </a:spcAft>
               <a:buChar char="•"/>
+              <a:defRPr sz="2250" b="0">
+                <a:solidFill>
+                  <a:schemeClr val="tx1"/>
+                </a:solidFill>
+                <a:latin typeface="+mn-lt"/>
+                <a:ea typeface="+mn-lt"/>
+                <a:cs typeface="+mn-lt"/>
+              </a:defRPr>
             </a:lvl3pPr>
-            <a:lvl4pPr marL="1143000" indent="-228600">
+            <a:lvl4pPr marL="1143000" indent="-228600" algn="l">
               <a:lnSpc>
                 <a:spcPct val="110000"/>
               </a:lnSpc>
@@ -2786,8 +3458,16 @@
                 <a:spcPts val="1200"/>
               </a:spcAft>
               <a:buChar char="•"/>
+              <a:defRPr sz="2250" b="0">
+                <a:solidFill>
+                  <a:schemeClr val="tx1"/>
+                </a:solidFill>
+                <a:latin typeface="+mn-lt"/>
+                <a:ea typeface="+mn-lt"/>
+                <a:cs typeface="+mn-lt"/>
+              </a:defRPr>
             </a:lvl4pPr>
-            <a:lvl5pPr marL="1447800" indent="-228600">
+            <a:lvl5pPr marL="1447800" indent="-228600" algn="l">
               <a:lnSpc>
                 <a:spcPct val="110000"/>
               </a:lnSpc>
@@ -2798,8 +3478,16 @@
                 <a:spcPts val="1200"/>
               </a:spcAft>
               <a:buChar char="•"/>
+              <a:defRPr sz="2250" b="0">
+                <a:solidFill>
+                  <a:schemeClr val="tx1"/>
+                </a:solidFill>
+                <a:latin typeface="+mn-lt"/>
+                <a:ea typeface="+mn-lt"/>
+                <a:cs typeface="+mn-lt"/>
+              </a:defRPr>
             </a:lvl5pPr>
-            <a:lvl6pPr marL="1752600" indent="-228600">
+            <a:lvl6pPr marL="1752600" indent="-228600" algn="l">
               <a:lnSpc>
                 <a:spcPct val="110000"/>
               </a:lnSpc>
@@ -2810,8 +3498,16 @@
                 <a:spcPts val="1200"/>
               </a:spcAft>
               <a:buChar char="•"/>
+              <a:defRPr sz="2250" b="0">
+                <a:solidFill>
+                  <a:schemeClr val="tx1"/>
+                </a:solidFill>
+                <a:latin typeface="+mn-lt"/>
+                <a:ea typeface="+mn-lt"/>
+                <a:cs typeface="+mn-lt"/>
+              </a:defRPr>
             </a:lvl6pPr>
-            <a:lvl7pPr marL="2057400" indent="-228600">
+            <a:lvl7pPr marL="2057400" indent="-228600" algn="l">
               <a:lnSpc>
                 <a:spcPct val="110000"/>
               </a:lnSpc>
@@ -2822,8 +3518,16 @@
                 <a:spcPts val="1200"/>
               </a:spcAft>
               <a:buChar char="•"/>
+              <a:defRPr sz="2250" b="0">
+                <a:solidFill>
+                  <a:schemeClr val="tx1"/>
+                </a:solidFill>
+                <a:latin typeface="+mn-lt"/>
+                <a:ea typeface="+mn-lt"/>
+                <a:cs typeface="+mn-lt"/>
+              </a:defRPr>
             </a:lvl7pPr>
-            <a:lvl8pPr marL="2362200" indent="-228600">
+            <a:lvl8pPr marL="2362200" indent="-228600" algn="l">
               <a:lnSpc>
                 <a:spcPct val="110000"/>
               </a:lnSpc>
@@ -2834,8 +3538,16 @@
                 <a:spcPts val="1200"/>
               </a:spcAft>
               <a:buChar char="•"/>
+              <a:defRPr sz="2250" b="0">
+                <a:solidFill>
+                  <a:schemeClr val="tx1"/>
+                </a:solidFill>
+                <a:latin typeface="+mn-lt"/>
+                <a:ea typeface="+mn-lt"/>
+                <a:cs typeface="+mn-lt"/>
+              </a:defRPr>
             </a:lvl8pPr>
-            <a:lvl9pPr marL="2667000" indent="-228600">
+            <a:lvl9pPr marL="2667000" indent="-228600" algn="l">
               <a:lnSpc>
                 <a:spcPct val="110000"/>
               </a:lnSpc>
@@ -2846,6 +3558,14 @@
                 <a:spcPts val="1200"/>
               </a:spcAft>
               <a:buChar char="•"/>
+              <a:defRPr sz="2250" b="0">
+                <a:solidFill>
+                  <a:schemeClr val="tx1"/>
+                </a:solidFill>
+                <a:latin typeface="+mn-lt"/>
+                <a:ea typeface="+mn-lt"/>
+                <a:cs typeface="+mn-lt"/>
+              </a:defRPr>
             </a:lvl9pPr>
           </a:lstStyle>
           <a:p xmlns:a="http://schemas.openxmlformats.org/drawingml/2006/main"/>
@@ -2894,12 +3614,12 @@
   </p:cSld>
   <p:clrMap bg1="lt1" tx1="dk1" bg2="lt2" tx2="dk2" accent1="accent1" accent2="accent2" accent3="accent3" accent4="accent4" accent5="accent5" accent6="accent6" hlink="hlink" folHlink="folHlink"/>
   <p:sldLayoutIdLst>
-    <p:sldLayoutId xmlns:r="http://schemas.openxmlformats.org/officeDocument/2006/relationships" id="2147483649" r:id="Ref7bf9a913a14bdd"/>
-    <p:sldLayoutId xmlns:r="http://schemas.openxmlformats.org/officeDocument/2006/relationships" id="2147483650" r:id="R1112158a1d4b438f"/>
-    <p:sldLayoutId xmlns:r="http://schemas.openxmlformats.org/officeDocument/2006/relationships" id="2147483651" r:id="R97dcf71d90634408"/>
-    <p:sldLayoutId xmlns:r="http://schemas.openxmlformats.org/officeDocument/2006/relationships" id="2147483652" r:id="R2023fdbe524a4937"/>
-    <p:sldLayoutId xmlns:r="http://schemas.openxmlformats.org/officeDocument/2006/relationships" id="2147483653" r:id="R2564c1cdba0a4049"/>
-    <p:sldLayoutId xmlns:r="http://schemas.openxmlformats.org/officeDocument/2006/relationships" id="2147483654" r:id="R36318f716ecc4025"/>
+    <p:sldLayoutId xmlns:r="http://schemas.openxmlformats.org/officeDocument/2006/relationships" id="2147483649" r:id="R736badca87974446"/>
+    <p:sldLayoutId xmlns:r="http://schemas.openxmlformats.org/officeDocument/2006/relationships" id="2147483650" r:id="R6570311bef44408c"/>
+    <p:sldLayoutId xmlns:r="http://schemas.openxmlformats.org/officeDocument/2006/relationships" id="2147483651" r:id="R43b8dc1bbaa6419d"/>
+    <p:sldLayoutId xmlns:r="http://schemas.openxmlformats.org/officeDocument/2006/relationships" id="2147483652" r:id="R9d1fa4e23c6c48aa"/>
+    <p:sldLayoutId xmlns:r="http://schemas.openxmlformats.org/officeDocument/2006/relationships" id="2147483653" r:id="R0eaf391cb5d54801"/>
+    <p:sldLayoutId xmlns:r="http://schemas.openxmlformats.org/officeDocument/2006/relationships" id="2147483654" r:id="Rc13699dd3c5e4555"/>
   </p:sldLayoutIdLst>
   <p:txStyles>
     <p:titleStyle>
@@ -3870,7 +4590,7 @@
           <p:cNvPr id="6" name="">
             <a:extLst xmlns:a="http://schemas.openxmlformats.org/drawingml/2006/main">
               <a:ext uri="{FF2B5EF4-FFF2-40B4-BE49-F238E27FC236}">
-                <a16:creationId xmlns:a16="http://schemas.microsoft.com/office/drawing/2014/main" id="{EFBD64E0-AA04-4A62-B455-EBAE49DACFB6}"/>
+                <a16:creationId xmlns:a16="http://schemas.microsoft.com/office/drawing/2014/main" id="{0E89BBD8-D47C-4752-AF24-1F69B8701A73}"/>
               </a:ext>
             </a:extLst>
           </p:cNvPr>
@@ -3907,6 +4627,96 @@
                 <a:cs typeface="Arial"/>
               </a:defRPr>
             </a:defPPr>
+            <a:lvl1pPr>
+              <a:defRPr sz="5100" b="1">
+                <a:solidFill>
+                  <a:srgbClr val="FFFFFF"/>
+                </a:solidFill>
+                <a:latin typeface="Arial"/>
+                <a:ea typeface="Arial"/>
+                <a:cs typeface="Arial"/>
+              </a:defRPr>
+            </a:lvl1pPr>
+            <a:lvl2pPr>
+              <a:defRPr sz="5100" b="1">
+                <a:solidFill>
+                  <a:srgbClr val="FFFFFF"/>
+                </a:solidFill>
+                <a:latin typeface="Arial"/>
+                <a:ea typeface="Arial"/>
+                <a:cs typeface="Arial"/>
+              </a:defRPr>
+            </a:lvl2pPr>
+            <a:lvl3pPr>
+              <a:defRPr sz="5100" b="1">
+                <a:solidFill>
+                  <a:srgbClr val="FFFFFF"/>
+                </a:solidFill>
+                <a:latin typeface="Arial"/>
+                <a:ea typeface="Arial"/>
+                <a:cs typeface="Arial"/>
+              </a:defRPr>
+            </a:lvl3pPr>
+            <a:lvl4pPr>
+              <a:defRPr sz="5100" b="1">
+                <a:solidFill>
+                  <a:srgbClr val="FFFFFF"/>
+                </a:solidFill>
+                <a:latin typeface="Arial"/>
+                <a:ea typeface="Arial"/>
+                <a:cs typeface="Arial"/>
+              </a:defRPr>
+            </a:lvl4pPr>
+            <a:lvl5pPr>
+              <a:defRPr sz="5100" b="1">
+                <a:solidFill>
+                  <a:srgbClr val="FFFFFF"/>
+                </a:solidFill>
+                <a:latin typeface="Arial"/>
+                <a:ea typeface="Arial"/>
+                <a:cs typeface="Arial"/>
+              </a:defRPr>
+            </a:lvl5pPr>
+            <a:lvl6pPr>
+              <a:defRPr sz="5100" b="1">
+                <a:solidFill>
+                  <a:srgbClr val="FFFFFF"/>
+                </a:solidFill>
+                <a:latin typeface="Arial"/>
+                <a:ea typeface="Arial"/>
+                <a:cs typeface="Arial"/>
+              </a:defRPr>
+            </a:lvl6pPr>
+            <a:lvl7pPr>
+              <a:defRPr sz="5100" b="1">
+                <a:solidFill>
+                  <a:srgbClr val="FFFFFF"/>
+                </a:solidFill>
+                <a:latin typeface="Arial"/>
+                <a:ea typeface="Arial"/>
+                <a:cs typeface="Arial"/>
+              </a:defRPr>
+            </a:lvl7pPr>
+            <a:lvl8pPr>
+              <a:defRPr sz="5100" b="1">
+                <a:solidFill>
+                  <a:srgbClr val="FFFFFF"/>
+                </a:solidFill>
+                <a:latin typeface="Arial"/>
+                <a:ea typeface="Arial"/>
+                <a:cs typeface="Arial"/>
+              </a:defRPr>
+            </a:lvl8pPr>
+            <a:lvl9pPr>
+              <a:defRPr sz="5100" b="1">
+                <a:solidFill>
+                  <a:srgbClr val="FFFFFF"/>
+                </a:solidFill>
+                <a:latin typeface="Arial"/>
+                <a:ea typeface="Arial"/>
+                <a:cs typeface="Arial"/>
+              </a:defRPr>
+            </a:lvl9pPr>
           </a:lstStyle>
           <a:p xmlns:a="http://schemas.openxmlformats.org/drawingml/2006/main">
             <a:pPr>
@@ -3938,7 +4748,7 @@
           <p:cNvPr id="2" name="">
             <a:extLst xmlns:a="http://schemas.openxmlformats.org/drawingml/2006/main">
               <a:ext uri="{FF2B5EF4-FFF2-40B4-BE49-F238E27FC236}">
-                <a16:creationId xmlns:a16="http://schemas.microsoft.com/office/drawing/2014/main" id="{C5923427-294D-4A3B-85E1-2A8DCBB3D7A1}"/>
+                <a16:creationId xmlns:a16="http://schemas.microsoft.com/office/drawing/2014/main" id="{AA51AC69-5947-4259-8AC3-7B46BF025C29}"/>
               </a:ext>
             </a:extLst>
           </p:cNvPr>
@@ -3975,6 +4785,96 @@
                 <a:cs typeface="Arial"/>
               </a:defRPr>
             </a:defPPr>
+            <a:lvl1pPr>
+              <a:defRPr sz="2700" b="0">
+                <a:solidFill>
+                  <a:srgbClr val="FFFFFF"/>
+                </a:solidFill>
+                <a:latin typeface="Arial"/>
+                <a:ea typeface="Arial"/>
+                <a:cs typeface="Arial"/>
+              </a:defRPr>
+            </a:lvl1pPr>
+            <a:lvl2pPr>
+              <a:defRPr sz="2700" b="0">
+                <a:solidFill>
+                  <a:srgbClr val="FFFFFF"/>
+                </a:solidFill>
+                <a:latin typeface="Arial"/>
+                <a:ea typeface="Arial"/>
+                <a:cs typeface="Arial"/>
+              </a:defRPr>
+            </a:lvl2pPr>
+            <a:lvl3pPr>
+              <a:defRPr sz="2700" b="0">
+                <a:solidFill>
+                  <a:srgbClr val="FFFFFF"/>
+                </a:solidFill>
+                <a:latin typeface="Arial"/>
+                <a:ea typeface="Arial"/>
+                <a:cs typeface="Arial"/>
+              </a:defRPr>
+            </a:lvl3pPr>
+            <a:lvl4pPr>
+              <a:defRPr sz="2700" b="0">
+                <a:solidFill>
+                  <a:srgbClr val="FFFFFF"/>
+                </a:solidFill>
+                <a:latin typeface="Arial"/>
+                <a:ea typeface="Arial"/>
+                <a:cs typeface="Arial"/>
+              </a:defRPr>
+            </a:lvl4pPr>
+            <a:lvl5pPr>
+              <a:defRPr sz="2700" b="0">
+                <a:solidFill>
+                  <a:srgbClr val="FFFFFF"/>
+                </a:solidFill>
+                <a:latin typeface="Arial"/>
+                <a:ea typeface="Arial"/>
+                <a:cs typeface="Arial"/>
+              </a:defRPr>
+            </a:lvl5pPr>
+            <a:lvl6pPr>
+              <a:defRPr sz="2700" b="0">
+                <a:solidFill>
+                  <a:srgbClr val="FFFFFF"/>
+                </a:solidFill>
+                <a:latin typeface="Arial"/>
+                <a:ea typeface="Arial"/>
+                <a:cs typeface="Arial"/>
+              </a:defRPr>
+            </a:lvl6pPr>
+            <a:lvl7pPr>
+              <a:defRPr sz="2700" b="0">
+                <a:solidFill>
+                  <a:srgbClr val="FFFFFF"/>
+                </a:solidFill>
+                <a:latin typeface="Arial"/>
+                <a:ea typeface="Arial"/>
+                <a:cs typeface="Arial"/>
+              </a:defRPr>
+            </a:lvl7pPr>
+            <a:lvl8pPr>
+              <a:defRPr sz="2700" b="0">
+                <a:solidFill>
+                  <a:srgbClr val="FFFFFF"/>
+                </a:solidFill>
+                <a:latin typeface="Arial"/>
+                <a:ea typeface="Arial"/>
+                <a:cs typeface="Arial"/>
+              </a:defRPr>
+            </a:lvl8pPr>
+            <a:lvl9pPr>
+              <a:defRPr sz="2700" b="0">
+                <a:solidFill>
+                  <a:srgbClr val="FFFFFF"/>
+                </a:solidFill>
+                <a:latin typeface="Arial"/>
+                <a:ea typeface="Arial"/>
+                <a:cs typeface="Arial"/>
+              </a:defRPr>
+            </a:lvl9pPr>
           </a:lstStyle>
           <a:p xmlns:a="http://schemas.openxmlformats.org/drawingml/2006/main">
             <a:pPr>
@@ -4006,7 +4906,7 @@
           <p:cNvPr id="3" name="">
             <a:extLst xmlns:a="http://schemas.openxmlformats.org/drawingml/2006/main">
               <a:ext uri="{FF2B5EF4-FFF2-40B4-BE49-F238E27FC236}">
-                <a16:creationId xmlns:a16="http://schemas.microsoft.com/office/drawing/2014/main" id="{B861F61F-CD60-42BE-9862-8EC1A96138E9}"/>
+                <a16:creationId xmlns:a16="http://schemas.microsoft.com/office/drawing/2014/main" id="{676E9D9B-6F1D-4F9C-A5AB-E95DEB5F3D2F}"/>
               </a:ext>
             </a:extLst>
           </p:cNvPr>
@@ -4043,6 +4943,96 @@
                 <a:cs typeface="Arial"/>
               </a:defRPr>
             </a:defPPr>
+            <a:lvl1pPr>
+              <a:defRPr sz="2250" b="0">
+                <a:solidFill>
+                  <a:srgbClr val="FFFFFF"/>
+                </a:solidFill>
+                <a:latin typeface="Arial"/>
+                <a:ea typeface="Arial"/>
+                <a:cs typeface="Arial"/>
+              </a:defRPr>
+            </a:lvl1pPr>
+            <a:lvl2pPr>
+              <a:defRPr sz="2250" b="0">
+                <a:solidFill>
+                  <a:srgbClr val="FFFFFF"/>
+                </a:solidFill>
+                <a:latin typeface="Arial"/>
+                <a:ea typeface="Arial"/>
+                <a:cs typeface="Arial"/>
+              </a:defRPr>
+            </a:lvl2pPr>
+            <a:lvl3pPr>
+              <a:defRPr sz="2250" b="0">
+                <a:solidFill>
+                  <a:srgbClr val="FFFFFF"/>
+                </a:solidFill>
+                <a:latin typeface="Arial"/>
+                <a:ea typeface="Arial"/>
+                <a:cs typeface="Arial"/>
+              </a:defRPr>
+            </a:lvl3pPr>
+            <a:lvl4pPr>
+              <a:defRPr sz="2250" b="0">
+                <a:solidFill>
+                  <a:srgbClr val="FFFFFF"/>
+                </a:solidFill>
+                <a:latin typeface="Arial"/>
+                <a:ea typeface="Arial"/>
+                <a:cs typeface="Arial"/>
+              </a:defRPr>
+            </a:lvl4pPr>
+            <a:lvl5pPr>
+              <a:defRPr sz="2250" b="0">
+                <a:solidFill>
+                  <a:srgbClr val="FFFFFF"/>
+                </a:solidFill>
+                <a:latin typeface="Arial"/>
+                <a:ea typeface="Arial"/>
+                <a:cs typeface="Arial"/>
+              </a:defRPr>
+            </a:lvl5pPr>
+            <a:lvl6pPr>
+              <a:defRPr sz="2250" b="0">
+                <a:solidFill>
+                  <a:srgbClr val="FFFFFF"/>
+                </a:solidFill>
+                <a:latin typeface="Arial"/>
+                <a:ea typeface="Arial"/>
+                <a:cs typeface="Arial"/>
+              </a:defRPr>
+            </a:lvl6pPr>
+            <a:lvl7pPr>
+              <a:defRPr sz="2250" b="0">
+                <a:solidFill>
+                  <a:srgbClr val="FFFFFF"/>
+                </a:solidFill>
+                <a:latin typeface="Arial"/>
+                <a:ea typeface="Arial"/>
+                <a:cs typeface="Arial"/>
+              </a:defRPr>
+            </a:lvl7pPr>
+            <a:lvl8pPr>
+              <a:defRPr sz="2250" b="0">
+                <a:solidFill>
+                  <a:srgbClr val="FFFFFF"/>
+                </a:solidFill>
+                <a:latin typeface="Arial"/>
+                <a:ea typeface="Arial"/>
+                <a:cs typeface="Arial"/>
+              </a:defRPr>
+            </a:lvl8pPr>
+            <a:lvl9pPr>
+              <a:defRPr sz="2250" b="0">
+                <a:solidFill>
+                  <a:srgbClr val="FFFFFF"/>
+                </a:solidFill>
+                <a:latin typeface="Arial"/>
+                <a:ea typeface="Arial"/>
+                <a:cs typeface="Arial"/>
+              </a:defRPr>
+            </a:lvl9pPr>
           </a:lstStyle>
           <a:p xmlns:a="http://schemas.openxmlformats.org/drawingml/2006/main">
             <a:pPr>
@@ -4074,7 +5064,7 @@
           <p:cNvPr id="4" name="">
             <a:extLst xmlns:a="http://schemas.openxmlformats.org/drawingml/2006/main">
               <a:ext uri="{FF2B5EF4-FFF2-40B4-BE49-F238E27FC236}">
-                <a16:creationId xmlns:a16="http://schemas.microsoft.com/office/drawing/2014/main" id="{7798C705-D6DE-4B72-8399-005A68F717A1}"/>
+                <a16:creationId xmlns:a16="http://schemas.microsoft.com/office/drawing/2014/main" id="{0D84EF69-9BA0-452E-91D2-61A5CB9D2CDF}"/>
               </a:ext>
             </a:extLst>
           </p:cNvPr>
@@ -4111,6 +5101,96 @@
                 <a:cs typeface="Arial"/>
               </a:defRPr>
             </a:defPPr>
+            <a:lvl1pPr>
+              <a:defRPr sz="1875" b="0">
+                <a:solidFill>
+                  <a:srgbClr val="FFFFFF"/>
+                </a:solidFill>
+                <a:latin typeface="Arial"/>
+                <a:ea typeface="Arial"/>
+                <a:cs typeface="Arial"/>
+              </a:defRPr>
+            </a:lvl1pPr>
+            <a:lvl2pPr>
+              <a:defRPr sz="1875" b="0">
+                <a:solidFill>
+                  <a:srgbClr val="FFFFFF"/>
+                </a:solidFill>
+                <a:latin typeface="Arial"/>
+                <a:ea typeface="Arial"/>
+                <a:cs typeface="Arial"/>
+              </a:defRPr>
+            </a:lvl2pPr>
+            <a:lvl3pPr>
+              <a:defRPr sz="1875" b="0">
+                <a:solidFill>
+                  <a:srgbClr val="FFFFFF"/>
+                </a:solidFill>
+                <a:latin typeface="Arial"/>
+                <a:ea typeface="Arial"/>
+                <a:cs typeface="Arial"/>
+              </a:defRPr>
+            </a:lvl3pPr>
+            <a:lvl4pPr>
+              <a:defRPr sz="1875" b="0">
+                <a:solidFill>
+                  <a:srgbClr val="FFFFFF"/>
+                </a:solidFill>
+                <a:latin typeface="Arial"/>
+                <a:ea typeface="Arial"/>
+                <a:cs typeface="Arial"/>
+              </a:defRPr>
+            </a:lvl4pPr>
+            <a:lvl5pPr>
+              <a:defRPr sz="1875" b="0">
+                <a:solidFill>
+                  <a:srgbClr val="FFFFFF"/>
+                </a:solidFill>
+                <a:latin typeface="Arial"/>
+                <a:ea typeface="Arial"/>
+                <a:cs typeface="Arial"/>
+              </a:defRPr>
+            </a:lvl5pPr>
+            <a:lvl6pPr>
+              <a:defRPr sz="1875" b="0">
+                <a:solidFill>
+                  <a:srgbClr val="FFFFFF"/>
+                </a:solidFill>
+                <a:latin typeface="Arial"/>
+                <a:ea typeface="Arial"/>
+                <a:cs typeface="Arial"/>
+              </a:defRPr>
+            </a:lvl6pPr>
+            <a:lvl7pPr>
+              <a:defRPr sz="1875" b="0">
+                <a:solidFill>
+                  <a:srgbClr val="FFFFFF"/>
+                </a:solidFill>
+                <a:latin typeface="Arial"/>
+                <a:ea typeface="Arial"/>
+                <a:cs typeface="Arial"/>
+              </a:defRPr>
+            </a:lvl7pPr>
+            <a:lvl8pPr>
+              <a:defRPr sz="1875" b="0">
+                <a:solidFill>
+                  <a:srgbClr val="FFFFFF"/>
+                </a:solidFill>
+                <a:latin typeface="Arial"/>
+                <a:ea typeface="Arial"/>
+                <a:cs typeface="Arial"/>
+              </a:defRPr>
+            </a:lvl8pPr>
+            <a:lvl9pPr>
+              <a:defRPr sz="1875" b="0">
+                <a:solidFill>
+                  <a:srgbClr val="FFFFFF"/>
+                </a:solidFill>
+                <a:latin typeface="Arial"/>
+                <a:ea typeface="Arial"/>
+                <a:cs typeface="Arial"/>
+              </a:defRPr>
+            </a:lvl9pPr>
           </a:lstStyle>
           <a:p xmlns:a="http://schemas.openxmlformats.org/drawingml/2006/main">
             <a:pPr>
@@ -4142,7 +5222,7 @@
           <p:cNvPr id="5" name="">
             <a:extLst xmlns:a="http://schemas.openxmlformats.org/drawingml/2006/main">
               <a:ext uri="{FF2B5EF4-FFF2-40B4-BE49-F238E27FC236}">
-                <a16:creationId xmlns:a16="http://schemas.microsoft.com/office/drawing/2014/main" id="{2C8E3EAD-5CAE-4054-903E-30B098325E5B}"/>
+                <a16:creationId xmlns:a16="http://schemas.microsoft.com/office/drawing/2014/main" id="{89B95290-B6AB-459F-AF0D-7F7699BF53C9}"/>
               </a:ext>
             </a:extLst>
           </p:cNvPr>
@@ -4179,6 +5259,96 @@
                 <a:cs typeface="Arial"/>
               </a:defRPr>
             </a:defPPr>
+            <a:lvl1pPr>
+              <a:defRPr sz="1650" b="0">
+                <a:solidFill>
+                  <a:srgbClr val="FFFFFF"/>
+                </a:solidFill>
+                <a:latin typeface="Arial"/>
+                <a:ea typeface="Arial"/>
+                <a:cs typeface="Arial"/>
+              </a:defRPr>
+            </a:lvl1pPr>
+            <a:lvl2pPr>
+              <a:defRPr sz="1650" b="0">
+                <a:solidFill>
+                  <a:srgbClr val="FFFFFF"/>
+                </a:solidFill>
+                <a:latin typeface="Arial"/>
+                <a:ea typeface="Arial"/>
+                <a:cs typeface="Arial"/>
+              </a:defRPr>
+            </a:lvl2pPr>
+            <a:lvl3pPr>
+              <a:defRPr sz="1650" b="0">
+                <a:solidFill>
+                  <a:srgbClr val="FFFFFF"/>
+                </a:solidFill>
+                <a:latin typeface="Arial"/>
+                <a:ea typeface="Arial"/>
+                <a:cs typeface="Arial"/>
+              </a:defRPr>
+            </a:lvl3pPr>
+            <a:lvl4pPr>
+              <a:defRPr sz="1650" b="0">
+                <a:solidFill>
+                  <a:srgbClr val="FFFFFF"/>
+                </a:solidFill>
+                <a:latin typeface="Arial"/>
+                <a:ea typeface="Arial"/>
+                <a:cs typeface="Arial"/>
+              </a:defRPr>
+            </a:lvl4pPr>
+            <a:lvl5pPr>
+              <a:defRPr sz="1650" b="0">
+                <a:solidFill>
+                  <a:srgbClr val="FFFFFF"/>
+                </a:solidFill>
+                <a:latin typeface="Arial"/>
+                <a:ea typeface="Arial"/>
+                <a:cs typeface="Arial"/>
+              </a:defRPr>
+            </a:lvl5pPr>
+            <a:lvl6pPr>
+              <a:defRPr sz="1650" b="0">
+                <a:solidFill>
+                  <a:srgbClr val="FFFFFF"/>
+                </a:solidFill>
+                <a:latin typeface="Arial"/>
+                <a:ea typeface="Arial"/>
+                <a:cs typeface="Arial"/>
+              </a:defRPr>
+            </a:lvl6pPr>
+            <a:lvl7pPr>
+              <a:defRPr sz="1650" b="0">
+                <a:solidFill>
+                  <a:srgbClr val="FFFFFF"/>
+                </a:solidFill>
+                <a:latin typeface="Arial"/>
+                <a:ea typeface="Arial"/>
+                <a:cs typeface="Arial"/>
+              </a:defRPr>
+            </a:lvl7pPr>
+            <a:lvl8pPr>
+              <a:defRPr sz="1650" b="0">
+                <a:solidFill>
+                  <a:srgbClr val="FFFFFF"/>
+                </a:solidFill>
+                <a:latin typeface="Arial"/>
+                <a:ea typeface="Arial"/>
+                <a:cs typeface="Arial"/>
+              </a:defRPr>
+            </a:lvl8pPr>
+            <a:lvl9pPr>
+              <a:defRPr sz="1650" b="0">
+                <a:solidFill>
+                  <a:srgbClr val="FFFFFF"/>
+                </a:solidFill>
+                <a:latin typeface="Arial"/>
+                <a:ea typeface="Arial"/>
+                <a:cs typeface="Arial"/>
+              </a:defRPr>
+            </a:lvl9pPr>
           </a:lstStyle>
           <a:p xmlns:a="http://schemas.openxmlformats.org/drawingml/2006/main">
             <a:pPr>
@@ -4208,7 +5378,7 @@
     </p:spTree>
     <p:extLst>
       <p:ext uri="{BB962C8B-B14F-4D97-AF65-F5344CB8AC3E}">
-        <p14:creationId xmlns:p14="http://schemas.microsoft.com/office/powerpoint/2010/main" val="1374129581"/>
+        <p14:creationId xmlns:p14="http://schemas.microsoft.com/office/powerpoint/2010/main" val="21457624"/>
       </p:ext>
     </p:extLst>
   </p:cSld>
@@ -4239,7 +5409,7 @@
           <p:cNvPr id="9" name="">
             <a:extLst xmlns:a="http://schemas.openxmlformats.org/drawingml/2006/main">
               <a:ext uri="{FF2B5EF4-FFF2-40B4-BE49-F238E27FC236}">
-                <a16:creationId xmlns:a16="http://schemas.microsoft.com/office/drawing/2014/main" id="{A282CD22-2691-4210-AB06-4013673331E4}"/>
+                <a16:creationId xmlns:a16="http://schemas.microsoft.com/office/drawing/2014/main" id="{3582DEE5-EF54-479D-AD88-DB8B5F778ACC}"/>
               </a:ext>
             </a:extLst>
           </p:cNvPr>
@@ -4276,6 +5446,96 @@
                 <a:cs typeface="Arial"/>
               </a:defRPr>
             </a:defPPr>
+            <a:lvl1pPr>
+              <a:defRPr sz="3300" b="1">
+                <a:solidFill>
+                  <a:srgbClr val="063E5F"/>
+                </a:solidFill>
+                <a:latin typeface="Arial"/>
+                <a:ea typeface="Arial"/>
+                <a:cs typeface="Arial"/>
+              </a:defRPr>
+            </a:lvl1pPr>
+            <a:lvl2pPr>
+              <a:defRPr sz="3300" b="1">
+                <a:solidFill>
+                  <a:srgbClr val="063E5F"/>
+                </a:solidFill>
+                <a:latin typeface="Arial"/>
+                <a:ea typeface="Arial"/>
+                <a:cs typeface="Arial"/>
+              </a:defRPr>
+            </a:lvl2pPr>
+            <a:lvl3pPr>
+              <a:defRPr sz="3300" b="1">
+                <a:solidFill>
+                  <a:srgbClr val="063E5F"/>
+                </a:solidFill>
+                <a:latin typeface="Arial"/>
+                <a:ea typeface="Arial"/>
+                <a:cs typeface="Arial"/>
+              </a:defRPr>
+            </a:lvl3pPr>
+            <a:lvl4pPr>
+              <a:defRPr sz="3300" b="1">
+                <a:solidFill>
+                  <a:srgbClr val="063E5F"/>
+                </a:solidFill>
+                <a:latin typeface="Arial"/>
+                <a:ea typeface="Arial"/>
+                <a:cs typeface="Arial"/>
+              </a:defRPr>
+            </a:lvl4pPr>
+            <a:lvl5pPr>
+              <a:defRPr sz="3300" b="1">
+                <a:solidFill>
+                  <a:srgbClr val="063E5F"/>
+                </a:solidFill>
+                <a:latin typeface="Arial"/>
+                <a:ea typeface="Arial"/>
+                <a:cs typeface="Arial"/>
+              </a:defRPr>
+            </a:lvl5pPr>
+            <a:lvl6pPr>
+              <a:defRPr sz="3300" b="1">
+                <a:solidFill>
+                  <a:srgbClr val="063E5F"/>
+                </a:solidFill>
+                <a:latin typeface="Arial"/>
+                <a:ea typeface="Arial"/>
+                <a:cs typeface="Arial"/>
+              </a:defRPr>
+            </a:lvl6pPr>
+            <a:lvl7pPr>
+              <a:defRPr sz="3300" b="1">
+                <a:solidFill>
+                  <a:srgbClr val="063E5F"/>
+                </a:solidFill>
+                <a:latin typeface="Arial"/>
+                <a:ea typeface="Arial"/>
+                <a:cs typeface="Arial"/>
+              </a:defRPr>
+            </a:lvl7pPr>
+            <a:lvl8pPr>
+              <a:defRPr sz="3300" b="1">
+                <a:solidFill>
+                  <a:srgbClr val="063E5F"/>
+                </a:solidFill>
+                <a:latin typeface="Arial"/>
+                <a:ea typeface="Arial"/>
+                <a:cs typeface="Arial"/>
+              </a:defRPr>
+            </a:lvl8pPr>
+            <a:lvl9pPr>
+              <a:defRPr sz="3300" b="1">
+                <a:solidFill>
+                  <a:srgbClr val="063E5F"/>
+                </a:solidFill>
+                <a:latin typeface="Arial"/>
+                <a:ea typeface="Arial"/>
+                <a:cs typeface="Arial"/>
+              </a:defRPr>
+            </a:lvl9pPr>
           </a:lstStyle>
           <a:p xmlns:a="http://schemas.openxmlformats.org/drawingml/2006/main">
             <a:pPr>
@@ -4307,7 +5567,7 @@
           <p:cNvPr id="2" name="">
             <a:extLst xmlns:a="http://schemas.openxmlformats.org/drawingml/2006/main">
               <a:ext uri="{FF2B5EF4-FFF2-40B4-BE49-F238E27FC236}">
-                <a16:creationId xmlns:a16="http://schemas.microsoft.com/office/drawing/2014/main" id="{D1A6D28D-8C44-425D-AD89-C4E14F0436BB}"/>
+                <a16:creationId xmlns:a16="http://schemas.microsoft.com/office/drawing/2014/main" id="{432B0C7B-B40B-481D-A84D-370B0F903549}"/>
               </a:ext>
             </a:extLst>
           </p:cNvPr>
@@ -4344,6 +5604,96 @@
                 <a:cs typeface="Arial"/>
               </a:defRPr>
             </a:defPPr>
+            <a:lvl1pPr>
+              <a:defRPr sz="1200" b="0">
+                <a:solidFill>
+                  <a:srgbClr val="536272"/>
+                </a:solidFill>
+                <a:latin typeface="Arial"/>
+                <a:ea typeface="Arial"/>
+                <a:cs typeface="Arial"/>
+              </a:defRPr>
+            </a:lvl1pPr>
+            <a:lvl2pPr>
+              <a:defRPr sz="1200" b="0">
+                <a:solidFill>
+                  <a:srgbClr val="536272"/>
+                </a:solidFill>
+                <a:latin typeface="Arial"/>
+                <a:ea typeface="Arial"/>
+                <a:cs typeface="Arial"/>
+              </a:defRPr>
+            </a:lvl2pPr>
+            <a:lvl3pPr>
+              <a:defRPr sz="1200" b="0">
+                <a:solidFill>
+                  <a:srgbClr val="536272"/>
+                </a:solidFill>
+                <a:latin typeface="Arial"/>
+                <a:ea typeface="Arial"/>
+                <a:cs typeface="Arial"/>
+              </a:defRPr>
+            </a:lvl3pPr>
+            <a:lvl4pPr>
+              <a:defRPr sz="1200" b="0">
+                <a:solidFill>
+                  <a:srgbClr val="536272"/>
+                </a:solidFill>
+                <a:latin typeface="Arial"/>
+                <a:ea typeface="Arial"/>
+                <a:cs typeface="Arial"/>
+              </a:defRPr>
+            </a:lvl4pPr>
+            <a:lvl5pPr>
+              <a:defRPr sz="1200" b="0">
+                <a:solidFill>
+                  <a:srgbClr val="536272"/>
+                </a:solidFill>
+                <a:latin typeface="Arial"/>
+                <a:ea typeface="Arial"/>
+                <a:cs typeface="Arial"/>
+              </a:defRPr>
+            </a:lvl5pPr>
+            <a:lvl6pPr>
+              <a:defRPr sz="1200" b="0">
+                <a:solidFill>
+                  <a:srgbClr val="536272"/>
+                </a:solidFill>
+                <a:latin typeface="Arial"/>
+                <a:ea typeface="Arial"/>
+                <a:cs typeface="Arial"/>
+              </a:defRPr>
+            </a:lvl6pPr>
+            <a:lvl7pPr>
+              <a:defRPr sz="1200" b="0">
+                <a:solidFill>
+                  <a:srgbClr val="536272"/>
+                </a:solidFill>
+                <a:latin typeface="Arial"/>
+                <a:ea typeface="Arial"/>
+                <a:cs typeface="Arial"/>
+              </a:defRPr>
+            </a:lvl7pPr>
+            <a:lvl8pPr>
+              <a:defRPr sz="1200" b="0">
+                <a:solidFill>
+                  <a:srgbClr val="536272"/>
+                </a:solidFill>
+                <a:latin typeface="Arial"/>
+                <a:ea typeface="Arial"/>
+                <a:cs typeface="Arial"/>
+              </a:defRPr>
+            </a:lvl8pPr>
+            <a:lvl9pPr>
+              <a:defRPr sz="1200" b="0">
+                <a:solidFill>
+                  <a:srgbClr val="536272"/>
+                </a:solidFill>
+                <a:latin typeface="Arial"/>
+                <a:ea typeface="Arial"/>
+                <a:cs typeface="Arial"/>
+              </a:defRPr>
+            </a:lvl9pPr>
           </a:lstStyle>
           <a:p xmlns:a="http://schemas.openxmlformats.org/drawingml/2006/main">
             <a:pPr>
@@ -4375,7 +5725,7 @@
           <p:cNvPr id="3" name="">
             <a:extLst xmlns:a="http://schemas.openxmlformats.org/drawingml/2006/main">
               <a:ext uri="{FF2B5EF4-FFF2-40B4-BE49-F238E27FC236}">
-                <a16:creationId xmlns:a16="http://schemas.microsoft.com/office/drawing/2014/main" id="{BAEBF2E5-B714-4F7F-9E91-976F42EA5AF6}"/>
+                <a16:creationId xmlns:a16="http://schemas.microsoft.com/office/drawing/2014/main" id="{79F6924D-A29E-48A4-9571-2D5CC0EC77A6}"/>
               </a:ext>
             </a:extLst>
           </p:cNvPr>
@@ -4412,6 +5762,96 @@
                 <a:cs typeface="Arial"/>
               </a:defRPr>
             </a:defPPr>
+            <a:lvl1pPr>
+              <a:defRPr sz="1275" b="0">
+                <a:solidFill>
+                  <a:srgbClr val="B88E23"/>
+                </a:solidFill>
+                <a:latin typeface="Arial"/>
+                <a:ea typeface="Arial"/>
+                <a:cs typeface="Arial"/>
+              </a:defRPr>
+            </a:lvl1pPr>
+            <a:lvl2pPr>
+              <a:defRPr sz="1275" b="0">
+                <a:solidFill>
+                  <a:srgbClr val="B88E23"/>
+                </a:solidFill>
+                <a:latin typeface="Arial"/>
+                <a:ea typeface="Arial"/>
+                <a:cs typeface="Arial"/>
+              </a:defRPr>
+            </a:lvl2pPr>
+            <a:lvl3pPr>
+              <a:defRPr sz="1275" b="0">
+                <a:solidFill>
+                  <a:srgbClr val="B88E23"/>
+                </a:solidFill>
+                <a:latin typeface="Arial"/>
+                <a:ea typeface="Arial"/>
+                <a:cs typeface="Arial"/>
+              </a:defRPr>
+            </a:lvl3pPr>
+            <a:lvl4pPr>
+              <a:defRPr sz="1275" b="0">
+                <a:solidFill>
+                  <a:srgbClr val="B88E23"/>
+                </a:solidFill>
+                <a:latin typeface="Arial"/>
+                <a:ea typeface="Arial"/>
+                <a:cs typeface="Arial"/>
+              </a:defRPr>
+            </a:lvl4pPr>
+            <a:lvl5pPr>
+              <a:defRPr sz="1275" b="0">
+                <a:solidFill>
+                  <a:srgbClr val="B88E23"/>
+                </a:solidFill>
+                <a:latin typeface="Arial"/>
+                <a:ea typeface="Arial"/>
+                <a:cs typeface="Arial"/>
+              </a:defRPr>
+            </a:lvl5pPr>
+            <a:lvl6pPr>
+              <a:defRPr sz="1275" b="0">
+                <a:solidFill>
+                  <a:srgbClr val="B88E23"/>
+                </a:solidFill>
+                <a:latin typeface="Arial"/>
+                <a:ea typeface="Arial"/>
+                <a:cs typeface="Arial"/>
+              </a:defRPr>
+            </a:lvl6pPr>
+            <a:lvl7pPr>
+              <a:defRPr sz="1275" b="0">
+                <a:solidFill>
+                  <a:srgbClr val="B88E23"/>
+                </a:solidFill>
+                <a:latin typeface="Arial"/>
+                <a:ea typeface="Arial"/>
+                <a:cs typeface="Arial"/>
+              </a:defRPr>
+            </a:lvl7pPr>
+            <a:lvl8pPr>
+              <a:defRPr sz="1275" b="0">
+                <a:solidFill>
+                  <a:srgbClr val="B88E23"/>
+                </a:solidFill>
+                <a:latin typeface="Arial"/>
+                <a:ea typeface="Arial"/>
+                <a:cs typeface="Arial"/>
+              </a:defRPr>
+            </a:lvl8pPr>
+            <a:lvl9pPr>
+              <a:defRPr sz="1275" b="0">
+                <a:solidFill>
+                  <a:srgbClr val="B88E23"/>
+                </a:solidFill>
+                <a:latin typeface="Arial"/>
+                <a:ea typeface="Arial"/>
+                <a:cs typeface="Arial"/>
+              </a:defRPr>
+            </a:lvl9pPr>
           </a:lstStyle>
           <a:p xmlns:a="http://schemas.openxmlformats.org/drawingml/2006/main">
             <a:pPr>
@@ -4443,7 +5883,7 @@
           <p:cNvPr id="4" name="">
             <a:extLst xmlns:a="http://schemas.openxmlformats.org/drawingml/2006/main">
               <a:ext uri="{FF2B5EF4-FFF2-40B4-BE49-F238E27FC236}">
-                <a16:creationId xmlns:a16="http://schemas.microsoft.com/office/drawing/2014/main" id="{8AD4FA86-C58A-4CCE-9489-5A1704454DC3}"/>
+                <a16:creationId xmlns:a16="http://schemas.microsoft.com/office/drawing/2014/main" id="{E6AD44C2-2A6C-4443-A7A4-B77C85E4622A}"/>
               </a:ext>
             </a:extLst>
           </p:cNvPr>
@@ -4480,6 +5920,96 @@
                 <a:cs typeface="Arial"/>
               </a:defRPr>
             </a:defPPr>
+            <a:lvl1pPr>
+              <a:defRPr sz="2175" b="0">
+                <a:solidFill>
+                  <a:srgbClr val="063E5F"/>
+                </a:solidFill>
+                <a:latin typeface="Arial"/>
+                <a:ea typeface="Arial"/>
+                <a:cs typeface="Arial"/>
+              </a:defRPr>
+            </a:lvl1pPr>
+            <a:lvl2pPr>
+              <a:defRPr sz="2175" b="0">
+                <a:solidFill>
+                  <a:srgbClr val="063E5F"/>
+                </a:solidFill>
+                <a:latin typeface="Arial"/>
+                <a:ea typeface="Arial"/>
+                <a:cs typeface="Arial"/>
+              </a:defRPr>
+            </a:lvl2pPr>
+            <a:lvl3pPr>
+              <a:defRPr sz="2175" b="0">
+                <a:solidFill>
+                  <a:srgbClr val="063E5F"/>
+                </a:solidFill>
+                <a:latin typeface="Arial"/>
+                <a:ea typeface="Arial"/>
+                <a:cs typeface="Arial"/>
+              </a:defRPr>
+            </a:lvl3pPr>
+            <a:lvl4pPr>
+              <a:defRPr sz="2175" b="0">
+                <a:solidFill>
+                  <a:srgbClr val="063E5F"/>
+                </a:solidFill>
+                <a:latin typeface="Arial"/>
+                <a:ea typeface="Arial"/>
+                <a:cs typeface="Arial"/>
+              </a:defRPr>
+            </a:lvl4pPr>
+            <a:lvl5pPr>
+              <a:defRPr sz="2175" b="0">
+                <a:solidFill>
+                  <a:srgbClr val="063E5F"/>
+                </a:solidFill>
+                <a:latin typeface="Arial"/>
+                <a:ea typeface="Arial"/>
+                <a:cs typeface="Arial"/>
+              </a:defRPr>
+            </a:lvl5pPr>
+            <a:lvl6pPr>
+              <a:defRPr sz="2175" b="0">
+                <a:solidFill>
+                  <a:srgbClr val="063E5F"/>
+                </a:solidFill>
+                <a:latin typeface="Arial"/>
+                <a:ea typeface="Arial"/>
+                <a:cs typeface="Arial"/>
+              </a:defRPr>
+            </a:lvl6pPr>
+            <a:lvl7pPr>
+              <a:defRPr sz="2175" b="0">
+                <a:solidFill>
+                  <a:srgbClr val="063E5F"/>
+                </a:solidFill>
+                <a:latin typeface="Arial"/>
+                <a:ea typeface="Arial"/>
+                <a:cs typeface="Arial"/>
+              </a:defRPr>
+            </a:lvl7pPr>
+            <a:lvl8pPr>
+              <a:defRPr sz="2175" b="0">
+                <a:solidFill>
+                  <a:srgbClr val="063E5F"/>
+                </a:solidFill>
+                <a:latin typeface="Arial"/>
+                <a:ea typeface="Arial"/>
+                <a:cs typeface="Arial"/>
+              </a:defRPr>
+            </a:lvl8pPr>
+            <a:lvl9pPr>
+              <a:defRPr sz="2175" b="0">
+                <a:solidFill>
+                  <a:srgbClr val="063E5F"/>
+                </a:solidFill>
+                <a:latin typeface="Arial"/>
+                <a:ea typeface="Arial"/>
+                <a:cs typeface="Arial"/>
+              </a:defRPr>
+            </a:lvl9pPr>
           </a:lstStyle>
           <a:p xmlns:a="http://schemas.openxmlformats.org/drawingml/2006/main">
             <a:pPr>
@@ -4511,7 +6041,7 @@
           <p:cNvPr id="5" name="">
             <a:extLst xmlns:a="http://schemas.openxmlformats.org/drawingml/2006/main">
               <a:ext uri="{FF2B5EF4-FFF2-40B4-BE49-F238E27FC236}">
-                <a16:creationId xmlns:a16="http://schemas.microsoft.com/office/drawing/2014/main" id="{78D253BF-B6EA-43E6-9EC3-516E922CB3F7}"/>
+                <a16:creationId xmlns:a16="http://schemas.microsoft.com/office/drawing/2014/main" id="{B6401D50-7D8D-4937-91F3-7802C5BD50F0}"/>
               </a:ext>
             </a:extLst>
           </p:cNvPr>
@@ -4548,6 +6078,96 @@
                 <a:cs typeface="Arial"/>
               </a:defRPr>
             </a:defPPr>
+            <a:lvl1pPr>
+              <a:defRPr sz="2175" b="0">
+                <a:solidFill>
+                  <a:srgbClr val="063E5F"/>
+                </a:solidFill>
+                <a:latin typeface="Arial"/>
+                <a:ea typeface="Arial"/>
+                <a:cs typeface="Arial"/>
+              </a:defRPr>
+            </a:lvl1pPr>
+            <a:lvl2pPr>
+              <a:defRPr sz="2175" b="0">
+                <a:solidFill>
+                  <a:srgbClr val="063E5F"/>
+                </a:solidFill>
+                <a:latin typeface="Arial"/>
+                <a:ea typeface="Arial"/>
+                <a:cs typeface="Arial"/>
+              </a:defRPr>
+            </a:lvl2pPr>
+            <a:lvl3pPr>
+              <a:defRPr sz="2175" b="0">
+                <a:solidFill>
+                  <a:srgbClr val="063E5F"/>
+                </a:solidFill>
+                <a:latin typeface="Arial"/>
+                <a:ea typeface="Arial"/>
+                <a:cs typeface="Arial"/>
+              </a:defRPr>
+            </a:lvl3pPr>
+            <a:lvl4pPr>
+              <a:defRPr sz="2175" b="0">
+                <a:solidFill>
+                  <a:srgbClr val="063E5F"/>
+                </a:solidFill>
+                <a:latin typeface="Arial"/>
+                <a:ea typeface="Arial"/>
+                <a:cs typeface="Arial"/>
+              </a:defRPr>
+            </a:lvl4pPr>
+            <a:lvl5pPr>
+              <a:defRPr sz="2175" b="0">
+                <a:solidFill>
+                  <a:srgbClr val="063E5F"/>
+                </a:solidFill>
+                <a:latin typeface="Arial"/>
+                <a:ea typeface="Arial"/>
+                <a:cs typeface="Arial"/>
+              </a:defRPr>
+            </a:lvl5pPr>
+            <a:lvl6pPr>
+              <a:defRPr sz="2175" b="0">
+                <a:solidFill>
+                  <a:srgbClr val="063E5F"/>
+                </a:solidFill>
+                <a:latin typeface="Arial"/>
+                <a:ea typeface="Arial"/>
+                <a:cs typeface="Arial"/>
+              </a:defRPr>
+            </a:lvl6pPr>
+            <a:lvl7pPr>
+              <a:defRPr sz="2175" b="0">
+                <a:solidFill>
+                  <a:srgbClr val="063E5F"/>
+                </a:solidFill>
+                <a:latin typeface="Arial"/>
+                <a:ea typeface="Arial"/>
+                <a:cs typeface="Arial"/>
+              </a:defRPr>
+            </a:lvl7pPr>
+            <a:lvl8pPr>
+              <a:defRPr sz="2175" b="0">
+                <a:solidFill>
+                  <a:srgbClr val="063E5F"/>
+                </a:solidFill>
+                <a:latin typeface="Arial"/>
+                <a:ea typeface="Arial"/>
+                <a:cs typeface="Arial"/>
+              </a:defRPr>
+            </a:lvl8pPr>
+            <a:lvl9pPr>
+              <a:defRPr sz="2175" b="0">
+                <a:solidFill>
+                  <a:srgbClr val="063E5F"/>
+                </a:solidFill>
+                <a:latin typeface="Arial"/>
+                <a:ea typeface="Arial"/>
+                <a:cs typeface="Arial"/>
+              </a:defRPr>
+            </a:lvl9pPr>
           </a:lstStyle>
           <a:p xmlns:a="http://schemas.openxmlformats.org/drawingml/2006/main">
             <a:pPr>
@@ -4579,7 +6199,7 @@
           <p:cNvPr id="6" name="">
             <a:extLst xmlns:a="http://schemas.openxmlformats.org/drawingml/2006/main">
               <a:ext uri="{FF2B5EF4-FFF2-40B4-BE49-F238E27FC236}">
-                <a16:creationId xmlns:a16="http://schemas.microsoft.com/office/drawing/2014/main" id="{51FA1DA5-51D6-419B-8EF8-3A47F99FE0BE}"/>
+                <a16:creationId xmlns:a16="http://schemas.microsoft.com/office/drawing/2014/main" id="{C93DB20B-273B-42BE-B1C5-8B109F02EF92}"/>
               </a:ext>
             </a:extLst>
           </p:cNvPr>
@@ -4616,6 +6236,96 @@
                 <a:cs typeface="Arial"/>
               </a:defRPr>
             </a:defPPr>
+            <a:lvl1pPr>
+              <a:defRPr sz="2175" b="0">
+                <a:solidFill>
+                  <a:srgbClr val="063E5F"/>
+                </a:solidFill>
+                <a:latin typeface="Arial"/>
+                <a:ea typeface="Arial"/>
+                <a:cs typeface="Arial"/>
+              </a:defRPr>
+            </a:lvl1pPr>
+            <a:lvl2pPr>
+              <a:defRPr sz="2175" b="0">
+                <a:solidFill>
+                  <a:srgbClr val="063E5F"/>
+                </a:solidFill>
+                <a:latin typeface="Arial"/>
+                <a:ea typeface="Arial"/>
+                <a:cs typeface="Arial"/>
+              </a:defRPr>
+            </a:lvl2pPr>
+            <a:lvl3pPr>
+              <a:defRPr sz="2175" b="0">
+                <a:solidFill>
+                  <a:srgbClr val="063E5F"/>
+                </a:solidFill>
+                <a:latin typeface="Arial"/>
+                <a:ea typeface="Arial"/>
+                <a:cs typeface="Arial"/>
+              </a:defRPr>
+            </a:lvl3pPr>
+            <a:lvl4pPr>
+              <a:defRPr sz="2175" b="0">
+                <a:solidFill>
+                  <a:srgbClr val="063E5F"/>
+                </a:solidFill>
+                <a:latin typeface="Arial"/>
+                <a:ea typeface="Arial"/>
+                <a:cs typeface="Arial"/>
+              </a:defRPr>
+            </a:lvl4pPr>
+            <a:lvl5pPr>
+              <a:defRPr sz="2175" b="0">
+                <a:solidFill>
+                  <a:srgbClr val="063E5F"/>
+                </a:solidFill>
+                <a:latin typeface="Arial"/>
+                <a:ea typeface="Arial"/>
+                <a:cs typeface="Arial"/>
+              </a:defRPr>
+            </a:lvl5pPr>
+            <a:lvl6pPr>
+              <a:defRPr sz="2175" b="0">
+                <a:solidFill>
+                  <a:srgbClr val="063E5F"/>
+                </a:solidFill>
+                <a:latin typeface="Arial"/>
+                <a:ea typeface="Arial"/>
+                <a:cs typeface="Arial"/>
+              </a:defRPr>
+            </a:lvl6pPr>
+            <a:lvl7pPr>
+              <a:defRPr sz="2175" b="0">
+                <a:solidFill>
+                  <a:srgbClr val="063E5F"/>
+                </a:solidFill>
+                <a:latin typeface="Arial"/>
+                <a:ea typeface="Arial"/>
+                <a:cs typeface="Arial"/>
+              </a:defRPr>
+            </a:lvl7pPr>
+            <a:lvl8pPr>
+              <a:defRPr sz="2175" b="0">
+                <a:solidFill>
+                  <a:srgbClr val="063E5F"/>
+                </a:solidFill>
+                <a:latin typeface="Arial"/>
+                <a:ea typeface="Arial"/>
+                <a:cs typeface="Arial"/>
+              </a:defRPr>
+            </a:lvl8pPr>
+            <a:lvl9pPr>
+              <a:defRPr sz="2175" b="0">
+                <a:solidFill>
+                  <a:srgbClr val="063E5F"/>
+                </a:solidFill>
+                <a:latin typeface="Arial"/>
+                <a:ea typeface="Arial"/>
+                <a:cs typeface="Arial"/>
+              </a:defRPr>
+            </a:lvl9pPr>
           </a:lstStyle>
           <a:p xmlns:a="http://schemas.openxmlformats.org/drawingml/2006/main">
             <a:pPr>
@@ -4647,7 +6357,7 @@
           <p:cNvPr id="7" name="">
             <a:extLst xmlns:a="http://schemas.openxmlformats.org/drawingml/2006/main">
               <a:ext uri="{FF2B5EF4-FFF2-40B4-BE49-F238E27FC236}">
-                <a16:creationId xmlns:a16="http://schemas.microsoft.com/office/drawing/2014/main" id="{5D79E0D7-94CD-4F72-A2ED-D0B0BD885C18}"/>
+                <a16:creationId xmlns:a16="http://schemas.microsoft.com/office/drawing/2014/main" id="{672E956F-330B-4154-958D-B30E4373801C}"/>
               </a:ext>
             </a:extLst>
           </p:cNvPr>
@@ -4684,6 +6394,96 @@
                 <a:cs typeface="Arial"/>
               </a:defRPr>
             </a:defPPr>
+            <a:lvl1pPr>
+              <a:defRPr sz="2175" b="0">
+                <a:solidFill>
+                  <a:srgbClr val="063E5F"/>
+                </a:solidFill>
+                <a:latin typeface="Arial"/>
+                <a:ea typeface="Arial"/>
+                <a:cs typeface="Arial"/>
+              </a:defRPr>
+            </a:lvl1pPr>
+            <a:lvl2pPr>
+              <a:defRPr sz="2175" b="0">
+                <a:solidFill>
+                  <a:srgbClr val="063E5F"/>
+                </a:solidFill>
+                <a:latin typeface="Arial"/>
+                <a:ea typeface="Arial"/>
+                <a:cs typeface="Arial"/>
+              </a:defRPr>
+            </a:lvl2pPr>
+            <a:lvl3pPr>
+              <a:defRPr sz="2175" b="0">
+                <a:solidFill>
+                  <a:srgbClr val="063E5F"/>
+                </a:solidFill>
+                <a:latin typeface="Arial"/>
+                <a:ea typeface="Arial"/>
+                <a:cs typeface="Arial"/>
+              </a:defRPr>
+            </a:lvl3pPr>
+            <a:lvl4pPr>
+              <a:defRPr sz="2175" b="0">
+                <a:solidFill>
+                  <a:srgbClr val="063E5F"/>
+                </a:solidFill>
+                <a:latin typeface="Arial"/>
+                <a:ea typeface="Arial"/>
+                <a:cs typeface="Arial"/>
+              </a:defRPr>
+            </a:lvl4pPr>
+            <a:lvl5pPr>
+              <a:defRPr sz="2175" b="0">
+                <a:solidFill>
+                  <a:srgbClr val="063E5F"/>
+                </a:solidFill>
+                <a:latin typeface="Arial"/>
+                <a:ea typeface="Arial"/>
+                <a:cs typeface="Arial"/>
+              </a:defRPr>
+            </a:lvl5pPr>
+            <a:lvl6pPr>
+              <a:defRPr sz="2175" b="0">
+                <a:solidFill>
+                  <a:srgbClr val="063E5F"/>
+                </a:solidFill>
+                <a:latin typeface="Arial"/>
+                <a:ea typeface="Arial"/>
+                <a:cs typeface="Arial"/>
+              </a:defRPr>
+            </a:lvl6pPr>
+            <a:lvl7pPr>
+              <a:defRPr sz="2175" b="0">
+                <a:solidFill>
+                  <a:srgbClr val="063E5F"/>
+                </a:solidFill>
+                <a:latin typeface="Arial"/>
+                <a:ea typeface="Arial"/>
+                <a:cs typeface="Arial"/>
+              </a:defRPr>
+            </a:lvl7pPr>
+            <a:lvl8pPr>
+              <a:defRPr sz="2175" b="0">
+                <a:solidFill>
+                  <a:srgbClr val="063E5F"/>
+                </a:solidFill>
+                <a:latin typeface="Arial"/>
+                <a:ea typeface="Arial"/>
+                <a:cs typeface="Arial"/>
+              </a:defRPr>
+            </a:lvl8pPr>
+            <a:lvl9pPr>
+              <a:defRPr sz="2175" b="0">
+                <a:solidFill>
+                  <a:srgbClr val="063E5F"/>
+                </a:solidFill>
+                <a:latin typeface="Arial"/>
+                <a:ea typeface="Arial"/>
+                <a:cs typeface="Arial"/>
+              </a:defRPr>
+            </a:lvl9pPr>
           </a:lstStyle>
           <a:p xmlns:a="http://schemas.openxmlformats.org/drawingml/2006/main">
             <a:pPr>
@@ -4715,7 +6515,7 @@
           <p:cNvPr id="8" name="">
             <a:extLst xmlns:a="http://schemas.openxmlformats.org/drawingml/2006/main">
               <a:ext uri="{FF2B5EF4-FFF2-40B4-BE49-F238E27FC236}">
-                <a16:creationId xmlns:a16="http://schemas.microsoft.com/office/drawing/2014/main" id="{F97553FE-D4B2-429E-910B-A98B6F55EC48}"/>
+                <a16:creationId xmlns:a16="http://schemas.microsoft.com/office/drawing/2014/main" id="{4F9EF00C-00CE-4EF9-A508-3FAC8227F36B}"/>
               </a:ext>
             </a:extLst>
           </p:cNvPr>
@@ -4752,6 +6552,96 @@
                 <a:cs typeface="Arial"/>
               </a:defRPr>
             </a:defPPr>
+            <a:lvl1pPr>
+              <a:defRPr sz="1875" b="0">
+                <a:solidFill>
+                  <a:srgbClr val="B88E23"/>
+                </a:solidFill>
+                <a:latin typeface="Arial"/>
+                <a:ea typeface="Arial"/>
+                <a:cs typeface="Arial"/>
+              </a:defRPr>
+            </a:lvl1pPr>
+            <a:lvl2pPr>
+              <a:defRPr sz="1875" b="0">
+                <a:solidFill>
+                  <a:srgbClr val="B88E23"/>
+                </a:solidFill>
+                <a:latin typeface="Arial"/>
+                <a:ea typeface="Arial"/>
+                <a:cs typeface="Arial"/>
+              </a:defRPr>
+            </a:lvl2pPr>
+            <a:lvl3pPr>
+              <a:defRPr sz="1875" b="0">
+                <a:solidFill>
+                  <a:srgbClr val="B88E23"/>
+                </a:solidFill>
+                <a:latin typeface="Arial"/>
+                <a:ea typeface="Arial"/>
+                <a:cs typeface="Arial"/>
+              </a:defRPr>
+            </a:lvl3pPr>
+            <a:lvl4pPr>
+              <a:defRPr sz="1875" b="0">
+                <a:solidFill>
+                  <a:srgbClr val="B88E23"/>
+                </a:solidFill>
+                <a:latin typeface="Arial"/>
+                <a:ea typeface="Arial"/>
+                <a:cs typeface="Arial"/>
+              </a:defRPr>
+            </a:lvl4pPr>
+            <a:lvl5pPr>
+              <a:defRPr sz="1875" b="0">
+                <a:solidFill>
+                  <a:srgbClr val="B88E23"/>
+                </a:solidFill>
+                <a:latin typeface="Arial"/>
+                <a:ea typeface="Arial"/>
+                <a:cs typeface="Arial"/>
+              </a:defRPr>
+            </a:lvl5pPr>
+            <a:lvl6pPr>
+              <a:defRPr sz="1875" b="0">
+                <a:solidFill>
+                  <a:srgbClr val="B88E23"/>
+                </a:solidFill>
+                <a:latin typeface="Arial"/>
+                <a:ea typeface="Arial"/>
+                <a:cs typeface="Arial"/>
+              </a:defRPr>
+            </a:lvl6pPr>
+            <a:lvl7pPr>
+              <a:defRPr sz="1875" b="0">
+                <a:solidFill>
+                  <a:srgbClr val="B88E23"/>
+                </a:solidFill>
+                <a:latin typeface="Arial"/>
+                <a:ea typeface="Arial"/>
+                <a:cs typeface="Arial"/>
+              </a:defRPr>
+            </a:lvl7pPr>
+            <a:lvl8pPr>
+              <a:defRPr sz="1875" b="0">
+                <a:solidFill>
+                  <a:srgbClr val="B88E23"/>
+                </a:solidFill>
+                <a:latin typeface="Arial"/>
+                <a:ea typeface="Arial"/>
+                <a:cs typeface="Arial"/>
+              </a:defRPr>
+            </a:lvl8pPr>
+            <a:lvl9pPr>
+              <a:defRPr sz="1875" b="0">
+                <a:solidFill>
+                  <a:srgbClr val="B88E23"/>
+                </a:solidFill>
+                <a:latin typeface="Arial"/>
+                <a:ea typeface="Arial"/>
+                <a:cs typeface="Arial"/>
+              </a:defRPr>
+            </a:lvl9pPr>
           </a:lstStyle>
           <a:p xmlns:a="http://schemas.openxmlformats.org/drawingml/2006/main">
             <a:pPr>
@@ -4781,7 +6671,7 @@
     </p:spTree>
     <p:extLst>
       <p:ext uri="{BB962C8B-B14F-4D97-AF65-F5344CB8AC3E}">
-        <p14:creationId xmlns:p14="http://schemas.microsoft.com/office/powerpoint/2010/main" val="1828925277"/>
+        <p14:creationId xmlns:p14="http://schemas.microsoft.com/office/powerpoint/2010/main" val="1214083467"/>
       </p:ext>
     </p:extLst>
   </p:cSld>
@@ -4812,7 +6702,7 @@
           <p:cNvPr id="6" name="">
             <a:extLst xmlns:a="http://schemas.openxmlformats.org/drawingml/2006/main">
               <a:ext uri="{FF2B5EF4-FFF2-40B4-BE49-F238E27FC236}">
-                <a16:creationId xmlns:a16="http://schemas.microsoft.com/office/drawing/2014/main" id="{59DC54C5-1C65-4837-AA00-704D957D47E9}"/>
+                <a16:creationId xmlns:a16="http://schemas.microsoft.com/office/drawing/2014/main" id="{DE9A641A-0916-4DCF-9D27-69318046E0C9}"/>
               </a:ext>
             </a:extLst>
           </p:cNvPr>
@@ -4849,6 +6739,96 @@
                 <a:cs typeface="Arial"/>
               </a:defRPr>
             </a:defPPr>
+            <a:lvl1pPr>
+              <a:defRPr sz="3300" b="1">
+                <a:solidFill>
+                  <a:srgbClr val="063E5F"/>
+                </a:solidFill>
+                <a:latin typeface="Arial"/>
+                <a:ea typeface="Arial"/>
+                <a:cs typeface="Arial"/>
+              </a:defRPr>
+            </a:lvl1pPr>
+            <a:lvl2pPr>
+              <a:defRPr sz="3300" b="1">
+                <a:solidFill>
+                  <a:srgbClr val="063E5F"/>
+                </a:solidFill>
+                <a:latin typeface="Arial"/>
+                <a:ea typeface="Arial"/>
+                <a:cs typeface="Arial"/>
+              </a:defRPr>
+            </a:lvl2pPr>
+            <a:lvl3pPr>
+              <a:defRPr sz="3300" b="1">
+                <a:solidFill>
+                  <a:srgbClr val="063E5F"/>
+                </a:solidFill>
+                <a:latin typeface="Arial"/>
+                <a:ea typeface="Arial"/>
+                <a:cs typeface="Arial"/>
+              </a:defRPr>
+            </a:lvl3pPr>
+            <a:lvl4pPr>
+              <a:defRPr sz="3300" b="1">
+                <a:solidFill>
+                  <a:srgbClr val="063E5F"/>
+                </a:solidFill>
+                <a:latin typeface="Arial"/>
+                <a:ea typeface="Arial"/>
+                <a:cs typeface="Arial"/>
+              </a:defRPr>
+            </a:lvl4pPr>
+            <a:lvl5pPr>
+              <a:defRPr sz="3300" b="1">
+                <a:solidFill>
+                  <a:srgbClr val="063E5F"/>
+                </a:solidFill>
+                <a:latin typeface="Arial"/>
+                <a:ea typeface="Arial"/>
+                <a:cs typeface="Arial"/>
+              </a:defRPr>
+            </a:lvl5pPr>
+            <a:lvl6pPr>
+              <a:defRPr sz="3300" b="1">
+                <a:solidFill>
+                  <a:srgbClr val="063E5F"/>
+                </a:solidFill>
+                <a:latin typeface="Arial"/>
+                <a:ea typeface="Arial"/>
+                <a:cs typeface="Arial"/>
+              </a:defRPr>
+            </a:lvl6pPr>
+            <a:lvl7pPr>
+              <a:defRPr sz="3300" b="1">
+                <a:solidFill>
+                  <a:srgbClr val="063E5F"/>
+                </a:solidFill>
+                <a:latin typeface="Arial"/>
+                <a:ea typeface="Arial"/>
+                <a:cs typeface="Arial"/>
+              </a:defRPr>
+            </a:lvl7pPr>
+            <a:lvl8pPr>
+              <a:defRPr sz="3300" b="1">
+                <a:solidFill>
+                  <a:srgbClr val="063E5F"/>
+                </a:solidFill>
+                <a:latin typeface="Arial"/>
+                <a:ea typeface="Arial"/>
+                <a:cs typeface="Arial"/>
+              </a:defRPr>
+            </a:lvl8pPr>
+            <a:lvl9pPr>
+              <a:defRPr sz="3300" b="1">
+                <a:solidFill>
+                  <a:srgbClr val="063E5F"/>
+                </a:solidFill>
+                <a:latin typeface="Arial"/>
+                <a:ea typeface="Arial"/>
+                <a:cs typeface="Arial"/>
+              </a:defRPr>
+            </a:lvl9pPr>
           </a:lstStyle>
           <a:p xmlns:a="http://schemas.openxmlformats.org/drawingml/2006/main">
             <a:pPr>
@@ -4880,7 +6860,7 @@
           <p:cNvPr id="2" name="">
             <a:extLst xmlns:a="http://schemas.openxmlformats.org/drawingml/2006/main">
               <a:ext uri="{FF2B5EF4-FFF2-40B4-BE49-F238E27FC236}">
-                <a16:creationId xmlns:a16="http://schemas.microsoft.com/office/drawing/2014/main" id="{B37CB3D4-C0B0-4DF3-9605-7C508670E0DC}"/>
+                <a16:creationId xmlns:a16="http://schemas.microsoft.com/office/drawing/2014/main" id="{E1E7D746-022C-464C-ACE4-D166E750A781}"/>
               </a:ext>
             </a:extLst>
           </p:cNvPr>
@@ -4917,6 +6897,96 @@
                 <a:cs typeface="Arial"/>
               </a:defRPr>
             </a:defPPr>
+            <a:lvl1pPr>
+              <a:defRPr sz="1200" b="0">
+                <a:solidFill>
+                  <a:srgbClr val="536272"/>
+                </a:solidFill>
+                <a:latin typeface="Arial"/>
+                <a:ea typeface="Arial"/>
+                <a:cs typeface="Arial"/>
+              </a:defRPr>
+            </a:lvl1pPr>
+            <a:lvl2pPr>
+              <a:defRPr sz="1200" b="0">
+                <a:solidFill>
+                  <a:srgbClr val="536272"/>
+                </a:solidFill>
+                <a:latin typeface="Arial"/>
+                <a:ea typeface="Arial"/>
+                <a:cs typeface="Arial"/>
+              </a:defRPr>
+            </a:lvl2pPr>
+            <a:lvl3pPr>
+              <a:defRPr sz="1200" b="0">
+                <a:solidFill>
+                  <a:srgbClr val="536272"/>
+                </a:solidFill>
+                <a:latin typeface="Arial"/>
+                <a:ea typeface="Arial"/>
+                <a:cs typeface="Arial"/>
+              </a:defRPr>
+            </a:lvl3pPr>
+            <a:lvl4pPr>
+              <a:defRPr sz="1200" b="0">
+                <a:solidFill>
+                  <a:srgbClr val="536272"/>
+                </a:solidFill>
+                <a:latin typeface="Arial"/>
+                <a:ea typeface="Arial"/>
+                <a:cs typeface="Arial"/>
+              </a:defRPr>
+            </a:lvl4pPr>
+            <a:lvl5pPr>
+              <a:defRPr sz="1200" b="0">
+                <a:solidFill>
+                  <a:srgbClr val="536272"/>
+                </a:solidFill>
+                <a:latin typeface="Arial"/>
+                <a:ea typeface="Arial"/>
+                <a:cs typeface="Arial"/>
+              </a:defRPr>
+            </a:lvl5pPr>
+            <a:lvl6pPr>
+              <a:defRPr sz="1200" b="0">
+                <a:solidFill>
+                  <a:srgbClr val="536272"/>
+                </a:solidFill>
+                <a:latin typeface="Arial"/>
+                <a:ea typeface="Arial"/>
+                <a:cs typeface="Arial"/>
+              </a:defRPr>
+            </a:lvl6pPr>
+            <a:lvl7pPr>
+              <a:defRPr sz="1200" b="0">
+                <a:solidFill>
+                  <a:srgbClr val="536272"/>
+                </a:solidFill>
+                <a:latin typeface="Arial"/>
+                <a:ea typeface="Arial"/>
+                <a:cs typeface="Arial"/>
+              </a:defRPr>
+            </a:lvl7pPr>
+            <a:lvl8pPr>
+              <a:defRPr sz="1200" b="0">
+                <a:solidFill>
+                  <a:srgbClr val="536272"/>
+                </a:solidFill>
+                <a:latin typeface="Arial"/>
+                <a:ea typeface="Arial"/>
+                <a:cs typeface="Arial"/>
+              </a:defRPr>
+            </a:lvl8pPr>
+            <a:lvl9pPr>
+              <a:defRPr sz="1200" b="0">
+                <a:solidFill>
+                  <a:srgbClr val="536272"/>
+                </a:solidFill>
+                <a:latin typeface="Arial"/>
+                <a:ea typeface="Arial"/>
+                <a:cs typeface="Arial"/>
+              </a:defRPr>
+            </a:lvl9pPr>
           </a:lstStyle>
           <a:p xmlns:a="http://schemas.openxmlformats.org/drawingml/2006/main">
             <a:pPr>
@@ -4948,7 +7018,7 @@
           <p:cNvPr id="3" name="">
             <a:extLst xmlns:a="http://schemas.openxmlformats.org/drawingml/2006/main">
               <a:ext uri="{FF2B5EF4-FFF2-40B4-BE49-F238E27FC236}">
-                <a16:creationId xmlns:a16="http://schemas.microsoft.com/office/drawing/2014/main" id="{3C3018A6-AF3E-491D-BEFF-B14AEE2ACDD0}"/>
+                <a16:creationId xmlns:a16="http://schemas.microsoft.com/office/drawing/2014/main" id="{C5E09331-9BC7-4733-B89E-F7A0800E3F81}"/>
               </a:ext>
             </a:extLst>
           </p:cNvPr>
@@ -4985,6 +7055,96 @@
                 <a:cs typeface="Arial"/>
               </a:defRPr>
             </a:defPPr>
+            <a:lvl1pPr>
+              <a:defRPr sz="1275" b="0">
+                <a:solidFill>
+                  <a:srgbClr val="B88E23"/>
+                </a:solidFill>
+                <a:latin typeface="Arial"/>
+                <a:ea typeface="Arial"/>
+                <a:cs typeface="Arial"/>
+              </a:defRPr>
+            </a:lvl1pPr>
+            <a:lvl2pPr>
+              <a:defRPr sz="1275" b="0">
+                <a:solidFill>
+                  <a:srgbClr val="B88E23"/>
+                </a:solidFill>
+                <a:latin typeface="Arial"/>
+                <a:ea typeface="Arial"/>
+                <a:cs typeface="Arial"/>
+              </a:defRPr>
+            </a:lvl2pPr>
+            <a:lvl3pPr>
+              <a:defRPr sz="1275" b="0">
+                <a:solidFill>
+                  <a:srgbClr val="B88E23"/>
+                </a:solidFill>
+                <a:latin typeface="Arial"/>
+                <a:ea typeface="Arial"/>
+                <a:cs typeface="Arial"/>
+              </a:defRPr>
+            </a:lvl3pPr>
+            <a:lvl4pPr>
+              <a:defRPr sz="1275" b="0">
+                <a:solidFill>
+                  <a:srgbClr val="B88E23"/>
+                </a:solidFill>
+                <a:latin typeface="Arial"/>
+                <a:ea typeface="Arial"/>
+                <a:cs typeface="Arial"/>
+              </a:defRPr>
+            </a:lvl4pPr>
+            <a:lvl5pPr>
+              <a:defRPr sz="1275" b="0">
+                <a:solidFill>
+                  <a:srgbClr val="B88E23"/>
+                </a:solidFill>
+                <a:latin typeface="Arial"/>
+                <a:ea typeface="Arial"/>
+                <a:cs typeface="Arial"/>
+              </a:defRPr>
+            </a:lvl5pPr>
+            <a:lvl6pPr>
+              <a:defRPr sz="1275" b="0">
+                <a:solidFill>
+                  <a:srgbClr val="B88E23"/>
+                </a:solidFill>
+                <a:latin typeface="Arial"/>
+                <a:ea typeface="Arial"/>
+                <a:cs typeface="Arial"/>
+              </a:defRPr>
+            </a:lvl6pPr>
+            <a:lvl7pPr>
+              <a:defRPr sz="1275" b="0">
+                <a:solidFill>
+                  <a:srgbClr val="B88E23"/>
+                </a:solidFill>
+                <a:latin typeface="Arial"/>
+                <a:ea typeface="Arial"/>
+                <a:cs typeface="Arial"/>
+              </a:defRPr>
+            </a:lvl7pPr>
+            <a:lvl8pPr>
+              <a:defRPr sz="1275" b="0">
+                <a:solidFill>
+                  <a:srgbClr val="B88E23"/>
+                </a:solidFill>
+                <a:latin typeface="Arial"/>
+                <a:ea typeface="Arial"/>
+                <a:cs typeface="Arial"/>
+              </a:defRPr>
+            </a:lvl8pPr>
+            <a:lvl9pPr>
+              <a:defRPr sz="1275" b="0">
+                <a:solidFill>
+                  <a:srgbClr val="B88E23"/>
+                </a:solidFill>
+                <a:latin typeface="Arial"/>
+                <a:ea typeface="Arial"/>
+                <a:cs typeface="Arial"/>
+              </a:defRPr>
+            </a:lvl9pPr>
           </a:lstStyle>
           <a:p xmlns:a="http://schemas.openxmlformats.org/drawingml/2006/main">
             <a:pPr>
@@ -5016,7 +7176,7 @@
           <p:cNvPr id="4" name="">
             <a:extLst xmlns:a="http://schemas.openxmlformats.org/drawingml/2006/main">
               <a:ext uri="{FF2B5EF4-FFF2-40B4-BE49-F238E27FC236}">
-                <a16:creationId xmlns:a16="http://schemas.microsoft.com/office/drawing/2014/main" id="{F2D9FC1F-1DF5-46CF-A044-55C203B99130}"/>
+                <a16:creationId xmlns:a16="http://schemas.microsoft.com/office/drawing/2014/main" id="{65C1B726-24CD-4189-9476-4961B7F05EF1}"/>
               </a:ext>
             </a:extLst>
           </p:cNvPr>
@@ -5026,7 +7186,7 @@
           <p:nvPr/>
         </p:nvPicPr>
         <p:blipFill>
-          <a:blip xmlns:r="http://schemas.openxmlformats.org/officeDocument/2006/relationships" xmlns:a="http://schemas.openxmlformats.org/drawingml/2006/main" r:embed="Rd03ec4d4d1864a45"/>
+          <a:blip xmlns:r="http://schemas.openxmlformats.org/officeDocument/2006/relationships" xmlns:a="http://schemas.openxmlformats.org/drawingml/2006/main" r:embed="Radfa2d913f86439b"/>
           <a:stretch xmlns:a="http://schemas.openxmlformats.org/drawingml/2006/main"/>
         </p:blipFill>
         <p:spPr>
@@ -5044,7 +7204,7 @@
           <p:cNvPr id="5" name="">
             <a:extLst xmlns:a="http://schemas.openxmlformats.org/drawingml/2006/main">
               <a:ext uri="{FF2B5EF4-FFF2-40B4-BE49-F238E27FC236}">
-                <a16:creationId xmlns:a16="http://schemas.microsoft.com/office/drawing/2014/main" id="{98BA2D18-EA90-4E4B-9EC5-EF5E820BD894}"/>
+                <a16:creationId xmlns:a16="http://schemas.microsoft.com/office/drawing/2014/main" id="{0079CE7E-1E7B-4488-B94B-B559ED26AFF0}"/>
               </a:ext>
             </a:extLst>
           </p:cNvPr>
@@ -5081,6 +7241,96 @@
                 <a:cs typeface="Arial"/>
               </a:defRPr>
             </a:defPPr>
+            <a:lvl1pPr>
+              <a:defRPr sz="2025" b="0">
+                <a:solidFill>
+                  <a:srgbClr val="063E5F"/>
+                </a:solidFill>
+                <a:latin typeface="Arial"/>
+                <a:ea typeface="Arial"/>
+                <a:cs typeface="Arial"/>
+              </a:defRPr>
+            </a:lvl1pPr>
+            <a:lvl2pPr>
+              <a:defRPr sz="2025" b="0">
+                <a:solidFill>
+                  <a:srgbClr val="063E5F"/>
+                </a:solidFill>
+                <a:latin typeface="Arial"/>
+                <a:ea typeface="Arial"/>
+                <a:cs typeface="Arial"/>
+              </a:defRPr>
+            </a:lvl2pPr>
+            <a:lvl3pPr>
+              <a:defRPr sz="2025" b="0">
+                <a:solidFill>
+                  <a:srgbClr val="063E5F"/>
+                </a:solidFill>
+                <a:latin typeface="Arial"/>
+                <a:ea typeface="Arial"/>
+                <a:cs typeface="Arial"/>
+              </a:defRPr>
+            </a:lvl3pPr>
+            <a:lvl4pPr>
+              <a:defRPr sz="2025" b="0">
+                <a:solidFill>
+                  <a:srgbClr val="063E5F"/>
+                </a:solidFill>
+                <a:latin typeface="Arial"/>
+                <a:ea typeface="Arial"/>
+                <a:cs typeface="Arial"/>
+              </a:defRPr>
+            </a:lvl4pPr>
+            <a:lvl5pPr>
+              <a:defRPr sz="2025" b="0">
+                <a:solidFill>
+                  <a:srgbClr val="063E5F"/>
+                </a:solidFill>
+                <a:latin typeface="Arial"/>
+                <a:ea typeface="Arial"/>
+                <a:cs typeface="Arial"/>
+              </a:defRPr>
+            </a:lvl5pPr>
+            <a:lvl6pPr>
+              <a:defRPr sz="2025" b="0">
+                <a:solidFill>
+                  <a:srgbClr val="063E5F"/>
+                </a:solidFill>
+                <a:latin typeface="Arial"/>
+                <a:ea typeface="Arial"/>
+                <a:cs typeface="Arial"/>
+              </a:defRPr>
+            </a:lvl6pPr>
+            <a:lvl7pPr>
+              <a:defRPr sz="2025" b="0">
+                <a:solidFill>
+                  <a:srgbClr val="063E5F"/>
+                </a:solidFill>
+                <a:latin typeface="Arial"/>
+                <a:ea typeface="Arial"/>
+                <a:cs typeface="Arial"/>
+              </a:defRPr>
+            </a:lvl7pPr>
+            <a:lvl8pPr>
+              <a:defRPr sz="2025" b="0">
+                <a:solidFill>
+                  <a:srgbClr val="063E5F"/>
+                </a:solidFill>
+                <a:latin typeface="Arial"/>
+                <a:ea typeface="Arial"/>
+                <a:cs typeface="Arial"/>
+              </a:defRPr>
+            </a:lvl8pPr>
+            <a:lvl9pPr>
+              <a:defRPr sz="2025" b="0">
+                <a:solidFill>
+                  <a:srgbClr val="063E5F"/>
+                </a:solidFill>
+                <a:latin typeface="Arial"/>
+                <a:ea typeface="Arial"/>
+                <a:cs typeface="Arial"/>
+              </a:defRPr>
+            </a:lvl9pPr>
           </a:lstStyle>
           <a:p xmlns:a="http://schemas.openxmlformats.org/drawingml/2006/main">
             <a:pPr>
@@ -5110,7 +7360,7 @@
     </p:spTree>
     <p:extLst>
       <p:ext uri="{BB962C8B-B14F-4D97-AF65-F5344CB8AC3E}">
-        <p14:creationId xmlns:p14="http://schemas.microsoft.com/office/powerpoint/2010/main" val="293886745"/>
+        <p14:creationId xmlns:p14="http://schemas.microsoft.com/office/powerpoint/2010/main" val="404795426"/>
       </p:ext>
     </p:extLst>
   </p:cSld>
@@ -5141,7 +7391,7 @@
           <p:cNvPr id="7" name="">
             <a:extLst xmlns:a="http://schemas.openxmlformats.org/drawingml/2006/main">
               <a:ext uri="{FF2B5EF4-FFF2-40B4-BE49-F238E27FC236}">
-                <a16:creationId xmlns:a16="http://schemas.microsoft.com/office/drawing/2014/main" id="{083B426F-8907-4FB0-8118-1B5896D8165D}"/>
+                <a16:creationId xmlns:a16="http://schemas.microsoft.com/office/drawing/2014/main" id="{8E7F2398-CB83-4269-B811-7970BF445C0E}"/>
               </a:ext>
             </a:extLst>
           </p:cNvPr>
@@ -5178,6 +7428,96 @@
                 <a:cs typeface="Arial"/>
               </a:defRPr>
             </a:defPPr>
+            <a:lvl1pPr>
+              <a:defRPr sz="3300" b="1">
+                <a:solidFill>
+                  <a:srgbClr val="063E5F"/>
+                </a:solidFill>
+                <a:latin typeface="Arial"/>
+                <a:ea typeface="Arial"/>
+                <a:cs typeface="Arial"/>
+              </a:defRPr>
+            </a:lvl1pPr>
+            <a:lvl2pPr>
+              <a:defRPr sz="3300" b="1">
+                <a:solidFill>
+                  <a:srgbClr val="063E5F"/>
+                </a:solidFill>
+                <a:latin typeface="Arial"/>
+                <a:ea typeface="Arial"/>
+                <a:cs typeface="Arial"/>
+              </a:defRPr>
+            </a:lvl2pPr>
+            <a:lvl3pPr>
+              <a:defRPr sz="3300" b="1">
+                <a:solidFill>
+                  <a:srgbClr val="063E5F"/>
+                </a:solidFill>
+                <a:latin typeface="Arial"/>
+                <a:ea typeface="Arial"/>
+                <a:cs typeface="Arial"/>
+              </a:defRPr>
+            </a:lvl3pPr>
+            <a:lvl4pPr>
+              <a:defRPr sz="3300" b="1">
+                <a:solidFill>
+                  <a:srgbClr val="063E5F"/>
+                </a:solidFill>
+                <a:latin typeface="Arial"/>
+                <a:ea typeface="Arial"/>
+                <a:cs typeface="Arial"/>
+              </a:defRPr>
+            </a:lvl4pPr>
+            <a:lvl5pPr>
+              <a:defRPr sz="3300" b="1">
+                <a:solidFill>
+                  <a:srgbClr val="063E5F"/>
+                </a:solidFill>
+                <a:latin typeface="Arial"/>
+                <a:ea typeface="Arial"/>
+                <a:cs typeface="Arial"/>
+              </a:defRPr>
+            </a:lvl5pPr>
+            <a:lvl6pPr>
+              <a:defRPr sz="3300" b="1">
+                <a:solidFill>
+                  <a:srgbClr val="063E5F"/>
+                </a:solidFill>
+                <a:latin typeface="Arial"/>
+                <a:ea typeface="Arial"/>
+                <a:cs typeface="Arial"/>
+              </a:defRPr>
+            </a:lvl6pPr>
+            <a:lvl7pPr>
+              <a:defRPr sz="3300" b="1">
+                <a:solidFill>
+                  <a:srgbClr val="063E5F"/>
+                </a:solidFill>
+                <a:latin typeface="Arial"/>
+                <a:ea typeface="Arial"/>
+                <a:cs typeface="Arial"/>
+              </a:defRPr>
+            </a:lvl7pPr>
+            <a:lvl8pPr>
+              <a:defRPr sz="3300" b="1">
+                <a:solidFill>
+                  <a:srgbClr val="063E5F"/>
+                </a:solidFill>
+                <a:latin typeface="Arial"/>
+                <a:ea typeface="Arial"/>
+                <a:cs typeface="Arial"/>
+              </a:defRPr>
+            </a:lvl8pPr>
+            <a:lvl9pPr>
+              <a:defRPr sz="3300" b="1">
+                <a:solidFill>
+                  <a:srgbClr val="063E5F"/>
+                </a:solidFill>
+                <a:latin typeface="Arial"/>
+                <a:ea typeface="Arial"/>
+                <a:cs typeface="Arial"/>
+              </a:defRPr>
+            </a:lvl9pPr>
           </a:lstStyle>
           <a:p xmlns:a="http://schemas.openxmlformats.org/drawingml/2006/main">
             <a:pPr>
@@ -5209,7 +7549,7 @@
           <p:cNvPr id="2" name="">
             <a:extLst xmlns:a="http://schemas.openxmlformats.org/drawingml/2006/main">
               <a:ext uri="{FF2B5EF4-FFF2-40B4-BE49-F238E27FC236}">
-                <a16:creationId xmlns:a16="http://schemas.microsoft.com/office/drawing/2014/main" id="{4E38901F-634A-4064-96BE-D247A0A36A87}"/>
+                <a16:creationId xmlns:a16="http://schemas.microsoft.com/office/drawing/2014/main" id="{867DB74E-B004-4238-A6C2-3295F5839D52}"/>
               </a:ext>
             </a:extLst>
           </p:cNvPr>
@@ -5246,6 +7586,96 @@
                 <a:cs typeface="Arial"/>
               </a:defRPr>
             </a:defPPr>
+            <a:lvl1pPr>
+              <a:defRPr sz="1200" b="0">
+                <a:solidFill>
+                  <a:srgbClr val="536272"/>
+                </a:solidFill>
+                <a:latin typeface="Arial"/>
+                <a:ea typeface="Arial"/>
+                <a:cs typeface="Arial"/>
+              </a:defRPr>
+            </a:lvl1pPr>
+            <a:lvl2pPr>
+              <a:defRPr sz="1200" b="0">
+                <a:solidFill>
+                  <a:srgbClr val="536272"/>
+                </a:solidFill>
+                <a:latin typeface="Arial"/>
+                <a:ea typeface="Arial"/>
+                <a:cs typeface="Arial"/>
+              </a:defRPr>
+            </a:lvl2pPr>
+            <a:lvl3pPr>
+              <a:defRPr sz="1200" b="0">
+                <a:solidFill>
+                  <a:srgbClr val="536272"/>
+                </a:solidFill>
+                <a:latin typeface="Arial"/>
+                <a:ea typeface="Arial"/>
+                <a:cs typeface="Arial"/>
+              </a:defRPr>
+            </a:lvl3pPr>
+            <a:lvl4pPr>
+              <a:defRPr sz="1200" b="0">
+                <a:solidFill>
+                  <a:srgbClr val="536272"/>
+                </a:solidFill>
+                <a:latin typeface="Arial"/>
+                <a:ea typeface="Arial"/>
+                <a:cs typeface="Arial"/>
+              </a:defRPr>
+            </a:lvl4pPr>
+            <a:lvl5pPr>
+              <a:defRPr sz="1200" b="0">
+                <a:solidFill>
+                  <a:srgbClr val="536272"/>
+                </a:solidFill>
+                <a:latin typeface="Arial"/>
+                <a:ea typeface="Arial"/>
+                <a:cs typeface="Arial"/>
+              </a:defRPr>
+            </a:lvl5pPr>
+            <a:lvl6pPr>
+              <a:defRPr sz="1200" b="0">
+                <a:solidFill>
+                  <a:srgbClr val="536272"/>
+                </a:solidFill>
+                <a:latin typeface="Arial"/>
+                <a:ea typeface="Arial"/>
+                <a:cs typeface="Arial"/>
+              </a:defRPr>
+            </a:lvl6pPr>
+            <a:lvl7pPr>
+              <a:defRPr sz="1200" b="0">
+                <a:solidFill>
+                  <a:srgbClr val="536272"/>
+                </a:solidFill>
+                <a:latin typeface="Arial"/>
+                <a:ea typeface="Arial"/>
+                <a:cs typeface="Arial"/>
+              </a:defRPr>
+            </a:lvl7pPr>
+            <a:lvl8pPr>
+              <a:defRPr sz="1200" b="0">
+                <a:solidFill>
+                  <a:srgbClr val="536272"/>
+                </a:solidFill>
+                <a:latin typeface="Arial"/>
+                <a:ea typeface="Arial"/>
+                <a:cs typeface="Arial"/>
+              </a:defRPr>
+            </a:lvl8pPr>
+            <a:lvl9pPr>
+              <a:defRPr sz="1200" b="0">
+                <a:solidFill>
+                  <a:srgbClr val="536272"/>
+                </a:solidFill>
+                <a:latin typeface="Arial"/>
+                <a:ea typeface="Arial"/>
+                <a:cs typeface="Arial"/>
+              </a:defRPr>
+            </a:lvl9pPr>
           </a:lstStyle>
           <a:p xmlns:a="http://schemas.openxmlformats.org/drawingml/2006/main">
             <a:pPr>
@@ -5277,7 +7707,7 @@
           <p:cNvPr id="3" name="">
             <a:extLst xmlns:a="http://schemas.openxmlformats.org/drawingml/2006/main">
               <a:ext uri="{FF2B5EF4-FFF2-40B4-BE49-F238E27FC236}">
-                <a16:creationId xmlns:a16="http://schemas.microsoft.com/office/drawing/2014/main" id="{26891133-5583-4590-8261-0C8556D4681A}"/>
+                <a16:creationId xmlns:a16="http://schemas.microsoft.com/office/drawing/2014/main" id="{DEF145CD-582C-4DD4-B868-AB13EBB423E7}"/>
               </a:ext>
             </a:extLst>
           </p:cNvPr>
@@ -5314,6 +7744,96 @@
                 <a:cs typeface="Arial"/>
               </a:defRPr>
             </a:defPPr>
+            <a:lvl1pPr>
+              <a:defRPr sz="1275" b="0">
+                <a:solidFill>
+                  <a:srgbClr val="B88E23"/>
+                </a:solidFill>
+                <a:latin typeface="Arial"/>
+                <a:ea typeface="Arial"/>
+                <a:cs typeface="Arial"/>
+              </a:defRPr>
+            </a:lvl1pPr>
+            <a:lvl2pPr>
+              <a:defRPr sz="1275" b="0">
+                <a:solidFill>
+                  <a:srgbClr val="B88E23"/>
+                </a:solidFill>
+                <a:latin typeface="Arial"/>
+                <a:ea typeface="Arial"/>
+                <a:cs typeface="Arial"/>
+              </a:defRPr>
+            </a:lvl2pPr>
+            <a:lvl3pPr>
+              <a:defRPr sz="1275" b="0">
+                <a:solidFill>
+                  <a:srgbClr val="B88E23"/>
+                </a:solidFill>
+                <a:latin typeface="Arial"/>
+                <a:ea typeface="Arial"/>
+                <a:cs typeface="Arial"/>
+              </a:defRPr>
+            </a:lvl3pPr>
+            <a:lvl4pPr>
+              <a:defRPr sz="1275" b="0">
+                <a:solidFill>
+                  <a:srgbClr val="B88E23"/>
+                </a:solidFill>
+                <a:latin typeface="Arial"/>
+                <a:ea typeface="Arial"/>
+                <a:cs typeface="Arial"/>
+              </a:defRPr>
+            </a:lvl4pPr>
+            <a:lvl5pPr>
+              <a:defRPr sz="1275" b="0">
+                <a:solidFill>
+                  <a:srgbClr val="B88E23"/>
+                </a:solidFill>
+                <a:latin typeface="Arial"/>
+                <a:ea typeface="Arial"/>
+                <a:cs typeface="Arial"/>
+              </a:defRPr>
+            </a:lvl5pPr>
+            <a:lvl6pPr>
+              <a:defRPr sz="1275" b="0">
+                <a:solidFill>
+                  <a:srgbClr val="B88E23"/>
+                </a:solidFill>
+                <a:latin typeface="Arial"/>
+                <a:ea typeface="Arial"/>
+                <a:cs typeface="Arial"/>
+              </a:defRPr>
+            </a:lvl6pPr>
+            <a:lvl7pPr>
+              <a:defRPr sz="1275" b="0">
+                <a:solidFill>
+                  <a:srgbClr val="B88E23"/>
+                </a:solidFill>
+                <a:latin typeface="Arial"/>
+                <a:ea typeface="Arial"/>
+                <a:cs typeface="Arial"/>
+              </a:defRPr>
+            </a:lvl7pPr>
+            <a:lvl8pPr>
+              <a:defRPr sz="1275" b="0">
+                <a:solidFill>
+                  <a:srgbClr val="B88E23"/>
+                </a:solidFill>
+                <a:latin typeface="Arial"/>
+                <a:ea typeface="Arial"/>
+                <a:cs typeface="Arial"/>
+              </a:defRPr>
+            </a:lvl8pPr>
+            <a:lvl9pPr>
+              <a:defRPr sz="1275" b="0">
+                <a:solidFill>
+                  <a:srgbClr val="B88E23"/>
+                </a:solidFill>
+                <a:latin typeface="Arial"/>
+                <a:ea typeface="Arial"/>
+                <a:cs typeface="Arial"/>
+              </a:defRPr>
+            </a:lvl9pPr>
           </a:lstStyle>
           <a:p xmlns:a="http://schemas.openxmlformats.org/drawingml/2006/main">
             <a:pPr>
@@ -5345,7 +7865,7 @@
           <p:cNvPr id="4" name="">
             <a:extLst xmlns:a="http://schemas.openxmlformats.org/drawingml/2006/main">
               <a:ext uri="{FF2B5EF4-FFF2-40B4-BE49-F238E27FC236}">
-                <a16:creationId xmlns:a16="http://schemas.microsoft.com/office/drawing/2014/main" id="{C92B9392-712A-477E-9702-E00FCBD397BA}"/>
+                <a16:creationId xmlns:a16="http://schemas.microsoft.com/office/drawing/2014/main" id="{CA5498BA-5033-49CD-B2A2-65667784D850}"/>
               </a:ext>
             </a:extLst>
           </p:cNvPr>
@@ -6199,7 +8719,7 @@
           <p:cNvPr id="5" name="">
             <a:extLst xmlns:a="http://schemas.openxmlformats.org/drawingml/2006/main">
               <a:ext uri="{FF2B5EF4-FFF2-40B4-BE49-F238E27FC236}">
-                <a16:creationId xmlns:a16="http://schemas.microsoft.com/office/drawing/2014/main" id="{C678BA6A-1038-4B2D-8AFE-981BBACD391E}"/>
+                <a16:creationId xmlns:a16="http://schemas.microsoft.com/office/drawing/2014/main" id="{82B572C6-4489-45CB-B307-0FB0AFC0FF34}"/>
               </a:ext>
             </a:extLst>
           </p:cNvPr>
@@ -6236,6 +8756,96 @@
                 <a:cs typeface="Arial"/>
               </a:defRPr>
             </a:defPPr>
+            <a:lvl1pPr>
+              <a:defRPr sz="2175" b="0">
+                <a:solidFill>
+                  <a:srgbClr val="063E5F"/>
+                </a:solidFill>
+                <a:latin typeface="Arial"/>
+                <a:ea typeface="Arial"/>
+                <a:cs typeface="Arial"/>
+              </a:defRPr>
+            </a:lvl1pPr>
+            <a:lvl2pPr>
+              <a:defRPr sz="2175" b="0">
+                <a:solidFill>
+                  <a:srgbClr val="063E5F"/>
+                </a:solidFill>
+                <a:latin typeface="Arial"/>
+                <a:ea typeface="Arial"/>
+                <a:cs typeface="Arial"/>
+              </a:defRPr>
+            </a:lvl2pPr>
+            <a:lvl3pPr>
+              <a:defRPr sz="2175" b="0">
+                <a:solidFill>
+                  <a:srgbClr val="063E5F"/>
+                </a:solidFill>
+                <a:latin typeface="Arial"/>
+                <a:ea typeface="Arial"/>
+                <a:cs typeface="Arial"/>
+              </a:defRPr>
+            </a:lvl3pPr>
+            <a:lvl4pPr>
+              <a:defRPr sz="2175" b="0">
+                <a:solidFill>
+                  <a:srgbClr val="063E5F"/>
+                </a:solidFill>
+                <a:latin typeface="Arial"/>
+                <a:ea typeface="Arial"/>
+                <a:cs typeface="Arial"/>
+              </a:defRPr>
+            </a:lvl4pPr>
+            <a:lvl5pPr>
+              <a:defRPr sz="2175" b="0">
+                <a:solidFill>
+                  <a:srgbClr val="063E5F"/>
+                </a:solidFill>
+                <a:latin typeface="Arial"/>
+                <a:ea typeface="Arial"/>
+                <a:cs typeface="Arial"/>
+              </a:defRPr>
+            </a:lvl5pPr>
+            <a:lvl6pPr>
+              <a:defRPr sz="2175" b="0">
+                <a:solidFill>
+                  <a:srgbClr val="063E5F"/>
+                </a:solidFill>
+                <a:latin typeface="Arial"/>
+                <a:ea typeface="Arial"/>
+                <a:cs typeface="Arial"/>
+              </a:defRPr>
+            </a:lvl6pPr>
+            <a:lvl7pPr>
+              <a:defRPr sz="2175" b="0">
+                <a:solidFill>
+                  <a:srgbClr val="063E5F"/>
+                </a:solidFill>
+                <a:latin typeface="Arial"/>
+                <a:ea typeface="Arial"/>
+                <a:cs typeface="Arial"/>
+              </a:defRPr>
+            </a:lvl7pPr>
+            <a:lvl8pPr>
+              <a:defRPr sz="2175" b="0">
+                <a:solidFill>
+                  <a:srgbClr val="063E5F"/>
+                </a:solidFill>
+                <a:latin typeface="Arial"/>
+                <a:ea typeface="Arial"/>
+                <a:cs typeface="Arial"/>
+              </a:defRPr>
+            </a:lvl8pPr>
+            <a:lvl9pPr>
+              <a:defRPr sz="2175" b="0">
+                <a:solidFill>
+                  <a:srgbClr val="063E5F"/>
+                </a:solidFill>
+                <a:latin typeface="Arial"/>
+                <a:ea typeface="Arial"/>
+                <a:cs typeface="Arial"/>
+              </a:defRPr>
+            </a:lvl9pPr>
           </a:lstStyle>
           <a:p xmlns:a="http://schemas.openxmlformats.org/drawingml/2006/main">
             <a:pPr>
@@ -6267,7 +8877,7 @@
           <p:cNvPr id="6" name="">
             <a:extLst xmlns:a="http://schemas.openxmlformats.org/drawingml/2006/main">
               <a:ext uri="{FF2B5EF4-FFF2-40B4-BE49-F238E27FC236}">
-                <a16:creationId xmlns:a16="http://schemas.microsoft.com/office/drawing/2014/main" id="{0B14C934-F29D-44CE-915D-BA951EEE6A50}"/>
+                <a16:creationId xmlns:a16="http://schemas.microsoft.com/office/drawing/2014/main" id="{CD6B5633-5780-4107-A0C4-67C897B3D186}"/>
               </a:ext>
             </a:extLst>
           </p:cNvPr>
@@ -6304,6 +8914,96 @@
                 <a:cs typeface="Arial"/>
               </a:defRPr>
             </a:defPPr>
+            <a:lvl1pPr>
+              <a:defRPr sz="1725" b="0">
+                <a:solidFill>
+                  <a:srgbClr val="536272"/>
+                </a:solidFill>
+                <a:latin typeface="Arial"/>
+                <a:ea typeface="Arial"/>
+                <a:cs typeface="Arial"/>
+              </a:defRPr>
+            </a:lvl1pPr>
+            <a:lvl2pPr>
+              <a:defRPr sz="1725" b="0">
+                <a:solidFill>
+                  <a:srgbClr val="536272"/>
+                </a:solidFill>
+                <a:latin typeface="Arial"/>
+                <a:ea typeface="Arial"/>
+                <a:cs typeface="Arial"/>
+              </a:defRPr>
+            </a:lvl2pPr>
+            <a:lvl3pPr>
+              <a:defRPr sz="1725" b="0">
+                <a:solidFill>
+                  <a:srgbClr val="536272"/>
+                </a:solidFill>
+                <a:latin typeface="Arial"/>
+                <a:ea typeface="Arial"/>
+                <a:cs typeface="Arial"/>
+              </a:defRPr>
+            </a:lvl3pPr>
+            <a:lvl4pPr>
+              <a:defRPr sz="1725" b="0">
+                <a:solidFill>
+                  <a:srgbClr val="536272"/>
+                </a:solidFill>
+                <a:latin typeface="Arial"/>
+                <a:ea typeface="Arial"/>
+                <a:cs typeface="Arial"/>
+              </a:defRPr>
+            </a:lvl4pPr>
+            <a:lvl5pPr>
+              <a:defRPr sz="1725" b="0">
+                <a:solidFill>
+                  <a:srgbClr val="536272"/>
+                </a:solidFill>
+                <a:latin typeface="Arial"/>
+                <a:ea typeface="Arial"/>
+                <a:cs typeface="Arial"/>
+              </a:defRPr>
+            </a:lvl5pPr>
+            <a:lvl6pPr>
+              <a:defRPr sz="1725" b="0">
+                <a:solidFill>
+                  <a:srgbClr val="536272"/>
+                </a:solidFill>
+                <a:latin typeface="Arial"/>
+                <a:ea typeface="Arial"/>
+                <a:cs typeface="Arial"/>
+              </a:defRPr>
+            </a:lvl6pPr>
+            <a:lvl7pPr>
+              <a:defRPr sz="1725" b="0">
+                <a:solidFill>
+                  <a:srgbClr val="536272"/>
+                </a:solidFill>
+                <a:latin typeface="Arial"/>
+                <a:ea typeface="Arial"/>
+                <a:cs typeface="Arial"/>
+              </a:defRPr>
+            </a:lvl7pPr>
+            <a:lvl8pPr>
+              <a:defRPr sz="1725" b="0">
+                <a:solidFill>
+                  <a:srgbClr val="536272"/>
+                </a:solidFill>
+                <a:latin typeface="Arial"/>
+                <a:ea typeface="Arial"/>
+                <a:cs typeface="Arial"/>
+              </a:defRPr>
+            </a:lvl8pPr>
+            <a:lvl9pPr>
+              <a:defRPr sz="1725" b="0">
+                <a:solidFill>
+                  <a:srgbClr val="536272"/>
+                </a:solidFill>
+                <a:latin typeface="Arial"/>
+                <a:ea typeface="Arial"/>
+                <a:cs typeface="Arial"/>
+              </a:defRPr>
+            </a:lvl9pPr>
           </a:lstStyle>
           <a:p xmlns:a="http://schemas.openxmlformats.org/drawingml/2006/main">
             <a:pPr>
@@ -6333,7 +9033,7 @@
     </p:spTree>
     <p:extLst>
       <p:ext uri="{BB962C8B-B14F-4D97-AF65-F5344CB8AC3E}">
-        <p14:creationId xmlns:p14="http://schemas.microsoft.com/office/powerpoint/2010/main" val="1869039453"/>
+        <p14:creationId xmlns:p14="http://schemas.microsoft.com/office/powerpoint/2010/main" val="1097864879"/>
       </p:ext>
     </p:extLst>
   </p:cSld>
@@ -6364,7 +9064,7 @@
           <p:cNvPr id="7" name="">
             <a:extLst xmlns:a="http://schemas.openxmlformats.org/drawingml/2006/main">
               <a:ext uri="{FF2B5EF4-FFF2-40B4-BE49-F238E27FC236}">
-                <a16:creationId xmlns:a16="http://schemas.microsoft.com/office/drawing/2014/main" id="{C9E4129C-F13B-446F-9A09-89B76AEAE6F7}"/>
+                <a16:creationId xmlns:a16="http://schemas.microsoft.com/office/drawing/2014/main" id="{6A0B3867-6F8F-4439-99D1-6B8D8FC4A749}"/>
               </a:ext>
             </a:extLst>
           </p:cNvPr>
@@ -6401,6 +9101,96 @@
                 <a:cs typeface="Arial"/>
               </a:defRPr>
             </a:defPPr>
+            <a:lvl1pPr>
+              <a:defRPr sz="3300" b="1">
+                <a:solidFill>
+                  <a:srgbClr val="063E5F"/>
+                </a:solidFill>
+                <a:latin typeface="Arial"/>
+                <a:ea typeface="Arial"/>
+                <a:cs typeface="Arial"/>
+              </a:defRPr>
+            </a:lvl1pPr>
+            <a:lvl2pPr>
+              <a:defRPr sz="3300" b="1">
+                <a:solidFill>
+                  <a:srgbClr val="063E5F"/>
+                </a:solidFill>
+                <a:latin typeface="Arial"/>
+                <a:ea typeface="Arial"/>
+                <a:cs typeface="Arial"/>
+              </a:defRPr>
+            </a:lvl2pPr>
+            <a:lvl3pPr>
+              <a:defRPr sz="3300" b="1">
+                <a:solidFill>
+                  <a:srgbClr val="063E5F"/>
+                </a:solidFill>
+                <a:latin typeface="Arial"/>
+                <a:ea typeface="Arial"/>
+                <a:cs typeface="Arial"/>
+              </a:defRPr>
+            </a:lvl3pPr>
+            <a:lvl4pPr>
+              <a:defRPr sz="3300" b="1">
+                <a:solidFill>
+                  <a:srgbClr val="063E5F"/>
+                </a:solidFill>
+                <a:latin typeface="Arial"/>
+                <a:ea typeface="Arial"/>
+                <a:cs typeface="Arial"/>
+              </a:defRPr>
+            </a:lvl4pPr>
+            <a:lvl5pPr>
+              <a:defRPr sz="3300" b="1">
+                <a:solidFill>
+                  <a:srgbClr val="063E5F"/>
+                </a:solidFill>
+                <a:latin typeface="Arial"/>
+                <a:ea typeface="Arial"/>
+                <a:cs typeface="Arial"/>
+              </a:defRPr>
+            </a:lvl5pPr>
+            <a:lvl6pPr>
+              <a:defRPr sz="3300" b="1">
+                <a:solidFill>
+                  <a:srgbClr val="063E5F"/>
+                </a:solidFill>
+                <a:latin typeface="Arial"/>
+                <a:ea typeface="Arial"/>
+                <a:cs typeface="Arial"/>
+              </a:defRPr>
+            </a:lvl6pPr>
+            <a:lvl7pPr>
+              <a:defRPr sz="3300" b="1">
+                <a:solidFill>
+                  <a:srgbClr val="063E5F"/>
+                </a:solidFill>
+                <a:latin typeface="Arial"/>
+                <a:ea typeface="Arial"/>
+                <a:cs typeface="Arial"/>
+              </a:defRPr>
+            </a:lvl7pPr>
+            <a:lvl8pPr>
+              <a:defRPr sz="3300" b="1">
+                <a:solidFill>
+                  <a:srgbClr val="063E5F"/>
+                </a:solidFill>
+                <a:latin typeface="Arial"/>
+                <a:ea typeface="Arial"/>
+                <a:cs typeface="Arial"/>
+              </a:defRPr>
+            </a:lvl8pPr>
+            <a:lvl9pPr>
+              <a:defRPr sz="3300" b="1">
+                <a:solidFill>
+                  <a:srgbClr val="063E5F"/>
+                </a:solidFill>
+                <a:latin typeface="Arial"/>
+                <a:ea typeface="Arial"/>
+                <a:cs typeface="Arial"/>
+              </a:defRPr>
+            </a:lvl9pPr>
           </a:lstStyle>
           <a:p xmlns:a="http://schemas.openxmlformats.org/drawingml/2006/main">
             <a:pPr>
@@ -6432,7 +9222,7 @@
           <p:cNvPr id="2" name="">
             <a:extLst xmlns:a="http://schemas.openxmlformats.org/drawingml/2006/main">
               <a:ext uri="{FF2B5EF4-FFF2-40B4-BE49-F238E27FC236}">
-                <a16:creationId xmlns:a16="http://schemas.microsoft.com/office/drawing/2014/main" id="{DAF18BA4-0FE8-4C1A-8181-31DA2A7C069A}"/>
+                <a16:creationId xmlns:a16="http://schemas.microsoft.com/office/drawing/2014/main" id="{CF6EFE7C-A7B8-424F-BE0E-EE2010BA153D}"/>
               </a:ext>
             </a:extLst>
           </p:cNvPr>
@@ -6469,6 +9259,96 @@
                 <a:cs typeface="Arial"/>
               </a:defRPr>
             </a:defPPr>
+            <a:lvl1pPr>
+              <a:defRPr sz="1200" b="0">
+                <a:solidFill>
+                  <a:srgbClr val="536272"/>
+                </a:solidFill>
+                <a:latin typeface="Arial"/>
+                <a:ea typeface="Arial"/>
+                <a:cs typeface="Arial"/>
+              </a:defRPr>
+            </a:lvl1pPr>
+            <a:lvl2pPr>
+              <a:defRPr sz="1200" b="0">
+                <a:solidFill>
+                  <a:srgbClr val="536272"/>
+                </a:solidFill>
+                <a:latin typeface="Arial"/>
+                <a:ea typeface="Arial"/>
+                <a:cs typeface="Arial"/>
+              </a:defRPr>
+            </a:lvl2pPr>
+            <a:lvl3pPr>
+              <a:defRPr sz="1200" b="0">
+                <a:solidFill>
+                  <a:srgbClr val="536272"/>
+                </a:solidFill>
+                <a:latin typeface="Arial"/>
+                <a:ea typeface="Arial"/>
+                <a:cs typeface="Arial"/>
+              </a:defRPr>
+            </a:lvl3pPr>
+            <a:lvl4pPr>
+              <a:defRPr sz="1200" b="0">
+                <a:solidFill>
+                  <a:srgbClr val="536272"/>
+                </a:solidFill>
+                <a:latin typeface="Arial"/>
+                <a:ea typeface="Arial"/>
+                <a:cs typeface="Arial"/>
+              </a:defRPr>
+            </a:lvl4pPr>
+            <a:lvl5pPr>
+              <a:defRPr sz="1200" b="0">
+                <a:solidFill>
+                  <a:srgbClr val="536272"/>
+                </a:solidFill>
+                <a:latin typeface="Arial"/>
+                <a:ea typeface="Arial"/>
+                <a:cs typeface="Arial"/>
+              </a:defRPr>
+            </a:lvl5pPr>
+            <a:lvl6pPr>
+              <a:defRPr sz="1200" b="0">
+                <a:solidFill>
+                  <a:srgbClr val="536272"/>
+                </a:solidFill>
+                <a:latin typeface="Arial"/>
+                <a:ea typeface="Arial"/>
+                <a:cs typeface="Arial"/>
+              </a:defRPr>
+            </a:lvl6pPr>
+            <a:lvl7pPr>
+              <a:defRPr sz="1200" b="0">
+                <a:solidFill>
+                  <a:srgbClr val="536272"/>
+                </a:solidFill>
+                <a:latin typeface="Arial"/>
+                <a:ea typeface="Arial"/>
+                <a:cs typeface="Arial"/>
+              </a:defRPr>
+            </a:lvl7pPr>
+            <a:lvl8pPr>
+              <a:defRPr sz="1200" b="0">
+                <a:solidFill>
+                  <a:srgbClr val="536272"/>
+                </a:solidFill>
+                <a:latin typeface="Arial"/>
+                <a:ea typeface="Arial"/>
+                <a:cs typeface="Arial"/>
+              </a:defRPr>
+            </a:lvl8pPr>
+            <a:lvl9pPr>
+              <a:defRPr sz="1200" b="0">
+                <a:solidFill>
+                  <a:srgbClr val="536272"/>
+                </a:solidFill>
+                <a:latin typeface="Arial"/>
+                <a:ea typeface="Arial"/>
+                <a:cs typeface="Arial"/>
+              </a:defRPr>
+            </a:lvl9pPr>
           </a:lstStyle>
           <a:p xmlns:a="http://schemas.openxmlformats.org/drawingml/2006/main">
             <a:pPr>
@@ -6500,7 +9380,7 @@
           <p:cNvPr id="3" name="">
             <a:extLst xmlns:a="http://schemas.openxmlformats.org/drawingml/2006/main">
               <a:ext uri="{FF2B5EF4-FFF2-40B4-BE49-F238E27FC236}">
-                <a16:creationId xmlns:a16="http://schemas.microsoft.com/office/drawing/2014/main" id="{D21ABDFD-70DE-4F84-899D-CC83A341440B}"/>
+                <a16:creationId xmlns:a16="http://schemas.microsoft.com/office/drawing/2014/main" id="{937E7831-8E98-4EAF-835A-503DA6B8D504}"/>
               </a:ext>
             </a:extLst>
           </p:cNvPr>
@@ -6537,6 +9417,96 @@
                 <a:cs typeface="Arial"/>
               </a:defRPr>
             </a:defPPr>
+            <a:lvl1pPr>
+              <a:defRPr sz="1275" b="0">
+                <a:solidFill>
+                  <a:srgbClr val="B88E23"/>
+                </a:solidFill>
+                <a:latin typeface="Arial"/>
+                <a:ea typeface="Arial"/>
+                <a:cs typeface="Arial"/>
+              </a:defRPr>
+            </a:lvl1pPr>
+            <a:lvl2pPr>
+              <a:defRPr sz="1275" b="0">
+                <a:solidFill>
+                  <a:srgbClr val="B88E23"/>
+                </a:solidFill>
+                <a:latin typeface="Arial"/>
+                <a:ea typeface="Arial"/>
+                <a:cs typeface="Arial"/>
+              </a:defRPr>
+            </a:lvl2pPr>
+            <a:lvl3pPr>
+              <a:defRPr sz="1275" b="0">
+                <a:solidFill>
+                  <a:srgbClr val="B88E23"/>
+                </a:solidFill>
+                <a:latin typeface="Arial"/>
+                <a:ea typeface="Arial"/>
+                <a:cs typeface="Arial"/>
+              </a:defRPr>
+            </a:lvl3pPr>
+            <a:lvl4pPr>
+              <a:defRPr sz="1275" b="0">
+                <a:solidFill>
+                  <a:srgbClr val="B88E23"/>
+                </a:solidFill>
+                <a:latin typeface="Arial"/>
+                <a:ea typeface="Arial"/>
+                <a:cs typeface="Arial"/>
+              </a:defRPr>
+            </a:lvl4pPr>
+            <a:lvl5pPr>
+              <a:defRPr sz="1275" b="0">
+                <a:solidFill>
+                  <a:srgbClr val="B88E23"/>
+                </a:solidFill>
+                <a:latin typeface="Arial"/>
+                <a:ea typeface="Arial"/>
+                <a:cs typeface="Arial"/>
+              </a:defRPr>
+            </a:lvl5pPr>
+            <a:lvl6pPr>
+              <a:defRPr sz="1275" b="0">
+                <a:solidFill>
+                  <a:srgbClr val="B88E23"/>
+                </a:solidFill>
+                <a:latin typeface="Arial"/>
+                <a:ea typeface="Arial"/>
+                <a:cs typeface="Arial"/>
+              </a:defRPr>
+            </a:lvl6pPr>
+            <a:lvl7pPr>
+              <a:defRPr sz="1275" b="0">
+                <a:solidFill>
+                  <a:srgbClr val="B88E23"/>
+                </a:solidFill>
+                <a:latin typeface="Arial"/>
+                <a:ea typeface="Arial"/>
+                <a:cs typeface="Arial"/>
+              </a:defRPr>
+            </a:lvl7pPr>
+            <a:lvl8pPr>
+              <a:defRPr sz="1275" b="0">
+                <a:solidFill>
+                  <a:srgbClr val="B88E23"/>
+                </a:solidFill>
+                <a:latin typeface="Arial"/>
+                <a:ea typeface="Arial"/>
+                <a:cs typeface="Arial"/>
+              </a:defRPr>
+            </a:lvl8pPr>
+            <a:lvl9pPr>
+              <a:defRPr sz="1275" b="0">
+                <a:solidFill>
+                  <a:srgbClr val="B88E23"/>
+                </a:solidFill>
+                <a:latin typeface="Arial"/>
+                <a:ea typeface="Arial"/>
+                <a:cs typeface="Arial"/>
+              </a:defRPr>
+            </a:lvl9pPr>
           </a:lstStyle>
           <a:p xmlns:a="http://schemas.openxmlformats.org/drawingml/2006/main">
             <a:pPr>
@@ -6568,7 +9538,7 @@
           <p:cNvPr id="4" name="">
             <a:extLst xmlns:a="http://schemas.openxmlformats.org/drawingml/2006/main">
               <a:ext uri="{FF2B5EF4-FFF2-40B4-BE49-F238E27FC236}">
-                <a16:creationId xmlns:a16="http://schemas.microsoft.com/office/drawing/2014/main" id="{8E3A8C9C-531B-46C6-9479-F76DDA2A6EE4}"/>
+                <a16:creationId xmlns:a16="http://schemas.microsoft.com/office/drawing/2014/main" id="{7FE799AC-B09D-49EA-8E9C-F7EE644B33C1}"/>
               </a:ext>
             </a:extLst>
           </p:cNvPr>
@@ -7028,7 +9998,7 @@
           <p:cNvPr id="5" name="">
             <a:extLst xmlns:a="http://schemas.openxmlformats.org/drawingml/2006/main">
               <a:ext uri="{FF2B5EF4-FFF2-40B4-BE49-F238E27FC236}">
-                <a16:creationId xmlns:a16="http://schemas.microsoft.com/office/drawing/2014/main" id="{E1ECF353-18C7-44C8-99DA-EE4506566E00}"/>
+                <a16:creationId xmlns:a16="http://schemas.microsoft.com/office/drawing/2014/main" id="{A6A19B8B-23DF-4B73-A056-309475B33820}"/>
               </a:ext>
             </a:extLst>
           </p:cNvPr>
@@ -7065,6 +10035,96 @@
                 <a:cs typeface="Arial"/>
               </a:defRPr>
             </a:defPPr>
+            <a:lvl1pPr>
+              <a:defRPr sz="2175" b="0">
+                <a:solidFill>
+                  <a:srgbClr val="063E5F"/>
+                </a:solidFill>
+                <a:latin typeface="Arial"/>
+                <a:ea typeface="Arial"/>
+                <a:cs typeface="Arial"/>
+              </a:defRPr>
+            </a:lvl1pPr>
+            <a:lvl2pPr>
+              <a:defRPr sz="2175" b="0">
+                <a:solidFill>
+                  <a:srgbClr val="063E5F"/>
+                </a:solidFill>
+                <a:latin typeface="Arial"/>
+                <a:ea typeface="Arial"/>
+                <a:cs typeface="Arial"/>
+              </a:defRPr>
+            </a:lvl2pPr>
+            <a:lvl3pPr>
+              <a:defRPr sz="2175" b="0">
+                <a:solidFill>
+                  <a:srgbClr val="063E5F"/>
+                </a:solidFill>
+                <a:latin typeface="Arial"/>
+                <a:ea typeface="Arial"/>
+                <a:cs typeface="Arial"/>
+              </a:defRPr>
+            </a:lvl3pPr>
+            <a:lvl4pPr>
+              <a:defRPr sz="2175" b="0">
+                <a:solidFill>
+                  <a:srgbClr val="063E5F"/>
+                </a:solidFill>
+                <a:latin typeface="Arial"/>
+                <a:ea typeface="Arial"/>
+                <a:cs typeface="Arial"/>
+              </a:defRPr>
+            </a:lvl4pPr>
+            <a:lvl5pPr>
+              <a:defRPr sz="2175" b="0">
+                <a:solidFill>
+                  <a:srgbClr val="063E5F"/>
+                </a:solidFill>
+                <a:latin typeface="Arial"/>
+                <a:ea typeface="Arial"/>
+                <a:cs typeface="Arial"/>
+              </a:defRPr>
+            </a:lvl5pPr>
+            <a:lvl6pPr>
+              <a:defRPr sz="2175" b="0">
+                <a:solidFill>
+                  <a:srgbClr val="063E5F"/>
+                </a:solidFill>
+                <a:latin typeface="Arial"/>
+                <a:ea typeface="Arial"/>
+                <a:cs typeface="Arial"/>
+              </a:defRPr>
+            </a:lvl6pPr>
+            <a:lvl7pPr>
+              <a:defRPr sz="2175" b="0">
+                <a:solidFill>
+                  <a:srgbClr val="063E5F"/>
+                </a:solidFill>
+                <a:latin typeface="Arial"/>
+                <a:ea typeface="Arial"/>
+                <a:cs typeface="Arial"/>
+              </a:defRPr>
+            </a:lvl7pPr>
+            <a:lvl8pPr>
+              <a:defRPr sz="2175" b="0">
+                <a:solidFill>
+                  <a:srgbClr val="063E5F"/>
+                </a:solidFill>
+                <a:latin typeface="Arial"/>
+                <a:ea typeface="Arial"/>
+                <a:cs typeface="Arial"/>
+              </a:defRPr>
+            </a:lvl8pPr>
+            <a:lvl9pPr>
+              <a:defRPr sz="2175" b="0">
+                <a:solidFill>
+                  <a:srgbClr val="063E5F"/>
+                </a:solidFill>
+                <a:latin typeface="Arial"/>
+                <a:ea typeface="Arial"/>
+                <a:cs typeface="Arial"/>
+              </a:defRPr>
+            </a:lvl9pPr>
           </a:lstStyle>
           <a:p xmlns:a="http://schemas.openxmlformats.org/drawingml/2006/main">
             <a:pPr>
@@ -7096,7 +10156,7 @@
           <p:cNvPr id="6" name="">
             <a:extLst xmlns:a="http://schemas.openxmlformats.org/drawingml/2006/main">
               <a:ext uri="{FF2B5EF4-FFF2-40B4-BE49-F238E27FC236}">
-                <a16:creationId xmlns:a16="http://schemas.microsoft.com/office/drawing/2014/main" id="{A999F4FB-AB60-4463-8E9A-A955515664F0}"/>
+                <a16:creationId xmlns:a16="http://schemas.microsoft.com/office/drawing/2014/main" id="{7E79D64C-9486-455C-998B-992B37E15DF2}"/>
               </a:ext>
             </a:extLst>
           </p:cNvPr>
@@ -7133,6 +10193,96 @@
                 <a:cs typeface="Arial"/>
               </a:defRPr>
             </a:defPPr>
+            <a:lvl1pPr>
+              <a:defRPr sz="1725" b="0">
+                <a:solidFill>
+                  <a:srgbClr val="536272"/>
+                </a:solidFill>
+                <a:latin typeface="Arial"/>
+                <a:ea typeface="Arial"/>
+                <a:cs typeface="Arial"/>
+              </a:defRPr>
+            </a:lvl1pPr>
+            <a:lvl2pPr>
+              <a:defRPr sz="1725" b="0">
+                <a:solidFill>
+                  <a:srgbClr val="536272"/>
+                </a:solidFill>
+                <a:latin typeface="Arial"/>
+                <a:ea typeface="Arial"/>
+                <a:cs typeface="Arial"/>
+              </a:defRPr>
+            </a:lvl2pPr>
+            <a:lvl3pPr>
+              <a:defRPr sz="1725" b="0">
+                <a:solidFill>
+                  <a:srgbClr val="536272"/>
+                </a:solidFill>
+                <a:latin typeface="Arial"/>
+                <a:ea typeface="Arial"/>
+                <a:cs typeface="Arial"/>
+              </a:defRPr>
+            </a:lvl3pPr>
+            <a:lvl4pPr>
+              <a:defRPr sz="1725" b="0">
+                <a:solidFill>
+                  <a:srgbClr val="536272"/>
+                </a:solidFill>
+                <a:latin typeface="Arial"/>
+                <a:ea typeface="Arial"/>
+                <a:cs typeface="Arial"/>
+              </a:defRPr>
+            </a:lvl4pPr>
+            <a:lvl5pPr>
+              <a:defRPr sz="1725" b="0">
+                <a:solidFill>
+                  <a:srgbClr val="536272"/>
+                </a:solidFill>
+                <a:latin typeface="Arial"/>
+                <a:ea typeface="Arial"/>
+                <a:cs typeface="Arial"/>
+              </a:defRPr>
+            </a:lvl5pPr>
+            <a:lvl6pPr>
+              <a:defRPr sz="1725" b="0">
+                <a:solidFill>
+                  <a:srgbClr val="536272"/>
+                </a:solidFill>
+                <a:latin typeface="Arial"/>
+                <a:ea typeface="Arial"/>
+                <a:cs typeface="Arial"/>
+              </a:defRPr>
+            </a:lvl6pPr>
+            <a:lvl7pPr>
+              <a:defRPr sz="1725" b="0">
+                <a:solidFill>
+                  <a:srgbClr val="536272"/>
+                </a:solidFill>
+                <a:latin typeface="Arial"/>
+                <a:ea typeface="Arial"/>
+                <a:cs typeface="Arial"/>
+              </a:defRPr>
+            </a:lvl7pPr>
+            <a:lvl8pPr>
+              <a:defRPr sz="1725" b="0">
+                <a:solidFill>
+                  <a:srgbClr val="536272"/>
+                </a:solidFill>
+                <a:latin typeface="Arial"/>
+                <a:ea typeface="Arial"/>
+                <a:cs typeface="Arial"/>
+              </a:defRPr>
+            </a:lvl8pPr>
+            <a:lvl9pPr>
+              <a:defRPr sz="1725" b="0">
+                <a:solidFill>
+                  <a:srgbClr val="536272"/>
+                </a:solidFill>
+                <a:latin typeface="Arial"/>
+                <a:ea typeface="Arial"/>
+                <a:cs typeface="Arial"/>
+              </a:defRPr>
+            </a:lvl9pPr>
           </a:lstStyle>
           <a:p xmlns:a="http://schemas.openxmlformats.org/drawingml/2006/main">
             <a:pPr>
@@ -7162,7 +10312,7 @@
     </p:spTree>
     <p:extLst>
       <p:ext uri="{BB962C8B-B14F-4D97-AF65-F5344CB8AC3E}">
-        <p14:creationId xmlns:p14="http://schemas.microsoft.com/office/powerpoint/2010/main" val="555503295"/>
+        <p14:creationId xmlns:p14="http://schemas.microsoft.com/office/powerpoint/2010/main" val="923601116"/>
       </p:ext>
     </p:extLst>
   </p:cSld>
@@ -7193,7 +10343,7 @@
           <p:cNvPr id="8" name="">
             <a:extLst xmlns:a="http://schemas.openxmlformats.org/drawingml/2006/main">
               <a:ext uri="{FF2B5EF4-FFF2-40B4-BE49-F238E27FC236}">
-                <a16:creationId xmlns:a16="http://schemas.microsoft.com/office/drawing/2014/main" id="{E9739659-1ABE-4723-9CF5-F9172DD9D381}"/>
+                <a16:creationId xmlns:a16="http://schemas.microsoft.com/office/drawing/2014/main" id="{8AF4D900-AB71-40EF-B36C-D18085D7FDE7}"/>
               </a:ext>
             </a:extLst>
           </p:cNvPr>
@@ -7230,6 +10380,96 @@
                 <a:cs typeface="Arial"/>
               </a:defRPr>
             </a:defPPr>
+            <a:lvl1pPr>
+              <a:defRPr sz="3300" b="1">
+                <a:solidFill>
+                  <a:srgbClr val="063E5F"/>
+                </a:solidFill>
+                <a:latin typeface="Arial"/>
+                <a:ea typeface="Arial"/>
+                <a:cs typeface="Arial"/>
+              </a:defRPr>
+            </a:lvl1pPr>
+            <a:lvl2pPr>
+              <a:defRPr sz="3300" b="1">
+                <a:solidFill>
+                  <a:srgbClr val="063E5F"/>
+                </a:solidFill>
+                <a:latin typeface="Arial"/>
+                <a:ea typeface="Arial"/>
+                <a:cs typeface="Arial"/>
+              </a:defRPr>
+            </a:lvl2pPr>
+            <a:lvl3pPr>
+              <a:defRPr sz="3300" b="1">
+                <a:solidFill>
+                  <a:srgbClr val="063E5F"/>
+                </a:solidFill>
+                <a:latin typeface="Arial"/>
+                <a:ea typeface="Arial"/>
+                <a:cs typeface="Arial"/>
+              </a:defRPr>
+            </a:lvl3pPr>
+            <a:lvl4pPr>
+              <a:defRPr sz="3300" b="1">
+                <a:solidFill>
+                  <a:srgbClr val="063E5F"/>
+                </a:solidFill>
+                <a:latin typeface="Arial"/>
+                <a:ea typeface="Arial"/>
+                <a:cs typeface="Arial"/>
+              </a:defRPr>
+            </a:lvl4pPr>
+            <a:lvl5pPr>
+              <a:defRPr sz="3300" b="1">
+                <a:solidFill>
+                  <a:srgbClr val="063E5F"/>
+                </a:solidFill>
+                <a:latin typeface="Arial"/>
+                <a:ea typeface="Arial"/>
+                <a:cs typeface="Arial"/>
+              </a:defRPr>
+            </a:lvl5pPr>
+            <a:lvl6pPr>
+              <a:defRPr sz="3300" b="1">
+                <a:solidFill>
+                  <a:srgbClr val="063E5F"/>
+                </a:solidFill>
+                <a:latin typeface="Arial"/>
+                <a:ea typeface="Arial"/>
+                <a:cs typeface="Arial"/>
+              </a:defRPr>
+            </a:lvl6pPr>
+            <a:lvl7pPr>
+              <a:defRPr sz="3300" b="1">
+                <a:solidFill>
+                  <a:srgbClr val="063E5F"/>
+                </a:solidFill>
+                <a:latin typeface="Arial"/>
+                <a:ea typeface="Arial"/>
+                <a:cs typeface="Arial"/>
+              </a:defRPr>
+            </a:lvl7pPr>
+            <a:lvl8pPr>
+              <a:defRPr sz="3300" b="1">
+                <a:solidFill>
+                  <a:srgbClr val="063E5F"/>
+                </a:solidFill>
+                <a:latin typeface="Arial"/>
+                <a:ea typeface="Arial"/>
+                <a:cs typeface="Arial"/>
+              </a:defRPr>
+            </a:lvl8pPr>
+            <a:lvl9pPr>
+              <a:defRPr sz="3300" b="1">
+                <a:solidFill>
+                  <a:srgbClr val="063E5F"/>
+                </a:solidFill>
+                <a:latin typeface="Arial"/>
+                <a:ea typeface="Arial"/>
+                <a:cs typeface="Arial"/>
+              </a:defRPr>
+            </a:lvl9pPr>
           </a:lstStyle>
           <a:p xmlns:a="http://schemas.openxmlformats.org/drawingml/2006/main">
             <a:pPr>
@@ -7261,7 +10501,7 @@
           <p:cNvPr id="2" name="">
             <a:extLst xmlns:a="http://schemas.openxmlformats.org/drawingml/2006/main">
               <a:ext uri="{FF2B5EF4-FFF2-40B4-BE49-F238E27FC236}">
-                <a16:creationId xmlns:a16="http://schemas.microsoft.com/office/drawing/2014/main" id="{F44DA7E8-6E88-4750-98EA-A746D6D00844}"/>
+                <a16:creationId xmlns:a16="http://schemas.microsoft.com/office/drawing/2014/main" id="{F909069D-A374-4695-B4DB-A61D6DA45643}"/>
               </a:ext>
             </a:extLst>
           </p:cNvPr>
@@ -7298,6 +10538,96 @@
                 <a:cs typeface="Arial"/>
               </a:defRPr>
             </a:defPPr>
+            <a:lvl1pPr>
+              <a:defRPr sz="1200" b="0">
+                <a:solidFill>
+                  <a:srgbClr val="536272"/>
+                </a:solidFill>
+                <a:latin typeface="Arial"/>
+                <a:ea typeface="Arial"/>
+                <a:cs typeface="Arial"/>
+              </a:defRPr>
+            </a:lvl1pPr>
+            <a:lvl2pPr>
+              <a:defRPr sz="1200" b="0">
+                <a:solidFill>
+                  <a:srgbClr val="536272"/>
+                </a:solidFill>
+                <a:latin typeface="Arial"/>
+                <a:ea typeface="Arial"/>
+                <a:cs typeface="Arial"/>
+              </a:defRPr>
+            </a:lvl2pPr>
+            <a:lvl3pPr>
+              <a:defRPr sz="1200" b="0">
+                <a:solidFill>
+                  <a:srgbClr val="536272"/>
+                </a:solidFill>
+                <a:latin typeface="Arial"/>
+                <a:ea typeface="Arial"/>
+                <a:cs typeface="Arial"/>
+              </a:defRPr>
+            </a:lvl3pPr>
+            <a:lvl4pPr>
+              <a:defRPr sz="1200" b="0">
+                <a:solidFill>
+                  <a:srgbClr val="536272"/>
+                </a:solidFill>
+                <a:latin typeface="Arial"/>
+                <a:ea typeface="Arial"/>
+                <a:cs typeface="Arial"/>
+              </a:defRPr>
+            </a:lvl4pPr>
+            <a:lvl5pPr>
+              <a:defRPr sz="1200" b="0">
+                <a:solidFill>
+                  <a:srgbClr val="536272"/>
+                </a:solidFill>
+                <a:latin typeface="Arial"/>
+                <a:ea typeface="Arial"/>
+                <a:cs typeface="Arial"/>
+              </a:defRPr>
+            </a:lvl5pPr>
+            <a:lvl6pPr>
+              <a:defRPr sz="1200" b="0">
+                <a:solidFill>
+                  <a:srgbClr val="536272"/>
+                </a:solidFill>
+                <a:latin typeface="Arial"/>
+                <a:ea typeface="Arial"/>
+                <a:cs typeface="Arial"/>
+              </a:defRPr>
+            </a:lvl6pPr>
+            <a:lvl7pPr>
+              <a:defRPr sz="1200" b="0">
+                <a:solidFill>
+                  <a:srgbClr val="536272"/>
+                </a:solidFill>
+                <a:latin typeface="Arial"/>
+                <a:ea typeface="Arial"/>
+                <a:cs typeface="Arial"/>
+              </a:defRPr>
+            </a:lvl7pPr>
+            <a:lvl8pPr>
+              <a:defRPr sz="1200" b="0">
+                <a:solidFill>
+                  <a:srgbClr val="536272"/>
+                </a:solidFill>
+                <a:latin typeface="Arial"/>
+                <a:ea typeface="Arial"/>
+                <a:cs typeface="Arial"/>
+              </a:defRPr>
+            </a:lvl8pPr>
+            <a:lvl9pPr>
+              <a:defRPr sz="1200" b="0">
+                <a:solidFill>
+                  <a:srgbClr val="536272"/>
+                </a:solidFill>
+                <a:latin typeface="Arial"/>
+                <a:ea typeface="Arial"/>
+                <a:cs typeface="Arial"/>
+              </a:defRPr>
+            </a:lvl9pPr>
           </a:lstStyle>
           <a:p xmlns:a="http://schemas.openxmlformats.org/drawingml/2006/main">
             <a:pPr>
@@ -7329,7 +10659,7 @@
           <p:cNvPr id="3" name="">
             <a:extLst xmlns:a="http://schemas.openxmlformats.org/drawingml/2006/main">
               <a:ext uri="{FF2B5EF4-FFF2-40B4-BE49-F238E27FC236}">
-                <a16:creationId xmlns:a16="http://schemas.microsoft.com/office/drawing/2014/main" id="{27105905-FA2D-43A3-87F2-8FD0648D0E60}"/>
+                <a16:creationId xmlns:a16="http://schemas.microsoft.com/office/drawing/2014/main" id="{7F604E51-ACCB-4722-9681-880CDD4B0A31}"/>
               </a:ext>
             </a:extLst>
           </p:cNvPr>
@@ -7366,6 +10696,96 @@
                 <a:cs typeface="Arial"/>
               </a:defRPr>
             </a:defPPr>
+            <a:lvl1pPr>
+              <a:defRPr sz="1275" b="0">
+                <a:solidFill>
+                  <a:srgbClr val="B88E23"/>
+                </a:solidFill>
+                <a:latin typeface="Arial"/>
+                <a:ea typeface="Arial"/>
+                <a:cs typeface="Arial"/>
+              </a:defRPr>
+            </a:lvl1pPr>
+            <a:lvl2pPr>
+              <a:defRPr sz="1275" b="0">
+                <a:solidFill>
+                  <a:srgbClr val="B88E23"/>
+                </a:solidFill>
+                <a:latin typeface="Arial"/>
+                <a:ea typeface="Arial"/>
+                <a:cs typeface="Arial"/>
+              </a:defRPr>
+            </a:lvl2pPr>
+            <a:lvl3pPr>
+              <a:defRPr sz="1275" b="0">
+                <a:solidFill>
+                  <a:srgbClr val="B88E23"/>
+                </a:solidFill>
+                <a:latin typeface="Arial"/>
+                <a:ea typeface="Arial"/>
+                <a:cs typeface="Arial"/>
+              </a:defRPr>
+            </a:lvl3pPr>
+            <a:lvl4pPr>
+              <a:defRPr sz="1275" b="0">
+                <a:solidFill>
+                  <a:srgbClr val="B88E23"/>
+                </a:solidFill>
+                <a:latin typeface="Arial"/>
+                <a:ea typeface="Arial"/>
+                <a:cs typeface="Arial"/>
+              </a:defRPr>
+            </a:lvl4pPr>
+            <a:lvl5pPr>
+              <a:defRPr sz="1275" b="0">
+                <a:solidFill>
+                  <a:srgbClr val="B88E23"/>
+                </a:solidFill>
+                <a:latin typeface="Arial"/>
+                <a:ea typeface="Arial"/>
+                <a:cs typeface="Arial"/>
+              </a:defRPr>
+            </a:lvl5pPr>
+            <a:lvl6pPr>
+              <a:defRPr sz="1275" b="0">
+                <a:solidFill>
+                  <a:srgbClr val="B88E23"/>
+                </a:solidFill>
+                <a:latin typeface="Arial"/>
+                <a:ea typeface="Arial"/>
+                <a:cs typeface="Arial"/>
+              </a:defRPr>
+            </a:lvl6pPr>
+            <a:lvl7pPr>
+              <a:defRPr sz="1275" b="0">
+                <a:solidFill>
+                  <a:srgbClr val="B88E23"/>
+                </a:solidFill>
+                <a:latin typeface="Arial"/>
+                <a:ea typeface="Arial"/>
+                <a:cs typeface="Arial"/>
+              </a:defRPr>
+            </a:lvl7pPr>
+            <a:lvl8pPr>
+              <a:defRPr sz="1275" b="0">
+                <a:solidFill>
+                  <a:srgbClr val="B88E23"/>
+                </a:solidFill>
+                <a:latin typeface="Arial"/>
+                <a:ea typeface="Arial"/>
+                <a:cs typeface="Arial"/>
+              </a:defRPr>
+            </a:lvl8pPr>
+            <a:lvl9pPr>
+              <a:defRPr sz="1275" b="0">
+                <a:solidFill>
+                  <a:srgbClr val="B88E23"/>
+                </a:solidFill>
+                <a:latin typeface="Arial"/>
+                <a:ea typeface="Arial"/>
+                <a:cs typeface="Arial"/>
+              </a:defRPr>
+            </a:lvl9pPr>
           </a:lstStyle>
           <a:p xmlns:a="http://schemas.openxmlformats.org/drawingml/2006/main">
             <a:pPr>
@@ -7397,7 +10817,7 @@
           <p:cNvPr id="4" name="">
             <a:extLst xmlns:a="http://schemas.openxmlformats.org/drawingml/2006/main">
               <a:ext uri="{FF2B5EF4-FFF2-40B4-BE49-F238E27FC236}">
-                <a16:creationId xmlns:a16="http://schemas.microsoft.com/office/drawing/2014/main" id="{18ED2993-E8B3-430A-B625-73ECE50C1D03}"/>
+                <a16:creationId xmlns:a16="http://schemas.microsoft.com/office/drawing/2014/main" id="{9FBB700E-2CFC-4CCD-A2AB-BE1B344B4A04}"/>
               </a:ext>
             </a:extLst>
           </p:cNvPr>
@@ -7434,6 +10854,96 @@
                 <a:cs typeface="Arial"/>
               </a:defRPr>
             </a:defPPr>
+            <a:lvl1pPr>
+              <a:defRPr sz="1725" b="0">
+                <a:solidFill>
+                  <a:srgbClr val="536272"/>
+                </a:solidFill>
+                <a:latin typeface="Arial"/>
+                <a:ea typeface="Arial"/>
+                <a:cs typeface="Arial"/>
+              </a:defRPr>
+            </a:lvl1pPr>
+            <a:lvl2pPr>
+              <a:defRPr sz="1725" b="0">
+                <a:solidFill>
+                  <a:srgbClr val="536272"/>
+                </a:solidFill>
+                <a:latin typeface="Arial"/>
+                <a:ea typeface="Arial"/>
+                <a:cs typeface="Arial"/>
+              </a:defRPr>
+            </a:lvl2pPr>
+            <a:lvl3pPr>
+              <a:defRPr sz="1725" b="0">
+                <a:solidFill>
+                  <a:srgbClr val="536272"/>
+                </a:solidFill>
+                <a:latin typeface="Arial"/>
+                <a:ea typeface="Arial"/>
+                <a:cs typeface="Arial"/>
+              </a:defRPr>
+            </a:lvl3pPr>
+            <a:lvl4pPr>
+              <a:defRPr sz="1725" b="0">
+                <a:solidFill>
+                  <a:srgbClr val="536272"/>
+                </a:solidFill>
+                <a:latin typeface="Arial"/>
+                <a:ea typeface="Arial"/>
+                <a:cs typeface="Arial"/>
+              </a:defRPr>
+            </a:lvl4pPr>
+            <a:lvl5pPr>
+              <a:defRPr sz="1725" b="0">
+                <a:solidFill>
+                  <a:srgbClr val="536272"/>
+                </a:solidFill>
+                <a:latin typeface="Arial"/>
+                <a:ea typeface="Arial"/>
+                <a:cs typeface="Arial"/>
+              </a:defRPr>
+            </a:lvl5pPr>
+            <a:lvl6pPr>
+              <a:defRPr sz="1725" b="0">
+                <a:solidFill>
+                  <a:srgbClr val="536272"/>
+                </a:solidFill>
+                <a:latin typeface="Arial"/>
+                <a:ea typeface="Arial"/>
+                <a:cs typeface="Arial"/>
+              </a:defRPr>
+            </a:lvl6pPr>
+            <a:lvl7pPr>
+              <a:defRPr sz="1725" b="0">
+                <a:solidFill>
+                  <a:srgbClr val="536272"/>
+                </a:solidFill>
+                <a:latin typeface="Arial"/>
+                <a:ea typeface="Arial"/>
+                <a:cs typeface="Arial"/>
+              </a:defRPr>
+            </a:lvl7pPr>
+            <a:lvl8pPr>
+              <a:defRPr sz="1725" b="0">
+                <a:solidFill>
+                  <a:srgbClr val="536272"/>
+                </a:solidFill>
+                <a:latin typeface="Arial"/>
+                <a:ea typeface="Arial"/>
+                <a:cs typeface="Arial"/>
+              </a:defRPr>
+            </a:lvl8pPr>
+            <a:lvl9pPr>
+              <a:defRPr sz="1725" b="0">
+                <a:solidFill>
+                  <a:srgbClr val="536272"/>
+                </a:solidFill>
+                <a:latin typeface="Arial"/>
+                <a:ea typeface="Arial"/>
+                <a:cs typeface="Arial"/>
+              </a:defRPr>
+            </a:lvl9pPr>
           </a:lstStyle>
           <a:p xmlns:a="http://schemas.openxmlformats.org/drawingml/2006/main">
             <a:pPr>
@@ -7465,7 +10975,7 @@
           <p:cNvPr id="5" name="Chart">
             <a:extLst xmlns:a="http://schemas.openxmlformats.org/drawingml/2006/main">
               <a:ext uri="{FF2B5EF4-FFF2-40B4-BE49-F238E27FC236}">
-                <a16:creationId xmlns:a16="http://schemas.microsoft.com/office/drawing/2014/main" id="{A3B9BC61-907C-4650-B2E2-1CBE0D89B669}"/>
+                <a16:creationId xmlns:a16="http://schemas.microsoft.com/office/drawing/2014/main" id="{39D15674-CAFD-459A-A0D4-9118941C8EEE}"/>
               </a:ext>
             </a:extLst>
           </p:cNvPr>
@@ -7478,7 +10988,7 @@
         </p:xfrm>
         <a:graphic xmlns:a="http://schemas.openxmlformats.org/drawingml/2006/main">
           <a:graphicData uri="http://schemas.openxmlformats.org/drawingml/2006/chart">
-            <c:chart xmlns:r="http://schemas.openxmlformats.org/officeDocument/2006/relationships" xmlns:c="http://schemas.openxmlformats.org/drawingml/2006/chart" r:id="R71059fd54a5c46cb"/>
+            <c:chart xmlns:r="http://schemas.openxmlformats.org/officeDocument/2006/relationships" xmlns:c="http://schemas.openxmlformats.org/drawingml/2006/chart" r:id="R1965a8ae894a4b73"/>
           </a:graphicData>
         </a:graphic>
       </p:graphicFrame>
@@ -7487,7 +10997,7 @@
           <p:cNvPr id="6" name="">
             <a:extLst xmlns:a="http://schemas.openxmlformats.org/drawingml/2006/main">
               <a:ext uri="{FF2B5EF4-FFF2-40B4-BE49-F238E27FC236}">
-                <a16:creationId xmlns:a16="http://schemas.microsoft.com/office/drawing/2014/main" id="{EF41E3C0-C2CC-4824-911F-425D16590643}"/>
+                <a16:creationId xmlns:a16="http://schemas.microsoft.com/office/drawing/2014/main" id="{AD007EA2-ED75-40DD-8283-1B71AA90F6E6}"/>
               </a:ext>
             </a:extLst>
           </p:cNvPr>
@@ -7524,6 +11034,96 @@
                 <a:cs typeface="Arial"/>
               </a:defRPr>
             </a:defPPr>
+            <a:lvl1pPr>
+              <a:defRPr sz="2025" b="0">
+                <a:solidFill>
+                  <a:srgbClr val="063E5F"/>
+                </a:solidFill>
+                <a:latin typeface="Arial"/>
+                <a:ea typeface="Arial"/>
+                <a:cs typeface="Arial"/>
+              </a:defRPr>
+            </a:lvl1pPr>
+            <a:lvl2pPr>
+              <a:defRPr sz="2025" b="0">
+                <a:solidFill>
+                  <a:srgbClr val="063E5F"/>
+                </a:solidFill>
+                <a:latin typeface="Arial"/>
+                <a:ea typeface="Arial"/>
+                <a:cs typeface="Arial"/>
+              </a:defRPr>
+            </a:lvl2pPr>
+            <a:lvl3pPr>
+              <a:defRPr sz="2025" b="0">
+                <a:solidFill>
+                  <a:srgbClr val="063E5F"/>
+                </a:solidFill>
+                <a:latin typeface="Arial"/>
+                <a:ea typeface="Arial"/>
+                <a:cs typeface="Arial"/>
+              </a:defRPr>
+            </a:lvl3pPr>
+            <a:lvl4pPr>
+              <a:defRPr sz="2025" b="0">
+                <a:solidFill>
+                  <a:srgbClr val="063E5F"/>
+                </a:solidFill>
+                <a:latin typeface="Arial"/>
+                <a:ea typeface="Arial"/>
+                <a:cs typeface="Arial"/>
+              </a:defRPr>
+            </a:lvl4pPr>
+            <a:lvl5pPr>
+              <a:defRPr sz="2025" b="0">
+                <a:solidFill>
+                  <a:srgbClr val="063E5F"/>
+                </a:solidFill>
+                <a:latin typeface="Arial"/>
+                <a:ea typeface="Arial"/>
+                <a:cs typeface="Arial"/>
+              </a:defRPr>
+            </a:lvl5pPr>
+            <a:lvl6pPr>
+              <a:defRPr sz="2025" b="0">
+                <a:solidFill>
+                  <a:srgbClr val="063E5F"/>
+                </a:solidFill>
+                <a:latin typeface="Arial"/>
+                <a:ea typeface="Arial"/>
+                <a:cs typeface="Arial"/>
+              </a:defRPr>
+            </a:lvl6pPr>
+            <a:lvl7pPr>
+              <a:defRPr sz="2025" b="0">
+                <a:solidFill>
+                  <a:srgbClr val="063E5F"/>
+                </a:solidFill>
+                <a:latin typeface="Arial"/>
+                <a:ea typeface="Arial"/>
+                <a:cs typeface="Arial"/>
+              </a:defRPr>
+            </a:lvl7pPr>
+            <a:lvl8pPr>
+              <a:defRPr sz="2025" b="0">
+                <a:solidFill>
+                  <a:srgbClr val="063E5F"/>
+                </a:solidFill>
+                <a:latin typeface="Arial"/>
+                <a:ea typeface="Arial"/>
+                <a:cs typeface="Arial"/>
+              </a:defRPr>
+            </a:lvl8pPr>
+            <a:lvl9pPr>
+              <a:defRPr sz="2025" b="0">
+                <a:solidFill>
+                  <a:srgbClr val="063E5F"/>
+                </a:solidFill>
+                <a:latin typeface="Arial"/>
+                <a:ea typeface="Arial"/>
+                <a:cs typeface="Arial"/>
+              </a:defRPr>
+            </a:lvl9pPr>
           </a:lstStyle>
           <a:p xmlns:a="http://schemas.openxmlformats.org/drawingml/2006/main">
             <a:pPr>
@@ -7555,7 +11155,7 @@
           <p:cNvPr id="7" name="">
             <a:extLst xmlns:a="http://schemas.openxmlformats.org/drawingml/2006/main">
               <a:ext uri="{FF2B5EF4-FFF2-40B4-BE49-F238E27FC236}">
-                <a16:creationId xmlns:a16="http://schemas.microsoft.com/office/drawing/2014/main" id="{E6E3604B-74E7-4530-8892-1B78989B080B}"/>
+                <a16:creationId xmlns:a16="http://schemas.microsoft.com/office/drawing/2014/main" id="{411E34B7-5F7F-4D3E-B96B-64AF8380B00E}"/>
               </a:ext>
             </a:extLst>
           </p:cNvPr>
@@ -7592,6 +11192,96 @@
                 <a:cs typeface="Arial"/>
               </a:defRPr>
             </a:defPPr>
+            <a:lvl1pPr>
+              <a:defRPr sz="1800" b="0">
+                <a:solidFill>
+                  <a:srgbClr val="536272"/>
+                </a:solidFill>
+                <a:latin typeface="Arial"/>
+                <a:ea typeface="Arial"/>
+                <a:cs typeface="Arial"/>
+              </a:defRPr>
+            </a:lvl1pPr>
+            <a:lvl2pPr>
+              <a:defRPr sz="1800" b="0">
+                <a:solidFill>
+                  <a:srgbClr val="536272"/>
+                </a:solidFill>
+                <a:latin typeface="Arial"/>
+                <a:ea typeface="Arial"/>
+                <a:cs typeface="Arial"/>
+              </a:defRPr>
+            </a:lvl2pPr>
+            <a:lvl3pPr>
+              <a:defRPr sz="1800" b="0">
+                <a:solidFill>
+                  <a:srgbClr val="536272"/>
+                </a:solidFill>
+                <a:latin typeface="Arial"/>
+                <a:ea typeface="Arial"/>
+                <a:cs typeface="Arial"/>
+              </a:defRPr>
+            </a:lvl3pPr>
+            <a:lvl4pPr>
+              <a:defRPr sz="1800" b="0">
+                <a:solidFill>
+                  <a:srgbClr val="536272"/>
+                </a:solidFill>
+                <a:latin typeface="Arial"/>
+                <a:ea typeface="Arial"/>
+                <a:cs typeface="Arial"/>
+              </a:defRPr>
+            </a:lvl4pPr>
+            <a:lvl5pPr>
+              <a:defRPr sz="1800" b="0">
+                <a:solidFill>
+                  <a:srgbClr val="536272"/>
+                </a:solidFill>
+                <a:latin typeface="Arial"/>
+                <a:ea typeface="Arial"/>
+                <a:cs typeface="Arial"/>
+              </a:defRPr>
+            </a:lvl5pPr>
+            <a:lvl6pPr>
+              <a:defRPr sz="1800" b="0">
+                <a:solidFill>
+                  <a:srgbClr val="536272"/>
+                </a:solidFill>
+                <a:latin typeface="Arial"/>
+                <a:ea typeface="Arial"/>
+                <a:cs typeface="Arial"/>
+              </a:defRPr>
+            </a:lvl6pPr>
+            <a:lvl7pPr>
+              <a:defRPr sz="1800" b="0">
+                <a:solidFill>
+                  <a:srgbClr val="536272"/>
+                </a:solidFill>
+                <a:latin typeface="Arial"/>
+                <a:ea typeface="Arial"/>
+                <a:cs typeface="Arial"/>
+              </a:defRPr>
+            </a:lvl7pPr>
+            <a:lvl8pPr>
+              <a:defRPr sz="1800" b="0">
+                <a:solidFill>
+                  <a:srgbClr val="536272"/>
+                </a:solidFill>
+                <a:latin typeface="Arial"/>
+                <a:ea typeface="Arial"/>
+                <a:cs typeface="Arial"/>
+              </a:defRPr>
+            </a:lvl8pPr>
+            <a:lvl9pPr>
+              <a:defRPr sz="1800" b="0">
+                <a:solidFill>
+                  <a:srgbClr val="536272"/>
+                </a:solidFill>
+                <a:latin typeface="Arial"/>
+                <a:ea typeface="Arial"/>
+                <a:cs typeface="Arial"/>
+              </a:defRPr>
+            </a:lvl9pPr>
           </a:lstStyle>
           <a:p xmlns:a="http://schemas.openxmlformats.org/drawingml/2006/main">
             <a:pPr>
@@ -7621,7 +11311,7 @@
     </p:spTree>
     <p:extLst>
       <p:ext uri="{BB962C8B-B14F-4D97-AF65-F5344CB8AC3E}">
-        <p14:creationId xmlns:p14="http://schemas.microsoft.com/office/powerpoint/2010/main" val="1815162435"/>
+        <p14:creationId xmlns:p14="http://schemas.microsoft.com/office/powerpoint/2010/main" val="678523323"/>
       </p:ext>
     </p:extLst>
   </p:cSld>
@@ -7652,7 +11342,7 @@
           <p:cNvPr id="8" name="">
             <a:extLst xmlns:a="http://schemas.openxmlformats.org/drawingml/2006/main">
               <a:ext uri="{FF2B5EF4-FFF2-40B4-BE49-F238E27FC236}">
-                <a16:creationId xmlns:a16="http://schemas.microsoft.com/office/drawing/2014/main" id="{81B88CA5-177E-404C-94A4-7E95DE6B27AC}"/>
+                <a16:creationId xmlns:a16="http://schemas.microsoft.com/office/drawing/2014/main" id="{57B3C2ED-4937-4077-814C-2FD7C9ADF767}"/>
               </a:ext>
             </a:extLst>
           </p:cNvPr>
@@ -7689,6 +11379,96 @@
                 <a:cs typeface="Arial"/>
               </a:defRPr>
             </a:defPPr>
+            <a:lvl1pPr>
+              <a:defRPr sz="3300" b="1">
+                <a:solidFill>
+                  <a:srgbClr val="063E5F"/>
+                </a:solidFill>
+                <a:latin typeface="Arial"/>
+                <a:ea typeface="Arial"/>
+                <a:cs typeface="Arial"/>
+              </a:defRPr>
+            </a:lvl1pPr>
+            <a:lvl2pPr>
+              <a:defRPr sz="3300" b="1">
+                <a:solidFill>
+                  <a:srgbClr val="063E5F"/>
+                </a:solidFill>
+                <a:latin typeface="Arial"/>
+                <a:ea typeface="Arial"/>
+                <a:cs typeface="Arial"/>
+              </a:defRPr>
+            </a:lvl2pPr>
+            <a:lvl3pPr>
+              <a:defRPr sz="3300" b="1">
+                <a:solidFill>
+                  <a:srgbClr val="063E5F"/>
+                </a:solidFill>
+                <a:latin typeface="Arial"/>
+                <a:ea typeface="Arial"/>
+                <a:cs typeface="Arial"/>
+              </a:defRPr>
+            </a:lvl3pPr>
+            <a:lvl4pPr>
+              <a:defRPr sz="3300" b="1">
+                <a:solidFill>
+                  <a:srgbClr val="063E5F"/>
+                </a:solidFill>
+                <a:latin typeface="Arial"/>
+                <a:ea typeface="Arial"/>
+                <a:cs typeface="Arial"/>
+              </a:defRPr>
+            </a:lvl4pPr>
+            <a:lvl5pPr>
+              <a:defRPr sz="3300" b="1">
+                <a:solidFill>
+                  <a:srgbClr val="063E5F"/>
+                </a:solidFill>
+                <a:latin typeface="Arial"/>
+                <a:ea typeface="Arial"/>
+                <a:cs typeface="Arial"/>
+              </a:defRPr>
+            </a:lvl5pPr>
+            <a:lvl6pPr>
+              <a:defRPr sz="3300" b="1">
+                <a:solidFill>
+                  <a:srgbClr val="063E5F"/>
+                </a:solidFill>
+                <a:latin typeface="Arial"/>
+                <a:ea typeface="Arial"/>
+                <a:cs typeface="Arial"/>
+              </a:defRPr>
+            </a:lvl6pPr>
+            <a:lvl7pPr>
+              <a:defRPr sz="3300" b="1">
+                <a:solidFill>
+                  <a:srgbClr val="063E5F"/>
+                </a:solidFill>
+                <a:latin typeface="Arial"/>
+                <a:ea typeface="Arial"/>
+                <a:cs typeface="Arial"/>
+              </a:defRPr>
+            </a:lvl7pPr>
+            <a:lvl8pPr>
+              <a:defRPr sz="3300" b="1">
+                <a:solidFill>
+                  <a:srgbClr val="063E5F"/>
+                </a:solidFill>
+                <a:latin typeface="Arial"/>
+                <a:ea typeface="Arial"/>
+                <a:cs typeface="Arial"/>
+              </a:defRPr>
+            </a:lvl8pPr>
+            <a:lvl9pPr>
+              <a:defRPr sz="3300" b="1">
+                <a:solidFill>
+                  <a:srgbClr val="063E5F"/>
+                </a:solidFill>
+                <a:latin typeface="Arial"/>
+                <a:ea typeface="Arial"/>
+                <a:cs typeface="Arial"/>
+              </a:defRPr>
+            </a:lvl9pPr>
           </a:lstStyle>
           <a:p xmlns:a="http://schemas.openxmlformats.org/drawingml/2006/main">
             <a:pPr>
@@ -7720,7 +11500,7 @@
           <p:cNvPr id="2" name="">
             <a:extLst xmlns:a="http://schemas.openxmlformats.org/drawingml/2006/main">
               <a:ext uri="{FF2B5EF4-FFF2-40B4-BE49-F238E27FC236}">
-                <a16:creationId xmlns:a16="http://schemas.microsoft.com/office/drawing/2014/main" id="{1CABE337-5A8F-4F4A-A0FB-6BAF2E13E89B}"/>
+                <a16:creationId xmlns:a16="http://schemas.microsoft.com/office/drawing/2014/main" id="{E69D56CA-A046-4C19-AE86-D6AE600BE580}"/>
               </a:ext>
             </a:extLst>
           </p:cNvPr>
@@ -7757,6 +11537,96 @@
                 <a:cs typeface="Arial"/>
               </a:defRPr>
             </a:defPPr>
+            <a:lvl1pPr>
+              <a:defRPr sz="1200" b="0">
+                <a:solidFill>
+                  <a:srgbClr val="536272"/>
+                </a:solidFill>
+                <a:latin typeface="Arial"/>
+                <a:ea typeface="Arial"/>
+                <a:cs typeface="Arial"/>
+              </a:defRPr>
+            </a:lvl1pPr>
+            <a:lvl2pPr>
+              <a:defRPr sz="1200" b="0">
+                <a:solidFill>
+                  <a:srgbClr val="536272"/>
+                </a:solidFill>
+                <a:latin typeface="Arial"/>
+                <a:ea typeface="Arial"/>
+                <a:cs typeface="Arial"/>
+              </a:defRPr>
+            </a:lvl2pPr>
+            <a:lvl3pPr>
+              <a:defRPr sz="1200" b="0">
+                <a:solidFill>
+                  <a:srgbClr val="536272"/>
+                </a:solidFill>
+                <a:latin typeface="Arial"/>
+                <a:ea typeface="Arial"/>
+                <a:cs typeface="Arial"/>
+              </a:defRPr>
+            </a:lvl3pPr>
+            <a:lvl4pPr>
+              <a:defRPr sz="1200" b="0">
+                <a:solidFill>
+                  <a:srgbClr val="536272"/>
+                </a:solidFill>
+                <a:latin typeface="Arial"/>
+                <a:ea typeface="Arial"/>
+                <a:cs typeface="Arial"/>
+              </a:defRPr>
+            </a:lvl4pPr>
+            <a:lvl5pPr>
+              <a:defRPr sz="1200" b="0">
+                <a:solidFill>
+                  <a:srgbClr val="536272"/>
+                </a:solidFill>
+                <a:latin typeface="Arial"/>
+                <a:ea typeface="Arial"/>
+                <a:cs typeface="Arial"/>
+              </a:defRPr>
+            </a:lvl5pPr>
+            <a:lvl6pPr>
+              <a:defRPr sz="1200" b="0">
+                <a:solidFill>
+                  <a:srgbClr val="536272"/>
+                </a:solidFill>
+                <a:latin typeface="Arial"/>
+                <a:ea typeface="Arial"/>
+                <a:cs typeface="Arial"/>
+              </a:defRPr>
+            </a:lvl6pPr>
+            <a:lvl7pPr>
+              <a:defRPr sz="1200" b="0">
+                <a:solidFill>
+                  <a:srgbClr val="536272"/>
+                </a:solidFill>
+                <a:latin typeface="Arial"/>
+                <a:ea typeface="Arial"/>
+                <a:cs typeface="Arial"/>
+              </a:defRPr>
+            </a:lvl7pPr>
+            <a:lvl8pPr>
+              <a:defRPr sz="1200" b="0">
+                <a:solidFill>
+                  <a:srgbClr val="536272"/>
+                </a:solidFill>
+                <a:latin typeface="Arial"/>
+                <a:ea typeface="Arial"/>
+                <a:cs typeface="Arial"/>
+              </a:defRPr>
+            </a:lvl8pPr>
+            <a:lvl9pPr>
+              <a:defRPr sz="1200" b="0">
+                <a:solidFill>
+                  <a:srgbClr val="536272"/>
+                </a:solidFill>
+                <a:latin typeface="Arial"/>
+                <a:ea typeface="Arial"/>
+                <a:cs typeface="Arial"/>
+              </a:defRPr>
+            </a:lvl9pPr>
           </a:lstStyle>
           <a:p xmlns:a="http://schemas.openxmlformats.org/drawingml/2006/main">
             <a:pPr>
@@ -7788,7 +11658,7 @@
           <p:cNvPr id="3" name="">
             <a:extLst xmlns:a="http://schemas.openxmlformats.org/drawingml/2006/main">
               <a:ext uri="{FF2B5EF4-FFF2-40B4-BE49-F238E27FC236}">
-                <a16:creationId xmlns:a16="http://schemas.microsoft.com/office/drawing/2014/main" id="{7D26F5DF-AF19-4638-9891-4BD6FE3A2A3D}"/>
+                <a16:creationId xmlns:a16="http://schemas.microsoft.com/office/drawing/2014/main" id="{349AD37B-3C3B-46C3-9AE6-01450747AA25}"/>
               </a:ext>
             </a:extLst>
           </p:cNvPr>
@@ -7825,6 +11695,96 @@
                 <a:cs typeface="Arial"/>
               </a:defRPr>
             </a:defPPr>
+            <a:lvl1pPr>
+              <a:defRPr sz="1275" b="0">
+                <a:solidFill>
+                  <a:srgbClr val="B88E23"/>
+                </a:solidFill>
+                <a:latin typeface="Arial"/>
+                <a:ea typeface="Arial"/>
+                <a:cs typeface="Arial"/>
+              </a:defRPr>
+            </a:lvl1pPr>
+            <a:lvl2pPr>
+              <a:defRPr sz="1275" b="0">
+                <a:solidFill>
+                  <a:srgbClr val="B88E23"/>
+                </a:solidFill>
+                <a:latin typeface="Arial"/>
+                <a:ea typeface="Arial"/>
+                <a:cs typeface="Arial"/>
+              </a:defRPr>
+            </a:lvl2pPr>
+            <a:lvl3pPr>
+              <a:defRPr sz="1275" b="0">
+                <a:solidFill>
+                  <a:srgbClr val="B88E23"/>
+                </a:solidFill>
+                <a:latin typeface="Arial"/>
+                <a:ea typeface="Arial"/>
+                <a:cs typeface="Arial"/>
+              </a:defRPr>
+            </a:lvl3pPr>
+            <a:lvl4pPr>
+              <a:defRPr sz="1275" b="0">
+                <a:solidFill>
+                  <a:srgbClr val="B88E23"/>
+                </a:solidFill>
+                <a:latin typeface="Arial"/>
+                <a:ea typeface="Arial"/>
+                <a:cs typeface="Arial"/>
+              </a:defRPr>
+            </a:lvl4pPr>
+            <a:lvl5pPr>
+              <a:defRPr sz="1275" b="0">
+                <a:solidFill>
+                  <a:srgbClr val="B88E23"/>
+                </a:solidFill>
+                <a:latin typeface="Arial"/>
+                <a:ea typeface="Arial"/>
+                <a:cs typeface="Arial"/>
+              </a:defRPr>
+            </a:lvl5pPr>
+            <a:lvl6pPr>
+              <a:defRPr sz="1275" b="0">
+                <a:solidFill>
+                  <a:srgbClr val="B88E23"/>
+                </a:solidFill>
+                <a:latin typeface="Arial"/>
+                <a:ea typeface="Arial"/>
+                <a:cs typeface="Arial"/>
+              </a:defRPr>
+            </a:lvl6pPr>
+            <a:lvl7pPr>
+              <a:defRPr sz="1275" b="0">
+                <a:solidFill>
+                  <a:srgbClr val="B88E23"/>
+                </a:solidFill>
+                <a:latin typeface="Arial"/>
+                <a:ea typeface="Arial"/>
+                <a:cs typeface="Arial"/>
+              </a:defRPr>
+            </a:lvl7pPr>
+            <a:lvl8pPr>
+              <a:defRPr sz="1275" b="0">
+                <a:solidFill>
+                  <a:srgbClr val="B88E23"/>
+                </a:solidFill>
+                <a:latin typeface="Arial"/>
+                <a:ea typeface="Arial"/>
+                <a:cs typeface="Arial"/>
+              </a:defRPr>
+            </a:lvl8pPr>
+            <a:lvl9pPr>
+              <a:defRPr sz="1275" b="0">
+                <a:solidFill>
+                  <a:srgbClr val="B88E23"/>
+                </a:solidFill>
+                <a:latin typeface="Arial"/>
+                <a:ea typeface="Arial"/>
+                <a:cs typeface="Arial"/>
+              </a:defRPr>
+            </a:lvl9pPr>
           </a:lstStyle>
           <a:p xmlns:a="http://schemas.openxmlformats.org/drawingml/2006/main">
             <a:pPr>
@@ -7856,7 +11816,7 @@
           <p:cNvPr id="4" name="">
             <a:extLst xmlns:a="http://schemas.openxmlformats.org/drawingml/2006/main">
               <a:ext uri="{FF2B5EF4-FFF2-40B4-BE49-F238E27FC236}">
-                <a16:creationId xmlns:a16="http://schemas.microsoft.com/office/drawing/2014/main" id="{F234EC9F-2E71-4D0B-AC0C-9E0822FF6F2C}"/>
+                <a16:creationId xmlns:a16="http://schemas.microsoft.com/office/drawing/2014/main" id="{2BCABE44-DD4B-4040-9ACF-0F3F22073554}"/>
               </a:ext>
             </a:extLst>
           </p:cNvPr>
@@ -7893,6 +11853,96 @@
                 <a:cs typeface="Arial"/>
               </a:defRPr>
             </a:defPPr>
+            <a:lvl1pPr>
+              <a:defRPr sz="1725" b="0">
+                <a:solidFill>
+                  <a:srgbClr val="536272"/>
+                </a:solidFill>
+                <a:latin typeface="Arial"/>
+                <a:ea typeface="Arial"/>
+                <a:cs typeface="Arial"/>
+              </a:defRPr>
+            </a:lvl1pPr>
+            <a:lvl2pPr>
+              <a:defRPr sz="1725" b="0">
+                <a:solidFill>
+                  <a:srgbClr val="536272"/>
+                </a:solidFill>
+                <a:latin typeface="Arial"/>
+                <a:ea typeface="Arial"/>
+                <a:cs typeface="Arial"/>
+              </a:defRPr>
+            </a:lvl2pPr>
+            <a:lvl3pPr>
+              <a:defRPr sz="1725" b="0">
+                <a:solidFill>
+                  <a:srgbClr val="536272"/>
+                </a:solidFill>
+                <a:latin typeface="Arial"/>
+                <a:ea typeface="Arial"/>
+                <a:cs typeface="Arial"/>
+              </a:defRPr>
+            </a:lvl3pPr>
+            <a:lvl4pPr>
+              <a:defRPr sz="1725" b="0">
+                <a:solidFill>
+                  <a:srgbClr val="536272"/>
+                </a:solidFill>
+                <a:latin typeface="Arial"/>
+                <a:ea typeface="Arial"/>
+                <a:cs typeface="Arial"/>
+              </a:defRPr>
+            </a:lvl4pPr>
+            <a:lvl5pPr>
+              <a:defRPr sz="1725" b="0">
+                <a:solidFill>
+                  <a:srgbClr val="536272"/>
+                </a:solidFill>
+                <a:latin typeface="Arial"/>
+                <a:ea typeface="Arial"/>
+                <a:cs typeface="Arial"/>
+              </a:defRPr>
+            </a:lvl5pPr>
+            <a:lvl6pPr>
+              <a:defRPr sz="1725" b="0">
+                <a:solidFill>
+                  <a:srgbClr val="536272"/>
+                </a:solidFill>
+                <a:latin typeface="Arial"/>
+                <a:ea typeface="Arial"/>
+                <a:cs typeface="Arial"/>
+              </a:defRPr>
+            </a:lvl6pPr>
+            <a:lvl7pPr>
+              <a:defRPr sz="1725" b="0">
+                <a:solidFill>
+                  <a:srgbClr val="536272"/>
+                </a:solidFill>
+                <a:latin typeface="Arial"/>
+                <a:ea typeface="Arial"/>
+                <a:cs typeface="Arial"/>
+              </a:defRPr>
+            </a:lvl7pPr>
+            <a:lvl8pPr>
+              <a:defRPr sz="1725" b="0">
+                <a:solidFill>
+                  <a:srgbClr val="536272"/>
+                </a:solidFill>
+                <a:latin typeface="Arial"/>
+                <a:ea typeface="Arial"/>
+                <a:cs typeface="Arial"/>
+              </a:defRPr>
+            </a:lvl8pPr>
+            <a:lvl9pPr>
+              <a:defRPr sz="1725" b="0">
+                <a:solidFill>
+                  <a:srgbClr val="536272"/>
+                </a:solidFill>
+                <a:latin typeface="Arial"/>
+                <a:ea typeface="Arial"/>
+                <a:cs typeface="Arial"/>
+              </a:defRPr>
+            </a:lvl9pPr>
           </a:lstStyle>
           <a:p xmlns:a="http://schemas.openxmlformats.org/drawingml/2006/main">
             <a:pPr>
@@ -7924,7 +11974,7 @@
           <p:cNvPr id="5" name="Chart">
             <a:extLst xmlns:a="http://schemas.openxmlformats.org/drawingml/2006/main">
               <a:ext uri="{FF2B5EF4-FFF2-40B4-BE49-F238E27FC236}">
-                <a16:creationId xmlns:a16="http://schemas.microsoft.com/office/drawing/2014/main" id="{8C00E6E0-C960-4C81-A70A-13A7412387AD}"/>
+                <a16:creationId xmlns:a16="http://schemas.microsoft.com/office/drawing/2014/main" id="{9CD4A803-3F67-4882-895C-C7508C3ACE87}"/>
               </a:ext>
             </a:extLst>
           </p:cNvPr>
@@ -7937,7 +11987,7 @@
         </p:xfrm>
         <a:graphic xmlns:a="http://schemas.openxmlformats.org/drawingml/2006/main">
           <a:graphicData uri="http://schemas.openxmlformats.org/drawingml/2006/chart">
-            <c:chart xmlns:r="http://schemas.openxmlformats.org/officeDocument/2006/relationships" xmlns:c="http://schemas.openxmlformats.org/drawingml/2006/chart" r:id="Rd3e286f147904e77"/>
+            <c:chart xmlns:r="http://schemas.openxmlformats.org/officeDocument/2006/relationships" xmlns:c="http://schemas.openxmlformats.org/drawingml/2006/chart" r:id="R91956208d29f40d3"/>
           </a:graphicData>
         </a:graphic>
       </p:graphicFrame>
@@ -7946,7 +11996,7 @@
           <p:cNvPr id="6" name="">
             <a:extLst xmlns:a="http://schemas.openxmlformats.org/drawingml/2006/main">
               <a:ext uri="{FF2B5EF4-FFF2-40B4-BE49-F238E27FC236}">
-                <a16:creationId xmlns:a16="http://schemas.microsoft.com/office/drawing/2014/main" id="{94FBDE54-7337-4623-99C1-28AD5D147453}"/>
+                <a16:creationId xmlns:a16="http://schemas.microsoft.com/office/drawing/2014/main" id="{0220F7B5-BC07-4FC2-B585-645F03A5375D}"/>
               </a:ext>
             </a:extLst>
           </p:cNvPr>
@@ -7983,6 +12033,96 @@
                 <a:cs typeface="Arial"/>
               </a:defRPr>
             </a:defPPr>
+            <a:lvl1pPr>
+              <a:defRPr sz="2175" b="0">
+                <a:solidFill>
+                  <a:srgbClr val="063E5F"/>
+                </a:solidFill>
+                <a:latin typeface="Arial"/>
+                <a:ea typeface="Arial"/>
+                <a:cs typeface="Arial"/>
+              </a:defRPr>
+            </a:lvl1pPr>
+            <a:lvl2pPr>
+              <a:defRPr sz="2175" b="0">
+                <a:solidFill>
+                  <a:srgbClr val="063E5F"/>
+                </a:solidFill>
+                <a:latin typeface="Arial"/>
+                <a:ea typeface="Arial"/>
+                <a:cs typeface="Arial"/>
+              </a:defRPr>
+            </a:lvl2pPr>
+            <a:lvl3pPr>
+              <a:defRPr sz="2175" b="0">
+                <a:solidFill>
+                  <a:srgbClr val="063E5F"/>
+                </a:solidFill>
+                <a:latin typeface="Arial"/>
+                <a:ea typeface="Arial"/>
+                <a:cs typeface="Arial"/>
+              </a:defRPr>
+            </a:lvl3pPr>
+            <a:lvl4pPr>
+              <a:defRPr sz="2175" b="0">
+                <a:solidFill>
+                  <a:srgbClr val="063E5F"/>
+                </a:solidFill>
+                <a:latin typeface="Arial"/>
+                <a:ea typeface="Arial"/>
+                <a:cs typeface="Arial"/>
+              </a:defRPr>
+            </a:lvl4pPr>
+            <a:lvl5pPr>
+              <a:defRPr sz="2175" b="0">
+                <a:solidFill>
+                  <a:srgbClr val="063E5F"/>
+                </a:solidFill>
+                <a:latin typeface="Arial"/>
+                <a:ea typeface="Arial"/>
+                <a:cs typeface="Arial"/>
+              </a:defRPr>
+            </a:lvl5pPr>
+            <a:lvl6pPr>
+              <a:defRPr sz="2175" b="0">
+                <a:solidFill>
+                  <a:srgbClr val="063E5F"/>
+                </a:solidFill>
+                <a:latin typeface="Arial"/>
+                <a:ea typeface="Arial"/>
+                <a:cs typeface="Arial"/>
+              </a:defRPr>
+            </a:lvl6pPr>
+            <a:lvl7pPr>
+              <a:defRPr sz="2175" b="0">
+                <a:solidFill>
+                  <a:srgbClr val="063E5F"/>
+                </a:solidFill>
+                <a:latin typeface="Arial"/>
+                <a:ea typeface="Arial"/>
+                <a:cs typeface="Arial"/>
+              </a:defRPr>
+            </a:lvl7pPr>
+            <a:lvl8pPr>
+              <a:defRPr sz="2175" b="0">
+                <a:solidFill>
+                  <a:srgbClr val="063E5F"/>
+                </a:solidFill>
+                <a:latin typeface="Arial"/>
+                <a:ea typeface="Arial"/>
+                <a:cs typeface="Arial"/>
+              </a:defRPr>
+            </a:lvl8pPr>
+            <a:lvl9pPr>
+              <a:defRPr sz="2175" b="0">
+                <a:solidFill>
+                  <a:srgbClr val="063E5F"/>
+                </a:solidFill>
+                <a:latin typeface="Arial"/>
+                <a:ea typeface="Arial"/>
+                <a:cs typeface="Arial"/>
+              </a:defRPr>
+            </a:lvl9pPr>
           </a:lstStyle>
           <a:p xmlns:a="http://schemas.openxmlformats.org/drawingml/2006/main">
             <a:pPr>
@@ -8014,7 +12154,7 @@
           <p:cNvPr id="7" name="">
             <a:extLst xmlns:a="http://schemas.openxmlformats.org/drawingml/2006/main">
               <a:ext uri="{FF2B5EF4-FFF2-40B4-BE49-F238E27FC236}">
-                <a16:creationId xmlns:a16="http://schemas.microsoft.com/office/drawing/2014/main" id="{4CCB54BB-8BBD-4B14-9425-41EA24075653}"/>
+                <a16:creationId xmlns:a16="http://schemas.microsoft.com/office/drawing/2014/main" id="{15488133-7E79-431B-9396-DBAE31EF212F}"/>
               </a:ext>
             </a:extLst>
           </p:cNvPr>
@@ -8051,6 +12191,96 @@
                 <a:cs typeface="Arial"/>
               </a:defRPr>
             </a:defPPr>
+            <a:lvl1pPr>
+              <a:defRPr sz="1800" b="0">
+                <a:solidFill>
+                  <a:srgbClr val="536272"/>
+                </a:solidFill>
+                <a:latin typeface="Arial"/>
+                <a:ea typeface="Arial"/>
+                <a:cs typeface="Arial"/>
+              </a:defRPr>
+            </a:lvl1pPr>
+            <a:lvl2pPr>
+              <a:defRPr sz="1800" b="0">
+                <a:solidFill>
+                  <a:srgbClr val="536272"/>
+                </a:solidFill>
+                <a:latin typeface="Arial"/>
+                <a:ea typeface="Arial"/>
+                <a:cs typeface="Arial"/>
+              </a:defRPr>
+            </a:lvl2pPr>
+            <a:lvl3pPr>
+              <a:defRPr sz="1800" b="0">
+                <a:solidFill>
+                  <a:srgbClr val="536272"/>
+                </a:solidFill>
+                <a:latin typeface="Arial"/>
+                <a:ea typeface="Arial"/>
+                <a:cs typeface="Arial"/>
+              </a:defRPr>
+            </a:lvl3pPr>
+            <a:lvl4pPr>
+              <a:defRPr sz="1800" b="0">
+                <a:solidFill>
+                  <a:srgbClr val="536272"/>
+                </a:solidFill>
+                <a:latin typeface="Arial"/>
+                <a:ea typeface="Arial"/>
+                <a:cs typeface="Arial"/>
+              </a:defRPr>
+            </a:lvl4pPr>
+            <a:lvl5pPr>
+              <a:defRPr sz="1800" b="0">
+                <a:solidFill>
+                  <a:srgbClr val="536272"/>
+                </a:solidFill>
+                <a:latin typeface="Arial"/>
+                <a:ea typeface="Arial"/>
+                <a:cs typeface="Arial"/>
+              </a:defRPr>
+            </a:lvl5pPr>
+            <a:lvl6pPr>
+              <a:defRPr sz="1800" b="0">
+                <a:solidFill>
+                  <a:srgbClr val="536272"/>
+                </a:solidFill>
+                <a:latin typeface="Arial"/>
+                <a:ea typeface="Arial"/>
+                <a:cs typeface="Arial"/>
+              </a:defRPr>
+            </a:lvl6pPr>
+            <a:lvl7pPr>
+              <a:defRPr sz="1800" b="0">
+                <a:solidFill>
+                  <a:srgbClr val="536272"/>
+                </a:solidFill>
+                <a:latin typeface="Arial"/>
+                <a:ea typeface="Arial"/>
+                <a:cs typeface="Arial"/>
+              </a:defRPr>
+            </a:lvl7pPr>
+            <a:lvl8pPr>
+              <a:defRPr sz="1800" b="0">
+                <a:solidFill>
+                  <a:srgbClr val="536272"/>
+                </a:solidFill>
+                <a:latin typeface="Arial"/>
+                <a:ea typeface="Arial"/>
+                <a:cs typeface="Arial"/>
+              </a:defRPr>
+            </a:lvl8pPr>
+            <a:lvl9pPr>
+              <a:defRPr sz="1800" b="0">
+                <a:solidFill>
+                  <a:srgbClr val="536272"/>
+                </a:solidFill>
+                <a:latin typeface="Arial"/>
+                <a:ea typeface="Arial"/>
+                <a:cs typeface="Arial"/>
+              </a:defRPr>
+            </a:lvl9pPr>
           </a:lstStyle>
           <a:p xmlns:a="http://schemas.openxmlformats.org/drawingml/2006/main">
             <a:pPr>
@@ -8080,7 +12310,7 @@
     </p:spTree>
     <p:extLst>
       <p:ext uri="{BB962C8B-B14F-4D97-AF65-F5344CB8AC3E}">
-        <p14:creationId xmlns:p14="http://schemas.microsoft.com/office/powerpoint/2010/main" val="1271911181"/>
+        <p14:creationId xmlns:p14="http://schemas.microsoft.com/office/powerpoint/2010/main" val="1962376150"/>
       </p:ext>
     </p:extLst>
   </p:cSld>
@@ -8111,7 +12341,7 @@
           <p:cNvPr id="9" name="">
             <a:extLst xmlns:a="http://schemas.openxmlformats.org/drawingml/2006/main">
               <a:ext uri="{FF2B5EF4-FFF2-40B4-BE49-F238E27FC236}">
-                <a16:creationId xmlns:a16="http://schemas.microsoft.com/office/drawing/2014/main" id="{55196B93-594E-4C02-8610-AF37CFC672BC}"/>
+                <a16:creationId xmlns:a16="http://schemas.microsoft.com/office/drawing/2014/main" id="{0F1DCB18-FA7C-43DF-84EB-FACF13829F03}"/>
               </a:ext>
             </a:extLst>
           </p:cNvPr>
@@ -8148,6 +12378,96 @@
                 <a:cs typeface="Arial"/>
               </a:defRPr>
             </a:defPPr>
+            <a:lvl1pPr>
+              <a:defRPr sz="3300" b="1">
+                <a:solidFill>
+                  <a:srgbClr val="063E5F"/>
+                </a:solidFill>
+                <a:latin typeface="Arial"/>
+                <a:ea typeface="Arial"/>
+                <a:cs typeface="Arial"/>
+              </a:defRPr>
+            </a:lvl1pPr>
+            <a:lvl2pPr>
+              <a:defRPr sz="3300" b="1">
+                <a:solidFill>
+                  <a:srgbClr val="063E5F"/>
+                </a:solidFill>
+                <a:latin typeface="Arial"/>
+                <a:ea typeface="Arial"/>
+                <a:cs typeface="Arial"/>
+              </a:defRPr>
+            </a:lvl2pPr>
+            <a:lvl3pPr>
+              <a:defRPr sz="3300" b="1">
+                <a:solidFill>
+                  <a:srgbClr val="063E5F"/>
+                </a:solidFill>
+                <a:latin typeface="Arial"/>
+                <a:ea typeface="Arial"/>
+                <a:cs typeface="Arial"/>
+              </a:defRPr>
+            </a:lvl3pPr>
+            <a:lvl4pPr>
+              <a:defRPr sz="3300" b="1">
+                <a:solidFill>
+                  <a:srgbClr val="063E5F"/>
+                </a:solidFill>
+                <a:latin typeface="Arial"/>
+                <a:ea typeface="Arial"/>
+                <a:cs typeface="Arial"/>
+              </a:defRPr>
+            </a:lvl4pPr>
+            <a:lvl5pPr>
+              <a:defRPr sz="3300" b="1">
+                <a:solidFill>
+                  <a:srgbClr val="063E5F"/>
+                </a:solidFill>
+                <a:latin typeface="Arial"/>
+                <a:ea typeface="Arial"/>
+                <a:cs typeface="Arial"/>
+              </a:defRPr>
+            </a:lvl5pPr>
+            <a:lvl6pPr>
+              <a:defRPr sz="3300" b="1">
+                <a:solidFill>
+                  <a:srgbClr val="063E5F"/>
+                </a:solidFill>
+                <a:latin typeface="Arial"/>
+                <a:ea typeface="Arial"/>
+                <a:cs typeface="Arial"/>
+              </a:defRPr>
+            </a:lvl6pPr>
+            <a:lvl7pPr>
+              <a:defRPr sz="3300" b="1">
+                <a:solidFill>
+                  <a:srgbClr val="063E5F"/>
+                </a:solidFill>
+                <a:latin typeface="Arial"/>
+                <a:ea typeface="Arial"/>
+                <a:cs typeface="Arial"/>
+              </a:defRPr>
+            </a:lvl7pPr>
+            <a:lvl8pPr>
+              <a:defRPr sz="3300" b="1">
+                <a:solidFill>
+                  <a:srgbClr val="063E5F"/>
+                </a:solidFill>
+                <a:latin typeface="Arial"/>
+                <a:ea typeface="Arial"/>
+                <a:cs typeface="Arial"/>
+              </a:defRPr>
+            </a:lvl8pPr>
+            <a:lvl9pPr>
+              <a:defRPr sz="3300" b="1">
+                <a:solidFill>
+                  <a:srgbClr val="063E5F"/>
+                </a:solidFill>
+                <a:latin typeface="Arial"/>
+                <a:ea typeface="Arial"/>
+                <a:cs typeface="Arial"/>
+              </a:defRPr>
+            </a:lvl9pPr>
           </a:lstStyle>
           <a:p xmlns:a="http://schemas.openxmlformats.org/drawingml/2006/main">
             <a:pPr>
@@ -8179,7 +12499,7 @@
           <p:cNvPr id="2" name="">
             <a:extLst xmlns:a="http://schemas.openxmlformats.org/drawingml/2006/main">
               <a:ext uri="{FF2B5EF4-FFF2-40B4-BE49-F238E27FC236}">
-                <a16:creationId xmlns:a16="http://schemas.microsoft.com/office/drawing/2014/main" id="{7E1BFF9C-E791-490A-89E0-A8BF6336DD07}"/>
+                <a16:creationId xmlns:a16="http://schemas.microsoft.com/office/drawing/2014/main" id="{72AFBDF0-1004-4372-94CE-CBA509880A32}"/>
               </a:ext>
             </a:extLst>
           </p:cNvPr>
@@ -8216,6 +12536,96 @@
                 <a:cs typeface="Arial"/>
               </a:defRPr>
             </a:defPPr>
+            <a:lvl1pPr>
+              <a:defRPr sz="1200" b="0">
+                <a:solidFill>
+                  <a:srgbClr val="536272"/>
+                </a:solidFill>
+                <a:latin typeface="Arial"/>
+                <a:ea typeface="Arial"/>
+                <a:cs typeface="Arial"/>
+              </a:defRPr>
+            </a:lvl1pPr>
+            <a:lvl2pPr>
+              <a:defRPr sz="1200" b="0">
+                <a:solidFill>
+                  <a:srgbClr val="536272"/>
+                </a:solidFill>
+                <a:latin typeface="Arial"/>
+                <a:ea typeface="Arial"/>
+                <a:cs typeface="Arial"/>
+              </a:defRPr>
+            </a:lvl2pPr>
+            <a:lvl3pPr>
+              <a:defRPr sz="1200" b="0">
+                <a:solidFill>
+                  <a:srgbClr val="536272"/>
+                </a:solidFill>
+                <a:latin typeface="Arial"/>
+                <a:ea typeface="Arial"/>
+                <a:cs typeface="Arial"/>
+              </a:defRPr>
+            </a:lvl3pPr>
+            <a:lvl4pPr>
+              <a:defRPr sz="1200" b="0">
+                <a:solidFill>
+                  <a:srgbClr val="536272"/>
+                </a:solidFill>
+                <a:latin typeface="Arial"/>
+                <a:ea typeface="Arial"/>
+                <a:cs typeface="Arial"/>
+              </a:defRPr>
+            </a:lvl4pPr>
+            <a:lvl5pPr>
+              <a:defRPr sz="1200" b="0">
+                <a:solidFill>
+                  <a:srgbClr val="536272"/>
+                </a:solidFill>
+                <a:latin typeface="Arial"/>
+                <a:ea typeface="Arial"/>
+                <a:cs typeface="Arial"/>
+              </a:defRPr>
+            </a:lvl5pPr>
+            <a:lvl6pPr>
+              <a:defRPr sz="1200" b="0">
+                <a:solidFill>
+                  <a:srgbClr val="536272"/>
+                </a:solidFill>
+                <a:latin typeface="Arial"/>
+                <a:ea typeface="Arial"/>
+                <a:cs typeface="Arial"/>
+              </a:defRPr>
+            </a:lvl6pPr>
+            <a:lvl7pPr>
+              <a:defRPr sz="1200" b="0">
+                <a:solidFill>
+                  <a:srgbClr val="536272"/>
+                </a:solidFill>
+                <a:latin typeface="Arial"/>
+                <a:ea typeface="Arial"/>
+                <a:cs typeface="Arial"/>
+              </a:defRPr>
+            </a:lvl7pPr>
+            <a:lvl8pPr>
+              <a:defRPr sz="1200" b="0">
+                <a:solidFill>
+                  <a:srgbClr val="536272"/>
+                </a:solidFill>
+                <a:latin typeface="Arial"/>
+                <a:ea typeface="Arial"/>
+                <a:cs typeface="Arial"/>
+              </a:defRPr>
+            </a:lvl8pPr>
+            <a:lvl9pPr>
+              <a:defRPr sz="1200" b="0">
+                <a:solidFill>
+                  <a:srgbClr val="536272"/>
+                </a:solidFill>
+                <a:latin typeface="Arial"/>
+                <a:ea typeface="Arial"/>
+                <a:cs typeface="Arial"/>
+              </a:defRPr>
+            </a:lvl9pPr>
           </a:lstStyle>
           <a:p xmlns:a="http://schemas.openxmlformats.org/drawingml/2006/main">
             <a:pPr>
@@ -8247,7 +12657,7 @@
           <p:cNvPr id="3" name="">
             <a:extLst xmlns:a="http://schemas.openxmlformats.org/drawingml/2006/main">
               <a:ext uri="{FF2B5EF4-FFF2-40B4-BE49-F238E27FC236}">
-                <a16:creationId xmlns:a16="http://schemas.microsoft.com/office/drawing/2014/main" id="{57C472DD-3F91-46C0-9FAD-B0209AE71EC5}"/>
+                <a16:creationId xmlns:a16="http://schemas.microsoft.com/office/drawing/2014/main" id="{7D8548F9-0BFB-4143-9D5A-DED3EA47AD14}"/>
               </a:ext>
             </a:extLst>
           </p:cNvPr>
@@ -8284,6 +12694,96 @@
                 <a:cs typeface="Arial"/>
               </a:defRPr>
             </a:defPPr>
+            <a:lvl1pPr>
+              <a:defRPr sz="1275" b="0">
+                <a:solidFill>
+                  <a:srgbClr val="B88E23"/>
+                </a:solidFill>
+                <a:latin typeface="Arial"/>
+                <a:ea typeface="Arial"/>
+                <a:cs typeface="Arial"/>
+              </a:defRPr>
+            </a:lvl1pPr>
+            <a:lvl2pPr>
+              <a:defRPr sz="1275" b="0">
+                <a:solidFill>
+                  <a:srgbClr val="B88E23"/>
+                </a:solidFill>
+                <a:latin typeface="Arial"/>
+                <a:ea typeface="Arial"/>
+                <a:cs typeface="Arial"/>
+              </a:defRPr>
+            </a:lvl2pPr>
+            <a:lvl3pPr>
+              <a:defRPr sz="1275" b="0">
+                <a:solidFill>
+                  <a:srgbClr val="B88E23"/>
+                </a:solidFill>
+                <a:latin typeface="Arial"/>
+                <a:ea typeface="Arial"/>
+                <a:cs typeface="Arial"/>
+              </a:defRPr>
+            </a:lvl3pPr>
+            <a:lvl4pPr>
+              <a:defRPr sz="1275" b="0">
+                <a:solidFill>
+                  <a:srgbClr val="B88E23"/>
+                </a:solidFill>
+                <a:latin typeface="Arial"/>
+                <a:ea typeface="Arial"/>
+                <a:cs typeface="Arial"/>
+              </a:defRPr>
+            </a:lvl4pPr>
+            <a:lvl5pPr>
+              <a:defRPr sz="1275" b="0">
+                <a:solidFill>
+                  <a:srgbClr val="B88E23"/>
+                </a:solidFill>
+                <a:latin typeface="Arial"/>
+                <a:ea typeface="Arial"/>
+                <a:cs typeface="Arial"/>
+              </a:defRPr>
+            </a:lvl5pPr>
+            <a:lvl6pPr>
+              <a:defRPr sz="1275" b="0">
+                <a:solidFill>
+                  <a:srgbClr val="B88E23"/>
+                </a:solidFill>
+                <a:latin typeface="Arial"/>
+                <a:ea typeface="Arial"/>
+                <a:cs typeface="Arial"/>
+              </a:defRPr>
+            </a:lvl6pPr>
+            <a:lvl7pPr>
+              <a:defRPr sz="1275" b="0">
+                <a:solidFill>
+                  <a:srgbClr val="B88E23"/>
+                </a:solidFill>
+                <a:latin typeface="Arial"/>
+                <a:ea typeface="Arial"/>
+                <a:cs typeface="Arial"/>
+              </a:defRPr>
+            </a:lvl7pPr>
+            <a:lvl8pPr>
+              <a:defRPr sz="1275" b="0">
+                <a:solidFill>
+                  <a:srgbClr val="B88E23"/>
+                </a:solidFill>
+                <a:latin typeface="Arial"/>
+                <a:ea typeface="Arial"/>
+                <a:cs typeface="Arial"/>
+              </a:defRPr>
+            </a:lvl8pPr>
+            <a:lvl9pPr>
+              <a:defRPr sz="1275" b="0">
+                <a:solidFill>
+                  <a:srgbClr val="B88E23"/>
+                </a:solidFill>
+                <a:latin typeface="Arial"/>
+                <a:ea typeface="Arial"/>
+                <a:cs typeface="Arial"/>
+              </a:defRPr>
+            </a:lvl9pPr>
           </a:lstStyle>
           <a:p xmlns:a="http://schemas.openxmlformats.org/drawingml/2006/main">
             <a:pPr>
@@ -8315,7 +12815,7 @@
           <p:cNvPr id="4" name="">
             <a:extLst xmlns:a="http://schemas.openxmlformats.org/drawingml/2006/main">
               <a:ext uri="{FF2B5EF4-FFF2-40B4-BE49-F238E27FC236}">
-                <a16:creationId xmlns:a16="http://schemas.microsoft.com/office/drawing/2014/main" id="{3A08856C-6EFC-45F3-BB38-04AAE8E72DFC}"/>
+                <a16:creationId xmlns:a16="http://schemas.microsoft.com/office/drawing/2014/main" id="{E68E81DA-909A-44AC-B11A-058579E21DB7}"/>
               </a:ext>
             </a:extLst>
           </p:cNvPr>
@@ -8352,6 +12852,96 @@
                 <a:cs typeface="Arial"/>
               </a:defRPr>
             </a:defPPr>
+            <a:lvl1pPr>
+              <a:defRPr sz="2175" b="0">
+                <a:solidFill>
+                  <a:srgbClr val="063E5F"/>
+                </a:solidFill>
+                <a:latin typeface="Arial"/>
+                <a:ea typeface="Arial"/>
+                <a:cs typeface="Arial"/>
+              </a:defRPr>
+            </a:lvl1pPr>
+            <a:lvl2pPr>
+              <a:defRPr sz="2175" b="0">
+                <a:solidFill>
+                  <a:srgbClr val="063E5F"/>
+                </a:solidFill>
+                <a:latin typeface="Arial"/>
+                <a:ea typeface="Arial"/>
+                <a:cs typeface="Arial"/>
+              </a:defRPr>
+            </a:lvl2pPr>
+            <a:lvl3pPr>
+              <a:defRPr sz="2175" b="0">
+                <a:solidFill>
+                  <a:srgbClr val="063E5F"/>
+                </a:solidFill>
+                <a:latin typeface="Arial"/>
+                <a:ea typeface="Arial"/>
+                <a:cs typeface="Arial"/>
+              </a:defRPr>
+            </a:lvl3pPr>
+            <a:lvl4pPr>
+              <a:defRPr sz="2175" b="0">
+                <a:solidFill>
+                  <a:srgbClr val="063E5F"/>
+                </a:solidFill>
+                <a:latin typeface="Arial"/>
+                <a:ea typeface="Arial"/>
+                <a:cs typeface="Arial"/>
+              </a:defRPr>
+            </a:lvl4pPr>
+            <a:lvl5pPr>
+              <a:defRPr sz="2175" b="0">
+                <a:solidFill>
+                  <a:srgbClr val="063E5F"/>
+                </a:solidFill>
+                <a:latin typeface="Arial"/>
+                <a:ea typeface="Arial"/>
+                <a:cs typeface="Arial"/>
+              </a:defRPr>
+            </a:lvl5pPr>
+            <a:lvl6pPr>
+              <a:defRPr sz="2175" b="0">
+                <a:solidFill>
+                  <a:srgbClr val="063E5F"/>
+                </a:solidFill>
+                <a:latin typeface="Arial"/>
+                <a:ea typeface="Arial"/>
+                <a:cs typeface="Arial"/>
+              </a:defRPr>
+            </a:lvl6pPr>
+            <a:lvl7pPr>
+              <a:defRPr sz="2175" b="0">
+                <a:solidFill>
+                  <a:srgbClr val="063E5F"/>
+                </a:solidFill>
+                <a:latin typeface="Arial"/>
+                <a:ea typeface="Arial"/>
+                <a:cs typeface="Arial"/>
+              </a:defRPr>
+            </a:lvl7pPr>
+            <a:lvl8pPr>
+              <a:defRPr sz="2175" b="0">
+                <a:solidFill>
+                  <a:srgbClr val="063E5F"/>
+                </a:solidFill>
+                <a:latin typeface="Arial"/>
+                <a:ea typeface="Arial"/>
+                <a:cs typeface="Arial"/>
+              </a:defRPr>
+            </a:lvl8pPr>
+            <a:lvl9pPr>
+              <a:defRPr sz="2175" b="0">
+                <a:solidFill>
+                  <a:srgbClr val="063E5F"/>
+                </a:solidFill>
+                <a:latin typeface="Arial"/>
+                <a:ea typeface="Arial"/>
+                <a:cs typeface="Arial"/>
+              </a:defRPr>
+            </a:lvl9pPr>
           </a:lstStyle>
           <a:p xmlns:a="http://schemas.openxmlformats.org/drawingml/2006/main">
             <a:pPr>
@@ -8383,7 +12973,7 @@
           <p:cNvPr id="5" name="">
             <a:extLst xmlns:a="http://schemas.openxmlformats.org/drawingml/2006/main">
               <a:ext uri="{FF2B5EF4-FFF2-40B4-BE49-F238E27FC236}">
-                <a16:creationId xmlns:a16="http://schemas.microsoft.com/office/drawing/2014/main" id="{E9F03A75-A8CA-4444-983A-A509EDFB6CB1}"/>
+                <a16:creationId xmlns:a16="http://schemas.microsoft.com/office/drawing/2014/main" id="{BDF59599-70F5-4F38-A4DE-560DBEC6C187}"/>
               </a:ext>
             </a:extLst>
           </p:cNvPr>
@@ -8420,6 +13010,96 @@
                 <a:cs typeface="Arial"/>
               </a:defRPr>
             </a:defPPr>
+            <a:lvl1pPr>
+              <a:defRPr sz="2175" b="0">
+                <a:solidFill>
+                  <a:srgbClr val="063E5F"/>
+                </a:solidFill>
+                <a:latin typeface="Arial"/>
+                <a:ea typeface="Arial"/>
+                <a:cs typeface="Arial"/>
+              </a:defRPr>
+            </a:lvl1pPr>
+            <a:lvl2pPr>
+              <a:defRPr sz="2175" b="0">
+                <a:solidFill>
+                  <a:srgbClr val="063E5F"/>
+                </a:solidFill>
+                <a:latin typeface="Arial"/>
+                <a:ea typeface="Arial"/>
+                <a:cs typeface="Arial"/>
+              </a:defRPr>
+            </a:lvl2pPr>
+            <a:lvl3pPr>
+              <a:defRPr sz="2175" b="0">
+                <a:solidFill>
+                  <a:srgbClr val="063E5F"/>
+                </a:solidFill>
+                <a:latin typeface="Arial"/>
+                <a:ea typeface="Arial"/>
+                <a:cs typeface="Arial"/>
+              </a:defRPr>
+            </a:lvl3pPr>
+            <a:lvl4pPr>
+              <a:defRPr sz="2175" b="0">
+                <a:solidFill>
+                  <a:srgbClr val="063E5F"/>
+                </a:solidFill>
+                <a:latin typeface="Arial"/>
+                <a:ea typeface="Arial"/>
+                <a:cs typeface="Arial"/>
+              </a:defRPr>
+            </a:lvl4pPr>
+            <a:lvl5pPr>
+              <a:defRPr sz="2175" b="0">
+                <a:solidFill>
+                  <a:srgbClr val="063E5F"/>
+                </a:solidFill>
+                <a:latin typeface="Arial"/>
+                <a:ea typeface="Arial"/>
+                <a:cs typeface="Arial"/>
+              </a:defRPr>
+            </a:lvl5pPr>
+            <a:lvl6pPr>
+              <a:defRPr sz="2175" b="0">
+                <a:solidFill>
+                  <a:srgbClr val="063E5F"/>
+                </a:solidFill>
+                <a:latin typeface="Arial"/>
+                <a:ea typeface="Arial"/>
+                <a:cs typeface="Arial"/>
+              </a:defRPr>
+            </a:lvl6pPr>
+            <a:lvl7pPr>
+              <a:defRPr sz="2175" b="0">
+                <a:solidFill>
+                  <a:srgbClr val="063E5F"/>
+                </a:solidFill>
+                <a:latin typeface="Arial"/>
+                <a:ea typeface="Arial"/>
+                <a:cs typeface="Arial"/>
+              </a:defRPr>
+            </a:lvl7pPr>
+            <a:lvl8pPr>
+              <a:defRPr sz="2175" b="0">
+                <a:solidFill>
+                  <a:srgbClr val="063E5F"/>
+                </a:solidFill>
+                <a:latin typeface="Arial"/>
+                <a:ea typeface="Arial"/>
+                <a:cs typeface="Arial"/>
+              </a:defRPr>
+            </a:lvl8pPr>
+            <a:lvl9pPr>
+              <a:defRPr sz="2175" b="0">
+                <a:solidFill>
+                  <a:srgbClr val="063E5F"/>
+                </a:solidFill>
+                <a:latin typeface="Arial"/>
+                <a:ea typeface="Arial"/>
+                <a:cs typeface="Arial"/>
+              </a:defRPr>
+            </a:lvl9pPr>
           </a:lstStyle>
           <a:p xmlns:a="http://schemas.openxmlformats.org/drawingml/2006/main">
             <a:pPr>
@@ -8451,7 +13131,7 @@
           <p:cNvPr id="6" name="">
             <a:extLst xmlns:a="http://schemas.openxmlformats.org/drawingml/2006/main">
               <a:ext uri="{FF2B5EF4-FFF2-40B4-BE49-F238E27FC236}">
-                <a16:creationId xmlns:a16="http://schemas.microsoft.com/office/drawing/2014/main" id="{EB81D22E-899B-41F1-8D08-86D2BC6BA0ED}"/>
+                <a16:creationId xmlns:a16="http://schemas.microsoft.com/office/drawing/2014/main" id="{D097CCDC-FD7A-4A59-A119-751761429421}"/>
               </a:ext>
             </a:extLst>
           </p:cNvPr>
@@ -8488,6 +13168,96 @@
                 <a:cs typeface="Arial"/>
               </a:defRPr>
             </a:defPPr>
+            <a:lvl1pPr>
+              <a:defRPr sz="2175" b="0">
+                <a:solidFill>
+                  <a:srgbClr val="063E5F"/>
+                </a:solidFill>
+                <a:latin typeface="Arial"/>
+                <a:ea typeface="Arial"/>
+                <a:cs typeface="Arial"/>
+              </a:defRPr>
+            </a:lvl1pPr>
+            <a:lvl2pPr>
+              <a:defRPr sz="2175" b="0">
+                <a:solidFill>
+                  <a:srgbClr val="063E5F"/>
+                </a:solidFill>
+                <a:latin typeface="Arial"/>
+                <a:ea typeface="Arial"/>
+                <a:cs typeface="Arial"/>
+              </a:defRPr>
+            </a:lvl2pPr>
+            <a:lvl3pPr>
+              <a:defRPr sz="2175" b="0">
+                <a:solidFill>
+                  <a:srgbClr val="063E5F"/>
+                </a:solidFill>
+                <a:latin typeface="Arial"/>
+                <a:ea typeface="Arial"/>
+                <a:cs typeface="Arial"/>
+              </a:defRPr>
+            </a:lvl3pPr>
+            <a:lvl4pPr>
+              <a:defRPr sz="2175" b="0">
+                <a:solidFill>
+                  <a:srgbClr val="063E5F"/>
+                </a:solidFill>
+                <a:latin typeface="Arial"/>
+                <a:ea typeface="Arial"/>
+                <a:cs typeface="Arial"/>
+              </a:defRPr>
+            </a:lvl4pPr>
+            <a:lvl5pPr>
+              <a:defRPr sz="2175" b="0">
+                <a:solidFill>
+                  <a:srgbClr val="063E5F"/>
+                </a:solidFill>
+                <a:latin typeface="Arial"/>
+                <a:ea typeface="Arial"/>
+                <a:cs typeface="Arial"/>
+              </a:defRPr>
+            </a:lvl5pPr>
+            <a:lvl6pPr>
+              <a:defRPr sz="2175" b="0">
+                <a:solidFill>
+                  <a:srgbClr val="063E5F"/>
+                </a:solidFill>
+                <a:latin typeface="Arial"/>
+                <a:ea typeface="Arial"/>
+                <a:cs typeface="Arial"/>
+              </a:defRPr>
+            </a:lvl6pPr>
+            <a:lvl7pPr>
+              <a:defRPr sz="2175" b="0">
+                <a:solidFill>
+                  <a:srgbClr val="063E5F"/>
+                </a:solidFill>
+                <a:latin typeface="Arial"/>
+                <a:ea typeface="Arial"/>
+                <a:cs typeface="Arial"/>
+              </a:defRPr>
+            </a:lvl7pPr>
+            <a:lvl8pPr>
+              <a:defRPr sz="2175" b="0">
+                <a:solidFill>
+                  <a:srgbClr val="063E5F"/>
+                </a:solidFill>
+                <a:latin typeface="Arial"/>
+                <a:ea typeface="Arial"/>
+                <a:cs typeface="Arial"/>
+              </a:defRPr>
+            </a:lvl8pPr>
+            <a:lvl9pPr>
+              <a:defRPr sz="2175" b="0">
+                <a:solidFill>
+                  <a:srgbClr val="063E5F"/>
+                </a:solidFill>
+                <a:latin typeface="Arial"/>
+                <a:ea typeface="Arial"/>
+                <a:cs typeface="Arial"/>
+              </a:defRPr>
+            </a:lvl9pPr>
           </a:lstStyle>
           <a:p xmlns:a="http://schemas.openxmlformats.org/drawingml/2006/main">
             <a:pPr>
@@ -8519,7 +13289,7 @@
           <p:cNvPr id="7" name="">
             <a:extLst xmlns:a="http://schemas.openxmlformats.org/drawingml/2006/main">
               <a:ext uri="{FF2B5EF4-FFF2-40B4-BE49-F238E27FC236}">
-                <a16:creationId xmlns:a16="http://schemas.microsoft.com/office/drawing/2014/main" id="{CFD1258E-FA80-4F08-AD4D-BAC9D58BAFAB}"/>
+                <a16:creationId xmlns:a16="http://schemas.microsoft.com/office/drawing/2014/main" id="{7F6CC68C-003F-456B-81E2-6ACFE89EAF09}"/>
               </a:ext>
             </a:extLst>
           </p:cNvPr>
@@ -8556,6 +13326,96 @@
                 <a:cs typeface="Arial"/>
               </a:defRPr>
             </a:defPPr>
+            <a:lvl1pPr>
+              <a:defRPr sz="2175" b="0">
+                <a:solidFill>
+                  <a:srgbClr val="063E5F"/>
+                </a:solidFill>
+                <a:latin typeface="Arial"/>
+                <a:ea typeface="Arial"/>
+                <a:cs typeface="Arial"/>
+              </a:defRPr>
+            </a:lvl1pPr>
+            <a:lvl2pPr>
+              <a:defRPr sz="2175" b="0">
+                <a:solidFill>
+                  <a:srgbClr val="063E5F"/>
+                </a:solidFill>
+                <a:latin typeface="Arial"/>
+                <a:ea typeface="Arial"/>
+                <a:cs typeface="Arial"/>
+              </a:defRPr>
+            </a:lvl2pPr>
+            <a:lvl3pPr>
+              <a:defRPr sz="2175" b="0">
+                <a:solidFill>
+                  <a:srgbClr val="063E5F"/>
+                </a:solidFill>
+                <a:latin typeface="Arial"/>
+                <a:ea typeface="Arial"/>
+                <a:cs typeface="Arial"/>
+              </a:defRPr>
+            </a:lvl3pPr>
+            <a:lvl4pPr>
+              <a:defRPr sz="2175" b="0">
+                <a:solidFill>
+                  <a:srgbClr val="063E5F"/>
+                </a:solidFill>
+                <a:latin typeface="Arial"/>
+                <a:ea typeface="Arial"/>
+                <a:cs typeface="Arial"/>
+              </a:defRPr>
+            </a:lvl4pPr>
+            <a:lvl5pPr>
+              <a:defRPr sz="2175" b="0">
+                <a:solidFill>
+                  <a:srgbClr val="063E5F"/>
+                </a:solidFill>
+                <a:latin typeface="Arial"/>
+                <a:ea typeface="Arial"/>
+                <a:cs typeface="Arial"/>
+              </a:defRPr>
+            </a:lvl5pPr>
+            <a:lvl6pPr>
+              <a:defRPr sz="2175" b="0">
+                <a:solidFill>
+                  <a:srgbClr val="063E5F"/>
+                </a:solidFill>
+                <a:latin typeface="Arial"/>
+                <a:ea typeface="Arial"/>
+                <a:cs typeface="Arial"/>
+              </a:defRPr>
+            </a:lvl6pPr>
+            <a:lvl7pPr>
+              <a:defRPr sz="2175" b="0">
+                <a:solidFill>
+                  <a:srgbClr val="063E5F"/>
+                </a:solidFill>
+                <a:latin typeface="Arial"/>
+                <a:ea typeface="Arial"/>
+                <a:cs typeface="Arial"/>
+              </a:defRPr>
+            </a:lvl7pPr>
+            <a:lvl8pPr>
+              <a:defRPr sz="2175" b="0">
+                <a:solidFill>
+                  <a:srgbClr val="063E5F"/>
+                </a:solidFill>
+                <a:latin typeface="Arial"/>
+                <a:ea typeface="Arial"/>
+                <a:cs typeface="Arial"/>
+              </a:defRPr>
+            </a:lvl8pPr>
+            <a:lvl9pPr>
+              <a:defRPr sz="2175" b="0">
+                <a:solidFill>
+                  <a:srgbClr val="063E5F"/>
+                </a:solidFill>
+                <a:latin typeface="Arial"/>
+                <a:ea typeface="Arial"/>
+                <a:cs typeface="Arial"/>
+              </a:defRPr>
+            </a:lvl9pPr>
           </a:lstStyle>
           <a:p xmlns:a="http://schemas.openxmlformats.org/drawingml/2006/main">
             <a:pPr>
@@ -8587,7 +13447,7 @@
           <p:cNvPr id="8" name="">
             <a:extLst xmlns:a="http://schemas.openxmlformats.org/drawingml/2006/main">
               <a:ext uri="{FF2B5EF4-FFF2-40B4-BE49-F238E27FC236}">
-                <a16:creationId xmlns:a16="http://schemas.microsoft.com/office/drawing/2014/main" id="{BA84C570-9B97-45C9-9AAD-0A34403B9CFB}"/>
+                <a16:creationId xmlns:a16="http://schemas.microsoft.com/office/drawing/2014/main" id="{C5FBEBA7-7DA4-4470-A846-EE782E363EFA}"/>
               </a:ext>
             </a:extLst>
           </p:cNvPr>
@@ -8624,6 +13484,96 @@
                 <a:cs typeface="Arial"/>
               </a:defRPr>
             </a:defPPr>
+            <a:lvl1pPr>
+              <a:defRPr sz="2175" b="0">
+                <a:solidFill>
+                  <a:srgbClr val="063E5F"/>
+                </a:solidFill>
+                <a:latin typeface="Arial"/>
+                <a:ea typeface="Arial"/>
+                <a:cs typeface="Arial"/>
+              </a:defRPr>
+            </a:lvl1pPr>
+            <a:lvl2pPr>
+              <a:defRPr sz="2175" b="0">
+                <a:solidFill>
+                  <a:srgbClr val="063E5F"/>
+                </a:solidFill>
+                <a:latin typeface="Arial"/>
+                <a:ea typeface="Arial"/>
+                <a:cs typeface="Arial"/>
+              </a:defRPr>
+            </a:lvl2pPr>
+            <a:lvl3pPr>
+              <a:defRPr sz="2175" b="0">
+                <a:solidFill>
+                  <a:srgbClr val="063E5F"/>
+                </a:solidFill>
+                <a:latin typeface="Arial"/>
+                <a:ea typeface="Arial"/>
+                <a:cs typeface="Arial"/>
+              </a:defRPr>
+            </a:lvl3pPr>
+            <a:lvl4pPr>
+              <a:defRPr sz="2175" b="0">
+                <a:solidFill>
+                  <a:srgbClr val="063E5F"/>
+                </a:solidFill>
+                <a:latin typeface="Arial"/>
+                <a:ea typeface="Arial"/>
+                <a:cs typeface="Arial"/>
+              </a:defRPr>
+            </a:lvl4pPr>
+            <a:lvl5pPr>
+              <a:defRPr sz="2175" b="0">
+                <a:solidFill>
+                  <a:srgbClr val="063E5F"/>
+                </a:solidFill>
+                <a:latin typeface="Arial"/>
+                <a:ea typeface="Arial"/>
+                <a:cs typeface="Arial"/>
+              </a:defRPr>
+            </a:lvl5pPr>
+            <a:lvl6pPr>
+              <a:defRPr sz="2175" b="0">
+                <a:solidFill>
+                  <a:srgbClr val="063E5F"/>
+                </a:solidFill>
+                <a:latin typeface="Arial"/>
+                <a:ea typeface="Arial"/>
+                <a:cs typeface="Arial"/>
+              </a:defRPr>
+            </a:lvl6pPr>
+            <a:lvl7pPr>
+              <a:defRPr sz="2175" b="0">
+                <a:solidFill>
+                  <a:srgbClr val="063E5F"/>
+                </a:solidFill>
+                <a:latin typeface="Arial"/>
+                <a:ea typeface="Arial"/>
+                <a:cs typeface="Arial"/>
+              </a:defRPr>
+            </a:lvl7pPr>
+            <a:lvl8pPr>
+              <a:defRPr sz="2175" b="0">
+                <a:solidFill>
+                  <a:srgbClr val="063E5F"/>
+                </a:solidFill>
+                <a:latin typeface="Arial"/>
+                <a:ea typeface="Arial"/>
+                <a:cs typeface="Arial"/>
+              </a:defRPr>
+            </a:lvl8pPr>
+            <a:lvl9pPr>
+              <a:defRPr sz="2175" b="0">
+                <a:solidFill>
+                  <a:srgbClr val="063E5F"/>
+                </a:solidFill>
+                <a:latin typeface="Arial"/>
+                <a:ea typeface="Arial"/>
+                <a:cs typeface="Arial"/>
+              </a:defRPr>
+            </a:lvl9pPr>
           </a:lstStyle>
           <a:p xmlns:a="http://schemas.openxmlformats.org/drawingml/2006/main">
             <a:pPr>
@@ -8653,7 +13603,7 @@
     </p:spTree>
     <p:extLst>
       <p:ext uri="{BB962C8B-B14F-4D97-AF65-F5344CB8AC3E}">
-        <p14:creationId xmlns:p14="http://schemas.microsoft.com/office/powerpoint/2010/main" val="706766875"/>
+        <p14:creationId xmlns:p14="http://schemas.microsoft.com/office/powerpoint/2010/main" val="795787239"/>
       </p:ext>
     </p:extLst>
   </p:cSld>
@@ -8684,7 +13634,7 @@
           <p:cNvPr id="10" name="">
             <a:extLst xmlns:a="http://schemas.openxmlformats.org/drawingml/2006/main">
               <a:ext uri="{FF2B5EF4-FFF2-40B4-BE49-F238E27FC236}">
-                <a16:creationId xmlns:a16="http://schemas.microsoft.com/office/drawing/2014/main" id="{A4AAF3E9-4CAB-4DD1-B1AE-95F9EB214055}"/>
+                <a16:creationId xmlns:a16="http://schemas.microsoft.com/office/drawing/2014/main" id="{F562F17F-0FE5-4BC3-98BF-1045B917D0C2}"/>
               </a:ext>
             </a:extLst>
           </p:cNvPr>
@@ -8721,6 +13671,96 @@
                 <a:cs typeface="Arial"/>
               </a:defRPr>
             </a:defPPr>
+            <a:lvl1pPr>
+              <a:defRPr sz="3300" b="1">
+                <a:solidFill>
+                  <a:srgbClr val="063E5F"/>
+                </a:solidFill>
+                <a:latin typeface="Arial"/>
+                <a:ea typeface="Arial"/>
+                <a:cs typeface="Arial"/>
+              </a:defRPr>
+            </a:lvl1pPr>
+            <a:lvl2pPr>
+              <a:defRPr sz="3300" b="1">
+                <a:solidFill>
+                  <a:srgbClr val="063E5F"/>
+                </a:solidFill>
+                <a:latin typeface="Arial"/>
+                <a:ea typeface="Arial"/>
+                <a:cs typeface="Arial"/>
+              </a:defRPr>
+            </a:lvl2pPr>
+            <a:lvl3pPr>
+              <a:defRPr sz="3300" b="1">
+                <a:solidFill>
+                  <a:srgbClr val="063E5F"/>
+                </a:solidFill>
+                <a:latin typeface="Arial"/>
+                <a:ea typeface="Arial"/>
+                <a:cs typeface="Arial"/>
+              </a:defRPr>
+            </a:lvl3pPr>
+            <a:lvl4pPr>
+              <a:defRPr sz="3300" b="1">
+                <a:solidFill>
+                  <a:srgbClr val="063E5F"/>
+                </a:solidFill>
+                <a:latin typeface="Arial"/>
+                <a:ea typeface="Arial"/>
+                <a:cs typeface="Arial"/>
+              </a:defRPr>
+            </a:lvl4pPr>
+            <a:lvl5pPr>
+              <a:defRPr sz="3300" b="1">
+                <a:solidFill>
+                  <a:srgbClr val="063E5F"/>
+                </a:solidFill>
+                <a:latin typeface="Arial"/>
+                <a:ea typeface="Arial"/>
+                <a:cs typeface="Arial"/>
+              </a:defRPr>
+            </a:lvl5pPr>
+            <a:lvl6pPr>
+              <a:defRPr sz="3300" b="1">
+                <a:solidFill>
+                  <a:srgbClr val="063E5F"/>
+                </a:solidFill>
+                <a:latin typeface="Arial"/>
+                <a:ea typeface="Arial"/>
+                <a:cs typeface="Arial"/>
+              </a:defRPr>
+            </a:lvl6pPr>
+            <a:lvl7pPr>
+              <a:defRPr sz="3300" b="1">
+                <a:solidFill>
+                  <a:srgbClr val="063E5F"/>
+                </a:solidFill>
+                <a:latin typeface="Arial"/>
+                <a:ea typeface="Arial"/>
+                <a:cs typeface="Arial"/>
+              </a:defRPr>
+            </a:lvl7pPr>
+            <a:lvl8pPr>
+              <a:defRPr sz="3300" b="1">
+                <a:solidFill>
+                  <a:srgbClr val="063E5F"/>
+                </a:solidFill>
+                <a:latin typeface="Arial"/>
+                <a:ea typeface="Arial"/>
+                <a:cs typeface="Arial"/>
+              </a:defRPr>
+            </a:lvl8pPr>
+            <a:lvl9pPr>
+              <a:defRPr sz="3300" b="1">
+                <a:solidFill>
+                  <a:srgbClr val="063E5F"/>
+                </a:solidFill>
+                <a:latin typeface="Arial"/>
+                <a:ea typeface="Arial"/>
+                <a:cs typeface="Arial"/>
+              </a:defRPr>
+            </a:lvl9pPr>
           </a:lstStyle>
           <a:p xmlns:a="http://schemas.openxmlformats.org/drawingml/2006/main">
             <a:pPr>
@@ -8752,7 +13792,7 @@
           <p:cNvPr id="2" name="">
             <a:extLst xmlns:a="http://schemas.openxmlformats.org/drawingml/2006/main">
               <a:ext uri="{FF2B5EF4-FFF2-40B4-BE49-F238E27FC236}">
-                <a16:creationId xmlns:a16="http://schemas.microsoft.com/office/drawing/2014/main" id="{7B8274C5-1E5B-4B23-BE2B-4B7DE39AE402}"/>
+                <a16:creationId xmlns:a16="http://schemas.microsoft.com/office/drawing/2014/main" id="{89F4D7DB-82B8-4E0D-9D9D-1F7EBC5BEF0B}"/>
               </a:ext>
             </a:extLst>
           </p:cNvPr>
@@ -8789,6 +13829,96 @@
                 <a:cs typeface="Arial"/>
               </a:defRPr>
             </a:defPPr>
+            <a:lvl1pPr>
+              <a:defRPr sz="1200" b="0">
+                <a:solidFill>
+                  <a:srgbClr val="536272"/>
+                </a:solidFill>
+                <a:latin typeface="Arial"/>
+                <a:ea typeface="Arial"/>
+                <a:cs typeface="Arial"/>
+              </a:defRPr>
+            </a:lvl1pPr>
+            <a:lvl2pPr>
+              <a:defRPr sz="1200" b="0">
+                <a:solidFill>
+                  <a:srgbClr val="536272"/>
+                </a:solidFill>
+                <a:latin typeface="Arial"/>
+                <a:ea typeface="Arial"/>
+                <a:cs typeface="Arial"/>
+              </a:defRPr>
+            </a:lvl2pPr>
+            <a:lvl3pPr>
+              <a:defRPr sz="1200" b="0">
+                <a:solidFill>
+                  <a:srgbClr val="536272"/>
+                </a:solidFill>
+                <a:latin typeface="Arial"/>
+                <a:ea typeface="Arial"/>
+                <a:cs typeface="Arial"/>
+              </a:defRPr>
+            </a:lvl3pPr>
+            <a:lvl4pPr>
+              <a:defRPr sz="1200" b="0">
+                <a:solidFill>
+                  <a:srgbClr val="536272"/>
+                </a:solidFill>
+                <a:latin typeface="Arial"/>
+                <a:ea typeface="Arial"/>
+                <a:cs typeface="Arial"/>
+              </a:defRPr>
+            </a:lvl4pPr>
+            <a:lvl5pPr>
+              <a:defRPr sz="1200" b="0">
+                <a:solidFill>
+                  <a:srgbClr val="536272"/>
+                </a:solidFill>
+                <a:latin typeface="Arial"/>
+                <a:ea typeface="Arial"/>
+                <a:cs typeface="Arial"/>
+              </a:defRPr>
+            </a:lvl5pPr>
+            <a:lvl6pPr>
+              <a:defRPr sz="1200" b="0">
+                <a:solidFill>
+                  <a:srgbClr val="536272"/>
+                </a:solidFill>
+                <a:latin typeface="Arial"/>
+                <a:ea typeface="Arial"/>
+                <a:cs typeface="Arial"/>
+              </a:defRPr>
+            </a:lvl6pPr>
+            <a:lvl7pPr>
+              <a:defRPr sz="1200" b="0">
+                <a:solidFill>
+                  <a:srgbClr val="536272"/>
+                </a:solidFill>
+                <a:latin typeface="Arial"/>
+                <a:ea typeface="Arial"/>
+                <a:cs typeface="Arial"/>
+              </a:defRPr>
+            </a:lvl7pPr>
+            <a:lvl8pPr>
+              <a:defRPr sz="1200" b="0">
+                <a:solidFill>
+                  <a:srgbClr val="536272"/>
+                </a:solidFill>
+                <a:latin typeface="Arial"/>
+                <a:ea typeface="Arial"/>
+                <a:cs typeface="Arial"/>
+              </a:defRPr>
+            </a:lvl8pPr>
+            <a:lvl9pPr>
+              <a:defRPr sz="1200" b="0">
+                <a:solidFill>
+                  <a:srgbClr val="536272"/>
+                </a:solidFill>
+                <a:latin typeface="Arial"/>
+                <a:ea typeface="Arial"/>
+                <a:cs typeface="Arial"/>
+              </a:defRPr>
+            </a:lvl9pPr>
           </a:lstStyle>
           <a:p xmlns:a="http://schemas.openxmlformats.org/drawingml/2006/main">
             <a:pPr>
@@ -8820,7 +13950,7 @@
           <p:cNvPr id="3" name="">
             <a:extLst xmlns:a="http://schemas.openxmlformats.org/drawingml/2006/main">
               <a:ext uri="{FF2B5EF4-FFF2-40B4-BE49-F238E27FC236}">
-                <a16:creationId xmlns:a16="http://schemas.microsoft.com/office/drawing/2014/main" id="{12A108E2-354C-4C6D-81C7-CF891C0A0A0D}"/>
+                <a16:creationId xmlns:a16="http://schemas.microsoft.com/office/drawing/2014/main" id="{66537775-A7AE-479B-9BB3-3E73860924B1}"/>
               </a:ext>
             </a:extLst>
           </p:cNvPr>
@@ -8857,6 +13987,96 @@
                 <a:cs typeface="Arial"/>
               </a:defRPr>
             </a:defPPr>
+            <a:lvl1pPr>
+              <a:defRPr sz="1275" b="0">
+                <a:solidFill>
+                  <a:srgbClr val="B88E23"/>
+                </a:solidFill>
+                <a:latin typeface="Arial"/>
+                <a:ea typeface="Arial"/>
+                <a:cs typeface="Arial"/>
+              </a:defRPr>
+            </a:lvl1pPr>
+            <a:lvl2pPr>
+              <a:defRPr sz="1275" b="0">
+                <a:solidFill>
+                  <a:srgbClr val="B88E23"/>
+                </a:solidFill>
+                <a:latin typeface="Arial"/>
+                <a:ea typeface="Arial"/>
+                <a:cs typeface="Arial"/>
+              </a:defRPr>
+            </a:lvl2pPr>
+            <a:lvl3pPr>
+              <a:defRPr sz="1275" b="0">
+                <a:solidFill>
+                  <a:srgbClr val="B88E23"/>
+                </a:solidFill>
+                <a:latin typeface="Arial"/>
+                <a:ea typeface="Arial"/>
+                <a:cs typeface="Arial"/>
+              </a:defRPr>
+            </a:lvl3pPr>
+            <a:lvl4pPr>
+              <a:defRPr sz="1275" b="0">
+                <a:solidFill>
+                  <a:srgbClr val="B88E23"/>
+                </a:solidFill>
+                <a:latin typeface="Arial"/>
+                <a:ea typeface="Arial"/>
+                <a:cs typeface="Arial"/>
+              </a:defRPr>
+            </a:lvl4pPr>
+            <a:lvl5pPr>
+              <a:defRPr sz="1275" b="0">
+                <a:solidFill>
+                  <a:srgbClr val="B88E23"/>
+                </a:solidFill>
+                <a:latin typeface="Arial"/>
+                <a:ea typeface="Arial"/>
+                <a:cs typeface="Arial"/>
+              </a:defRPr>
+            </a:lvl5pPr>
+            <a:lvl6pPr>
+              <a:defRPr sz="1275" b="0">
+                <a:solidFill>
+                  <a:srgbClr val="B88E23"/>
+                </a:solidFill>
+                <a:latin typeface="Arial"/>
+                <a:ea typeface="Arial"/>
+                <a:cs typeface="Arial"/>
+              </a:defRPr>
+            </a:lvl6pPr>
+            <a:lvl7pPr>
+              <a:defRPr sz="1275" b="0">
+                <a:solidFill>
+                  <a:srgbClr val="B88E23"/>
+                </a:solidFill>
+                <a:latin typeface="Arial"/>
+                <a:ea typeface="Arial"/>
+                <a:cs typeface="Arial"/>
+              </a:defRPr>
+            </a:lvl7pPr>
+            <a:lvl8pPr>
+              <a:defRPr sz="1275" b="0">
+                <a:solidFill>
+                  <a:srgbClr val="B88E23"/>
+                </a:solidFill>
+                <a:latin typeface="Arial"/>
+                <a:ea typeface="Arial"/>
+                <a:cs typeface="Arial"/>
+              </a:defRPr>
+            </a:lvl8pPr>
+            <a:lvl9pPr>
+              <a:defRPr sz="1275" b="0">
+                <a:solidFill>
+                  <a:srgbClr val="B88E23"/>
+                </a:solidFill>
+                <a:latin typeface="Arial"/>
+                <a:ea typeface="Arial"/>
+                <a:cs typeface="Arial"/>
+              </a:defRPr>
+            </a:lvl9pPr>
           </a:lstStyle>
           <a:p xmlns:a="http://schemas.openxmlformats.org/drawingml/2006/main">
             <a:pPr>
@@ -8888,7 +14108,7 @@
           <p:cNvPr id="4" name="">
             <a:extLst xmlns:a="http://schemas.openxmlformats.org/drawingml/2006/main">
               <a:ext uri="{FF2B5EF4-FFF2-40B4-BE49-F238E27FC236}">
-                <a16:creationId xmlns:a16="http://schemas.microsoft.com/office/drawing/2014/main" id="{47407B40-4B88-4E9B-9AC2-9A666FF3022F}"/>
+                <a16:creationId xmlns:a16="http://schemas.microsoft.com/office/drawing/2014/main" id="{70F2109A-CCAC-4A85-A454-2F12D28332B4}"/>
               </a:ext>
             </a:extLst>
           </p:cNvPr>
@@ -8925,6 +14145,96 @@
                 <a:cs typeface="Arial"/>
               </a:defRPr>
             </a:defPPr>
+            <a:lvl1pPr>
+              <a:defRPr sz="2025" b="0">
+                <a:solidFill>
+                  <a:srgbClr val="063E5F"/>
+                </a:solidFill>
+                <a:latin typeface="Arial"/>
+                <a:ea typeface="Arial"/>
+                <a:cs typeface="Arial"/>
+              </a:defRPr>
+            </a:lvl1pPr>
+            <a:lvl2pPr>
+              <a:defRPr sz="2025" b="0">
+                <a:solidFill>
+                  <a:srgbClr val="063E5F"/>
+                </a:solidFill>
+                <a:latin typeface="Arial"/>
+                <a:ea typeface="Arial"/>
+                <a:cs typeface="Arial"/>
+              </a:defRPr>
+            </a:lvl2pPr>
+            <a:lvl3pPr>
+              <a:defRPr sz="2025" b="0">
+                <a:solidFill>
+                  <a:srgbClr val="063E5F"/>
+                </a:solidFill>
+                <a:latin typeface="Arial"/>
+                <a:ea typeface="Arial"/>
+                <a:cs typeface="Arial"/>
+              </a:defRPr>
+            </a:lvl3pPr>
+            <a:lvl4pPr>
+              <a:defRPr sz="2025" b="0">
+                <a:solidFill>
+                  <a:srgbClr val="063E5F"/>
+                </a:solidFill>
+                <a:latin typeface="Arial"/>
+                <a:ea typeface="Arial"/>
+                <a:cs typeface="Arial"/>
+              </a:defRPr>
+            </a:lvl4pPr>
+            <a:lvl5pPr>
+              <a:defRPr sz="2025" b="0">
+                <a:solidFill>
+                  <a:srgbClr val="063E5F"/>
+                </a:solidFill>
+                <a:latin typeface="Arial"/>
+                <a:ea typeface="Arial"/>
+                <a:cs typeface="Arial"/>
+              </a:defRPr>
+            </a:lvl5pPr>
+            <a:lvl6pPr>
+              <a:defRPr sz="2025" b="0">
+                <a:solidFill>
+                  <a:srgbClr val="063E5F"/>
+                </a:solidFill>
+                <a:latin typeface="Arial"/>
+                <a:ea typeface="Arial"/>
+                <a:cs typeface="Arial"/>
+              </a:defRPr>
+            </a:lvl6pPr>
+            <a:lvl7pPr>
+              <a:defRPr sz="2025" b="0">
+                <a:solidFill>
+                  <a:srgbClr val="063E5F"/>
+                </a:solidFill>
+                <a:latin typeface="Arial"/>
+                <a:ea typeface="Arial"/>
+                <a:cs typeface="Arial"/>
+              </a:defRPr>
+            </a:lvl7pPr>
+            <a:lvl8pPr>
+              <a:defRPr sz="2025" b="0">
+                <a:solidFill>
+                  <a:srgbClr val="063E5F"/>
+                </a:solidFill>
+                <a:latin typeface="Arial"/>
+                <a:ea typeface="Arial"/>
+                <a:cs typeface="Arial"/>
+              </a:defRPr>
+            </a:lvl8pPr>
+            <a:lvl9pPr>
+              <a:defRPr sz="2025" b="0">
+                <a:solidFill>
+                  <a:srgbClr val="063E5F"/>
+                </a:solidFill>
+                <a:latin typeface="Arial"/>
+                <a:ea typeface="Arial"/>
+                <a:cs typeface="Arial"/>
+              </a:defRPr>
+            </a:lvl9pPr>
           </a:lstStyle>
           <a:p xmlns:a="http://schemas.openxmlformats.org/drawingml/2006/main">
             <a:pPr>
@@ -8956,7 +14266,7 @@
           <p:cNvPr id="5" name="">
             <a:extLst xmlns:a="http://schemas.openxmlformats.org/drawingml/2006/main">
               <a:ext uri="{FF2B5EF4-FFF2-40B4-BE49-F238E27FC236}">
-                <a16:creationId xmlns:a16="http://schemas.microsoft.com/office/drawing/2014/main" id="{CD0CF078-72D5-487E-8118-406D3DCD6D67}"/>
+                <a16:creationId xmlns:a16="http://schemas.microsoft.com/office/drawing/2014/main" id="{A2C1D918-FB17-47A7-8D5D-2FC530440A3B}"/>
               </a:ext>
             </a:extLst>
           </p:cNvPr>
@@ -8993,6 +14303,96 @@
                 <a:cs typeface="Arial"/>
               </a:defRPr>
             </a:defPPr>
+            <a:lvl1pPr>
+              <a:defRPr sz="2025" b="0">
+                <a:solidFill>
+                  <a:srgbClr val="063E5F"/>
+                </a:solidFill>
+                <a:latin typeface="Arial"/>
+                <a:ea typeface="Arial"/>
+                <a:cs typeface="Arial"/>
+              </a:defRPr>
+            </a:lvl1pPr>
+            <a:lvl2pPr>
+              <a:defRPr sz="2025" b="0">
+                <a:solidFill>
+                  <a:srgbClr val="063E5F"/>
+                </a:solidFill>
+                <a:latin typeface="Arial"/>
+                <a:ea typeface="Arial"/>
+                <a:cs typeface="Arial"/>
+              </a:defRPr>
+            </a:lvl2pPr>
+            <a:lvl3pPr>
+              <a:defRPr sz="2025" b="0">
+                <a:solidFill>
+                  <a:srgbClr val="063E5F"/>
+                </a:solidFill>
+                <a:latin typeface="Arial"/>
+                <a:ea typeface="Arial"/>
+                <a:cs typeface="Arial"/>
+              </a:defRPr>
+            </a:lvl3pPr>
+            <a:lvl4pPr>
+              <a:defRPr sz="2025" b="0">
+                <a:solidFill>
+                  <a:srgbClr val="063E5F"/>
+                </a:solidFill>
+                <a:latin typeface="Arial"/>
+                <a:ea typeface="Arial"/>
+                <a:cs typeface="Arial"/>
+              </a:defRPr>
+            </a:lvl4pPr>
+            <a:lvl5pPr>
+              <a:defRPr sz="2025" b="0">
+                <a:solidFill>
+                  <a:srgbClr val="063E5F"/>
+                </a:solidFill>
+                <a:latin typeface="Arial"/>
+                <a:ea typeface="Arial"/>
+                <a:cs typeface="Arial"/>
+              </a:defRPr>
+            </a:lvl5pPr>
+            <a:lvl6pPr>
+              <a:defRPr sz="2025" b="0">
+                <a:solidFill>
+                  <a:srgbClr val="063E5F"/>
+                </a:solidFill>
+                <a:latin typeface="Arial"/>
+                <a:ea typeface="Arial"/>
+                <a:cs typeface="Arial"/>
+              </a:defRPr>
+            </a:lvl6pPr>
+            <a:lvl7pPr>
+              <a:defRPr sz="2025" b="0">
+                <a:solidFill>
+                  <a:srgbClr val="063E5F"/>
+                </a:solidFill>
+                <a:latin typeface="Arial"/>
+                <a:ea typeface="Arial"/>
+                <a:cs typeface="Arial"/>
+              </a:defRPr>
+            </a:lvl7pPr>
+            <a:lvl8pPr>
+              <a:defRPr sz="2025" b="0">
+                <a:solidFill>
+                  <a:srgbClr val="063E5F"/>
+                </a:solidFill>
+                <a:latin typeface="Arial"/>
+                <a:ea typeface="Arial"/>
+                <a:cs typeface="Arial"/>
+              </a:defRPr>
+            </a:lvl8pPr>
+            <a:lvl9pPr>
+              <a:defRPr sz="2025" b="0">
+                <a:solidFill>
+                  <a:srgbClr val="063E5F"/>
+                </a:solidFill>
+                <a:latin typeface="Arial"/>
+                <a:ea typeface="Arial"/>
+                <a:cs typeface="Arial"/>
+              </a:defRPr>
+            </a:lvl9pPr>
           </a:lstStyle>
           <a:p xmlns:a="http://schemas.openxmlformats.org/drawingml/2006/main">
             <a:pPr>
@@ -9024,7 +14424,7 @@
           <p:cNvPr id="6" name="">
             <a:extLst xmlns:a="http://schemas.openxmlformats.org/drawingml/2006/main">
               <a:ext uri="{FF2B5EF4-FFF2-40B4-BE49-F238E27FC236}">
-                <a16:creationId xmlns:a16="http://schemas.microsoft.com/office/drawing/2014/main" id="{2F036613-FAF0-4E6C-9770-C2960E4DC02E}"/>
+                <a16:creationId xmlns:a16="http://schemas.microsoft.com/office/drawing/2014/main" id="{2BBE304E-0DDF-4FB7-B175-D68FC35D83CF}"/>
               </a:ext>
             </a:extLst>
           </p:cNvPr>
@@ -9061,6 +14461,96 @@
                 <a:cs typeface="Arial"/>
               </a:defRPr>
             </a:defPPr>
+            <a:lvl1pPr>
+              <a:defRPr sz="2025" b="0">
+                <a:solidFill>
+                  <a:srgbClr val="063E5F"/>
+                </a:solidFill>
+                <a:latin typeface="Arial"/>
+                <a:ea typeface="Arial"/>
+                <a:cs typeface="Arial"/>
+              </a:defRPr>
+            </a:lvl1pPr>
+            <a:lvl2pPr>
+              <a:defRPr sz="2025" b="0">
+                <a:solidFill>
+                  <a:srgbClr val="063E5F"/>
+                </a:solidFill>
+                <a:latin typeface="Arial"/>
+                <a:ea typeface="Arial"/>
+                <a:cs typeface="Arial"/>
+              </a:defRPr>
+            </a:lvl2pPr>
+            <a:lvl3pPr>
+              <a:defRPr sz="2025" b="0">
+                <a:solidFill>
+                  <a:srgbClr val="063E5F"/>
+                </a:solidFill>
+                <a:latin typeface="Arial"/>
+                <a:ea typeface="Arial"/>
+                <a:cs typeface="Arial"/>
+              </a:defRPr>
+            </a:lvl3pPr>
+            <a:lvl4pPr>
+              <a:defRPr sz="2025" b="0">
+                <a:solidFill>
+                  <a:srgbClr val="063E5F"/>
+                </a:solidFill>
+                <a:latin typeface="Arial"/>
+                <a:ea typeface="Arial"/>
+                <a:cs typeface="Arial"/>
+              </a:defRPr>
+            </a:lvl4pPr>
+            <a:lvl5pPr>
+              <a:defRPr sz="2025" b="0">
+                <a:solidFill>
+                  <a:srgbClr val="063E5F"/>
+                </a:solidFill>
+                <a:latin typeface="Arial"/>
+                <a:ea typeface="Arial"/>
+                <a:cs typeface="Arial"/>
+              </a:defRPr>
+            </a:lvl5pPr>
+            <a:lvl6pPr>
+              <a:defRPr sz="2025" b="0">
+                <a:solidFill>
+                  <a:srgbClr val="063E5F"/>
+                </a:solidFill>
+                <a:latin typeface="Arial"/>
+                <a:ea typeface="Arial"/>
+                <a:cs typeface="Arial"/>
+              </a:defRPr>
+            </a:lvl6pPr>
+            <a:lvl7pPr>
+              <a:defRPr sz="2025" b="0">
+                <a:solidFill>
+                  <a:srgbClr val="063E5F"/>
+                </a:solidFill>
+                <a:latin typeface="Arial"/>
+                <a:ea typeface="Arial"/>
+                <a:cs typeface="Arial"/>
+              </a:defRPr>
+            </a:lvl7pPr>
+            <a:lvl8pPr>
+              <a:defRPr sz="2025" b="0">
+                <a:solidFill>
+                  <a:srgbClr val="063E5F"/>
+                </a:solidFill>
+                <a:latin typeface="Arial"/>
+                <a:ea typeface="Arial"/>
+                <a:cs typeface="Arial"/>
+              </a:defRPr>
+            </a:lvl8pPr>
+            <a:lvl9pPr>
+              <a:defRPr sz="2025" b="0">
+                <a:solidFill>
+                  <a:srgbClr val="063E5F"/>
+                </a:solidFill>
+                <a:latin typeface="Arial"/>
+                <a:ea typeface="Arial"/>
+                <a:cs typeface="Arial"/>
+              </a:defRPr>
+            </a:lvl9pPr>
           </a:lstStyle>
           <a:p xmlns:a="http://schemas.openxmlformats.org/drawingml/2006/main">
             <a:pPr>
@@ -9092,7 +14582,7 @@
           <p:cNvPr id="7" name="">
             <a:extLst xmlns:a="http://schemas.openxmlformats.org/drawingml/2006/main">
               <a:ext uri="{FF2B5EF4-FFF2-40B4-BE49-F238E27FC236}">
-                <a16:creationId xmlns:a16="http://schemas.microsoft.com/office/drawing/2014/main" id="{03A084C4-D1D1-4219-BCB4-FEEBFF2B8404}"/>
+                <a16:creationId xmlns:a16="http://schemas.microsoft.com/office/drawing/2014/main" id="{F897D2AC-2286-4E86-90A1-2B0884FC33D4}"/>
               </a:ext>
             </a:extLst>
           </p:cNvPr>
@@ -9129,6 +14619,96 @@
                 <a:cs typeface="Arial"/>
               </a:defRPr>
             </a:defPPr>
+            <a:lvl1pPr>
+              <a:defRPr sz="2025" b="0">
+                <a:solidFill>
+                  <a:srgbClr val="063E5F"/>
+                </a:solidFill>
+                <a:latin typeface="Arial"/>
+                <a:ea typeface="Arial"/>
+                <a:cs typeface="Arial"/>
+              </a:defRPr>
+            </a:lvl1pPr>
+            <a:lvl2pPr>
+              <a:defRPr sz="2025" b="0">
+                <a:solidFill>
+                  <a:srgbClr val="063E5F"/>
+                </a:solidFill>
+                <a:latin typeface="Arial"/>
+                <a:ea typeface="Arial"/>
+                <a:cs typeface="Arial"/>
+              </a:defRPr>
+            </a:lvl2pPr>
+            <a:lvl3pPr>
+              <a:defRPr sz="2025" b="0">
+                <a:solidFill>
+                  <a:srgbClr val="063E5F"/>
+                </a:solidFill>
+                <a:latin typeface="Arial"/>
+                <a:ea typeface="Arial"/>
+                <a:cs typeface="Arial"/>
+              </a:defRPr>
+            </a:lvl3pPr>
+            <a:lvl4pPr>
+              <a:defRPr sz="2025" b="0">
+                <a:solidFill>
+                  <a:srgbClr val="063E5F"/>
+                </a:solidFill>
+                <a:latin typeface="Arial"/>
+                <a:ea typeface="Arial"/>
+                <a:cs typeface="Arial"/>
+              </a:defRPr>
+            </a:lvl4pPr>
+            <a:lvl5pPr>
+              <a:defRPr sz="2025" b="0">
+                <a:solidFill>
+                  <a:srgbClr val="063E5F"/>
+                </a:solidFill>
+                <a:latin typeface="Arial"/>
+                <a:ea typeface="Arial"/>
+                <a:cs typeface="Arial"/>
+              </a:defRPr>
+            </a:lvl5pPr>
+            <a:lvl6pPr>
+              <a:defRPr sz="2025" b="0">
+                <a:solidFill>
+                  <a:srgbClr val="063E5F"/>
+                </a:solidFill>
+                <a:latin typeface="Arial"/>
+                <a:ea typeface="Arial"/>
+                <a:cs typeface="Arial"/>
+              </a:defRPr>
+            </a:lvl6pPr>
+            <a:lvl7pPr>
+              <a:defRPr sz="2025" b="0">
+                <a:solidFill>
+                  <a:srgbClr val="063E5F"/>
+                </a:solidFill>
+                <a:latin typeface="Arial"/>
+                <a:ea typeface="Arial"/>
+                <a:cs typeface="Arial"/>
+              </a:defRPr>
+            </a:lvl7pPr>
+            <a:lvl8pPr>
+              <a:defRPr sz="2025" b="0">
+                <a:solidFill>
+                  <a:srgbClr val="063E5F"/>
+                </a:solidFill>
+                <a:latin typeface="Arial"/>
+                <a:ea typeface="Arial"/>
+                <a:cs typeface="Arial"/>
+              </a:defRPr>
+            </a:lvl8pPr>
+            <a:lvl9pPr>
+              <a:defRPr sz="2025" b="0">
+                <a:solidFill>
+                  <a:srgbClr val="063E5F"/>
+                </a:solidFill>
+                <a:latin typeface="Arial"/>
+                <a:ea typeface="Arial"/>
+                <a:cs typeface="Arial"/>
+              </a:defRPr>
+            </a:lvl9pPr>
           </a:lstStyle>
           <a:p xmlns:a="http://schemas.openxmlformats.org/drawingml/2006/main">
             <a:pPr>
@@ -9160,7 +14740,7 @@
           <p:cNvPr id="8" name="">
             <a:extLst xmlns:a="http://schemas.openxmlformats.org/drawingml/2006/main">
               <a:ext uri="{FF2B5EF4-FFF2-40B4-BE49-F238E27FC236}">
-                <a16:creationId xmlns:a16="http://schemas.microsoft.com/office/drawing/2014/main" id="{7BF8F365-5926-4065-A414-D7D111D19136}"/>
+                <a16:creationId xmlns:a16="http://schemas.microsoft.com/office/drawing/2014/main" id="{13DBBC5D-D999-4991-BC14-63C47E443FD5}"/>
               </a:ext>
             </a:extLst>
           </p:cNvPr>
@@ -9170,7 +14750,7 @@
           <p:nvPr/>
         </p:nvPicPr>
         <p:blipFill>
-          <a:blip xmlns:r="http://schemas.openxmlformats.org/officeDocument/2006/relationships" xmlns:a="http://schemas.openxmlformats.org/drawingml/2006/main" r:embed="Rb95b43fff62c46c1"/>
+          <a:blip xmlns:r="http://schemas.openxmlformats.org/officeDocument/2006/relationships" xmlns:a="http://schemas.openxmlformats.org/drawingml/2006/main" r:embed="R45b80483e47047a1"/>
           <a:stretch xmlns:a="http://schemas.openxmlformats.org/drawingml/2006/main"/>
         </p:blipFill>
         <p:spPr>
@@ -9188,7 +14768,7 @@
           <p:cNvPr id="9" name="">
             <a:extLst xmlns:a="http://schemas.openxmlformats.org/drawingml/2006/main">
               <a:ext uri="{FF2B5EF4-FFF2-40B4-BE49-F238E27FC236}">
-                <a16:creationId xmlns:a16="http://schemas.microsoft.com/office/drawing/2014/main" id="{8F2EAEE1-EAD6-47D2-950E-5463C3331A81}"/>
+                <a16:creationId xmlns:a16="http://schemas.microsoft.com/office/drawing/2014/main" id="{FB31E1EC-C531-466D-A804-1A3A93212401}"/>
               </a:ext>
             </a:extLst>
           </p:cNvPr>
@@ -9225,6 +14805,96 @@
                 <a:cs typeface="Arial"/>
               </a:defRPr>
             </a:defPPr>
+            <a:lvl1pPr>
+              <a:defRPr sz="1875" b="0">
+                <a:solidFill>
+                  <a:srgbClr val="536272"/>
+                </a:solidFill>
+                <a:latin typeface="Arial"/>
+                <a:ea typeface="Arial"/>
+                <a:cs typeface="Arial"/>
+              </a:defRPr>
+            </a:lvl1pPr>
+            <a:lvl2pPr>
+              <a:defRPr sz="1875" b="0">
+                <a:solidFill>
+                  <a:srgbClr val="536272"/>
+                </a:solidFill>
+                <a:latin typeface="Arial"/>
+                <a:ea typeface="Arial"/>
+                <a:cs typeface="Arial"/>
+              </a:defRPr>
+            </a:lvl2pPr>
+            <a:lvl3pPr>
+              <a:defRPr sz="1875" b="0">
+                <a:solidFill>
+                  <a:srgbClr val="536272"/>
+                </a:solidFill>
+                <a:latin typeface="Arial"/>
+                <a:ea typeface="Arial"/>
+                <a:cs typeface="Arial"/>
+              </a:defRPr>
+            </a:lvl3pPr>
+            <a:lvl4pPr>
+              <a:defRPr sz="1875" b="0">
+                <a:solidFill>
+                  <a:srgbClr val="536272"/>
+                </a:solidFill>
+                <a:latin typeface="Arial"/>
+                <a:ea typeface="Arial"/>
+                <a:cs typeface="Arial"/>
+              </a:defRPr>
+            </a:lvl4pPr>
+            <a:lvl5pPr>
+              <a:defRPr sz="1875" b="0">
+                <a:solidFill>
+                  <a:srgbClr val="536272"/>
+                </a:solidFill>
+                <a:latin typeface="Arial"/>
+                <a:ea typeface="Arial"/>
+                <a:cs typeface="Arial"/>
+              </a:defRPr>
+            </a:lvl5pPr>
+            <a:lvl6pPr>
+              <a:defRPr sz="1875" b="0">
+                <a:solidFill>
+                  <a:srgbClr val="536272"/>
+                </a:solidFill>
+                <a:latin typeface="Arial"/>
+                <a:ea typeface="Arial"/>
+                <a:cs typeface="Arial"/>
+              </a:defRPr>
+            </a:lvl6pPr>
+            <a:lvl7pPr>
+              <a:defRPr sz="1875" b="0">
+                <a:solidFill>
+                  <a:srgbClr val="536272"/>
+                </a:solidFill>
+                <a:latin typeface="Arial"/>
+                <a:ea typeface="Arial"/>
+                <a:cs typeface="Arial"/>
+              </a:defRPr>
+            </a:lvl7pPr>
+            <a:lvl8pPr>
+              <a:defRPr sz="1875" b="0">
+                <a:solidFill>
+                  <a:srgbClr val="536272"/>
+                </a:solidFill>
+                <a:latin typeface="Arial"/>
+                <a:ea typeface="Arial"/>
+                <a:cs typeface="Arial"/>
+              </a:defRPr>
+            </a:lvl8pPr>
+            <a:lvl9pPr>
+              <a:defRPr sz="1875" b="0">
+                <a:solidFill>
+                  <a:srgbClr val="536272"/>
+                </a:solidFill>
+                <a:latin typeface="Arial"/>
+                <a:ea typeface="Arial"/>
+                <a:cs typeface="Arial"/>
+              </a:defRPr>
+            </a:lvl9pPr>
           </a:lstStyle>
           <a:p xmlns:a="http://schemas.openxmlformats.org/drawingml/2006/main">
             <a:pPr>
@@ -9254,7 +14924,7 @@
     </p:spTree>
     <p:extLst>
       <p:ext uri="{BB962C8B-B14F-4D97-AF65-F5344CB8AC3E}">
-        <p14:creationId xmlns:p14="http://schemas.microsoft.com/office/powerpoint/2010/main" val="289648609"/>
+        <p14:creationId xmlns:p14="http://schemas.microsoft.com/office/powerpoint/2010/main" val="1269732639"/>
       </p:ext>
     </p:extLst>
   </p:cSld>
@@ -9285,7 +14955,7 @@
           <p:cNvPr id="9" name="">
             <a:extLst xmlns:a="http://schemas.openxmlformats.org/drawingml/2006/main">
               <a:ext uri="{FF2B5EF4-FFF2-40B4-BE49-F238E27FC236}">
-                <a16:creationId xmlns:a16="http://schemas.microsoft.com/office/drawing/2014/main" id="{A1BDF5DF-A302-471B-8D59-290F6D4BE11D}"/>
+                <a16:creationId xmlns:a16="http://schemas.microsoft.com/office/drawing/2014/main" id="{987A3D99-B10C-4377-BBB1-E8A5CE62B8C1}"/>
               </a:ext>
             </a:extLst>
           </p:cNvPr>
@@ -9322,6 +14992,96 @@
                 <a:cs typeface="Arial"/>
               </a:defRPr>
             </a:defPPr>
+            <a:lvl1pPr>
+              <a:defRPr sz="3300" b="1">
+                <a:solidFill>
+                  <a:srgbClr val="063E5F"/>
+                </a:solidFill>
+                <a:latin typeface="Arial"/>
+                <a:ea typeface="Arial"/>
+                <a:cs typeface="Arial"/>
+              </a:defRPr>
+            </a:lvl1pPr>
+            <a:lvl2pPr>
+              <a:defRPr sz="3300" b="1">
+                <a:solidFill>
+                  <a:srgbClr val="063E5F"/>
+                </a:solidFill>
+                <a:latin typeface="Arial"/>
+                <a:ea typeface="Arial"/>
+                <a:cs typeface="Arial"/>
+              </a:defRPr>
+            </a:lvl2pPr>
+            <a:lvl3pPr>
+              <a:defRPr sz="3300" b="1">
+                <a:solidFill>
+                  <a:srgbClr val="063E5F"/>
+                </a:solidFill>
+                <a:latin typeface="Arial"/>
+                <a:ea typeface="Arial"/>
+                <a:cs typeface="Arial"/>
+              </a:defRPr>
+            </a:lvl3pPr>
+            <a:lvl4pPr>
+              <a:defRPr sz="3300" b="1">
+                <a:solidFill>
+                  <a:srgbClr val="063E5F"/>
+                </a:solidFill>
+                <a:latin typeface="Arial"/>
+                <a:ea typeface="Arial"/>
+                <a:cs typeface="Arial"/>
+              </a:defRPr>
+            </a:lvl4pPr>
+            <a:lvl5pPr>
+              <a:defRPr sz="3300" b="1">
+                <a:solidFill>
+                  <a:srgbClr val="063E5F"/>
+                </a:solidFill>
+                <a:latin typeface="Arial"/>
+                <a:ea typeface="Arial"/>
+                <a:cs typeface="Arial"/>
+              </a:defRPr>
+            </a:lvl5pPr>
+            <a:lvl6pPr>
+              <a:defRPr sz="3300" b="1">
+                <a:solidFill>
+                  <a:srgbClr val="063E5F"/>
+                </a:solidFill>
+                <a:latin typeface="Arial"/>
+                <a:ea typeface="Arial"/>
+                <a:cs typeface="Arial"/>
+              </a:defRPr>
+            </a:lvl6pPr>
+            <a:lvl7pPr>
+              <a:defRPr sz="3300" b="1">
+                <a:solidFill>
+                  <a:srgbClr val="063E5F"/>
+                </a:solidFill>
+                <a:latin typeface="Arial"/>
+                <a:ea typeface="Arial"/>
+                <a:cs typeface="Arial"/>
+              </a:defRPr>
+            </a:lvl7pPr>
+            <a:lvl8pPr>
+              <a:defRPr sz="3300" b="1">
+                <a:solidFill>
+                  <a:srgbClr val="063E5F"/>
+                </a:solidFill>
+                <a:latin typeface="Arial"/>
+                <a:ea typeface="Arial"/>
+                <a:cs typeface="Arial"/>
+              </a:defRPr>
+            </a:lvl8pPr>
+            <a:lvl9pPr>
+              <a:defRPr sz="3300" b="1">
+                <a:solidFill>
+                  <a:srgbClr val="063E5F"/>
+                </a:solidFill>
+                <a:latin typeface="Arial"/>
+                <a:ea typeface="Arial"/>
+                <a:cs typeface="Arial"/>
+              </a:defRPr>
+            </a:lvl9pPr>
           </a:lstStyle>
           <a:p xmlns:a="http://schemas.openxmlformats.org/drawingml/2006/main">
             <a:pPr>
@@ -9353,7 +15113,7 @@
           <p:cNvPr id="2" name="">
             <a:extLst xmlns:a="http://schemas.openxmlformats.org/drawingml/2006/main">
               <a:ext uri="{FF2B5EF4-FFF2-40B4-BE49-F238E27FC236}">
-                <a16:creationId xmlns:a16="http://schemas.microsoft.com/office/drawing/2014/main" id="{13DAA671-74C1-4707-9034-2D4B61526BB9}"/>
+                <a16:creationId xmlns:a16="http://schemas.microsoft.com/office/drawing/2014/main" id="{FEC4C87C-6B55-46AC-9CAB-B585D1073841}"/>
               </a:ext>
             </a:extLst>
           </p:cNvPr>
@@ -9390,6 +15150,96 @@
                 <a:cs typeface="Arial"/>
               </a:defRPr>
             </a:defPPr>
+            <a:lvl1pPr>
+              <a:defRPr sz="1200" b="0">
+                <a:solidFill>
+                  <a:srgbClr val="536272"/>
+                </a:solidFill>
+                <a:latin typeface="Arial"/>
+                <a:ea typeface="Arial"/>
+                <a:cs typeface="Arial"/>
+              </a:defRPr>
+            </a:lvl1pPr>
+            <a:lvl2pPr>
+              <a:defRPr sz="1200" b="0">
+                <a:solidFill>
+                  <a:srgbClr val="536272"/>
+                </a:solidFill>
+                <a:latin typeface="Arial"/>
+                <a:ea typeface="Arial"/>
+                <a:cs typeface="Arial"/>
+              </a:defRPr>
+            </a:lvl2pPr>
+            <a:lvl3pPr>
+              <a:defRPr sz="1200" b="0">
+                <a:solidFill>
+                  <a:srgbClr val="536272"/>
+                </a:solidFill>
+                <a:latin typeface="Arial"/>
+                <a:ea typeface="Arial"/>
+                <a:cs typeface="Arial"/>
+              </a:defRPr>
+            </a:lvl3pPr>
+            <a:lvl4pPr>
+              <a:defRPr sz="1200" b="0">
+                <a:solidFill>
+                  <a:srgbClr val="536272"/>
+                </a:solidFill>
+                <a:latin typeface="Arial"/>
+                <a:ea typeface="Arial"/>
+                <a:cs typeface="Arial"/>
+              </a:defRPr>
+            </a:lvl4pPr>
+            <a:lvl5pPr>
+              <a:defRPr sz="1200" b="0">
+                <a:solidFill>
+                  <a:srgbClr val="536272"/>
+                </a:solidFill>
+                <a:latin typeface="Arial"/>
+                <a:ea typeface="Arial"/>
+                <a:cs typeface="Arial"/>
+              </a:defRPr>
+            </a:lvl5pPr>
+            <a:lvl6pPr>
+              <a:defRPr sz="1200" b="0">
+                <a:solidFill>
+                  <a:srgbClr val="536272"/>
+                </a:solidFill>
+                <a:latin typeface="Arial"/>
+                <a:ea typeface="Arial"/>
+                <a:cs typeface="Arial"/>
+              </a:defRPr>
+            </a:lvl6pPr>
+            <a:lvl7pPr>
+              <a:defRPr sz="1200" b="0">
+                <a:solidFill>
+                  <a:srgbClr val="536272"/>
+                </a:solidFill>
+                <a:latin typeface="Arial"/>
+                <a:ea typeface="Arial"/>
+                <a:cs typeface="Arial"/>
+              </a:defRPr>
+            </a:lvl7pPr>
+            <a:lvl8pPr>
+              <a:defRPr sz="1200" b="0">
+                <a:solidFill>
+                  <a:srgbClr val="536272"/>
+                </a:solidFill>
+                <a:latin typeface="Arial"/>
+                <a:ea typeface="Arial"/>
+                <a:cs typeface="Arial"/>
+              </a:defRPr>
+            </a:lvl8pPr>
+            <a:lvl9pPr>
+              <a:defRPr sz="1200" b="0">
+                <a:solidFill>
+                  <a:srgbClr val="536272"/>
+                </a:solidFill>
+                <a:latin typeface="Arial"/>
+                <a:ea typeface="Arial"/>
+                <a:cs typeface="Arial"/>
+              </a:defRPr>
+            </a:lvl9pPr>
           </a:lstStyle>
           <a:p xmlns:a="http://schemas.openxmlformats.org/drawingml/2006/main">
             <a:pPr>
@@ -9421,7 +15271,7 @@
           <p:cNvPr id="3" name="">
             <a:extLst xmlns:a="http://schemas.openxmlformats.org/drawingml/2006/main">
               <a:ext uri="{FF2B5EF4-FFF2-40B4-BE49-F238E27FC236}">
-                <a16:creationId xmlns:a16="http://schemas.microsoft.com/office/drawing/2014/main" id="{D193CAB9-190D-407C-846E-5E92DF56BD95}"/>
+                <a16:creationId xmlns:a16="http://schemas.microsoft.com/office/drawing/2014/main" id="{BEBFD680-8AE0-42CC-ADCF-A837C8A265DE}"/>
               </a:ext>
             </a:extLst>
           </p:cNvPr>
@@ -9458,6 +15308,96 @@
                 <a:cs typeface="Arial"/>
               </a:defRPr>
             </a:defPPr>
+            <a:lvl1pPr>
+              <a:defRPr sz="1275" b="0">
+                <a:solidFill>
+                  <a:srgbClr val="B88E23"/>
+                </a:solidFill>
+                <a:latin typeface="Arial"/>
+                <a:ea typeface="Arial"/>
+                <a:cs typeface="Arial"/>
+              </a:defRPr>
+            </a:lvl1pPr>
+            <a:lvl2pPr>
+              <a:defRPr sz="1275" b="0">
+                <a:solidFill>
+                  <a:srgbClr val="B88E23"/>
+                </a:solidFill>
+                <a:latin typeface="Arial"/>
+                <a:ea typeface="Arial"/>
+                <a:cs typeface="Arial"/>
+              </a:defRPr>
+            </a:lvl2pPr>
+            <a:lvl3pPr>
+              <a:defRPr sz="1275" b="0">
+                <a:solidFill>
+                  <a:srgbClr val="B88E23"/>
+                </a:solidFill>
+                <a:latin typeface="Arial"/>
+                <a:ea typeface="Arial"/>
+                <a:cs typeface="Arial"/>
+              </a:defRPr>
+            </a:lvl3pPr>
+            <a:lvl4pPr>
+              <a:defRPr sz="1275" b="0">
+                <a:solidFill>
+                  <a:srgbClr val="B88E23"/>
+                </a:solidFill>
+                <a:latin typeface="Arial"/>
+                <a:ea typeface="Arial"/>
+                <a:cs typeface="Arial"/>
+              </a:defRPr>
+            </a:lvl4pPr>
+            <a:lvl5pPr>
+              <a:defRPr sz="1275" b="0">
+                <a:solidFill>
+                  <a:srgbClr val="B88E23"/>
+                </a:solidFill>
+                <a:latin typeface="Arial"/>
+                <a:ea typeface="Arial"/>
+                <a:cs typeface="Arial"/>
+              </a:defRPr>
+            </a:lvl5pPr>
+            <a:lvl6pPr>
+              <a:defRPr sz="1275" b="0">
+                <a:solidFill>
+                  <a:srgbClr val="B88E23"/>
+                </a:solidFill>
+                <a:latin typeface="Arial"/>
+                <a:ea typeface="Arial"/>
+                <a:cs typeface="Arial"/>
+              </a:defRPr>
+            </a:lvl6pPr>
+            <a:lvl7pPr>
+              <a:defRPr sz="1275" b="0">
+                <a:solidFill>
+                  <a:srgbClr val="B88E23"/>
+                </a:solidFill>
+                <a:latin typeface="Arial"/>
+                <a:ea typeface="Arial"/>
+                <a:cs typeface="Arial"/>
+              </a:defRPr>
+            </a:lvl7pPr>
+            <a:lvl8pPr>
+              <a:defRPr sz="1275" b="0">
+                <a:solidFill>
+                  <a:srgbClr val="B88E23"/>
+                </a:solidFill>
+                <a:latin typeface="Arial"/>
+                <a:ea typeface="Arial"/>
+                <a:cs typeface="Arial"/>
+              </a:defRPr>
+            </a:lvl8pPr>
+            <a:lvl9pPr>
+              <a:defRPr sz="1275" b="0">
+                <a:solidFill>
+                  <a:srgbClr val="B88E23"/>
+                </a:solidFill>
+                <a:latin typeface="Arial"/>
+                <a:ea typeface="Arial"/>
+                <a:cs typeface="Arial"/>
+              </a:defRPr>
+            </a:lvl9pPr>
           </a:lstStyle>
           <a:p xmlns:a="http://schemas.openxmlformats.org/drawingml/2006/main">
             <a:pPr>
@@ -9489,7 +15429,7 @@
           <p:cNvPr id="4" name="">
             <a:extLst xmlns:a="http://schemas.openxmlformats.org/drawingml/2006/main">
               <a:ext uri="{FF2B5EF4-FFF2-40B4-BE49-F238E27FC236}">
-                <a16:creationId xmlns:a16="http://schemas.microsoft.com/office/drawing/2014/main" id="{82D19B1A-BB4E-435F-B1B7-4F96A67A3EA7}"/>
+                <a16:creationId xmlns:a16="http://schemas.microsoft.com/office/drawing/2014/main" id="{07F24725-9E85-4888-A6E2-3A4C8B5FAD60}"/>
               </a:ext>
             </a:extLst>
           </p:cNvPr>
@@ -9526,6 +15466,96 @@
                 <a:cs typeface="Arial"/>
               </a:defRPr>
             </a:defPPr>
+            <a:lvl1pPr>
+              <a:defRPr sz="2175" b="0">
+                <a:solidFill>
+                  <a:srgbClr val="063E5F"/>
+                </a:solidFill>
+                <a:latin typeface="Arial"/>
+                <a:ea typeface="Arial"/>
+                <a:cs typeface="Arial"/>
+              </a:defRPr>
+            </a:lvl1pPr>
+            <a:lvl2pPr>
+              <a:defRPr sz="2175" b="0">
+                <a:solidFill>
+                  <a:srgbClr val="063E5F"/>
+                </a:solidFill>
+                <a:latin typeface="Arial"/>
+                <a:ea typeface="Arial"/>
+                <a:cs typeface="Arial"/>
+              </a:defRPr>
+            </a:lvl2pPr>
+            <a:lvl3pPr>
+              <a:defRPr sz="2175" b="0">
+                <a:solidFill>
+                  <a:srgbClr val="063E5F"/>
+                </a:solidFill>
+                <a:latin typeface="Arial"/>
+                <a:ea typeface="Arial"/>
+                <a:cs typeface="Arial"/>
+              </a:defRPr>
+            </a:lvl3pPr>
+            <a:lvl4pPr>
+              <a:defRPr sz="2175" b="0">
+                <a:solidFill>
+                  <a:srgbClr val="063E5F"/>
+                </a:solidFill>
+                <a:latin typeface="Arial"/>
+                <a:ea typeface="Arial"/>
+                <a:cs typeface="Arial"/>
+              </a:defRPr>
+            </a:lvl4pPr>
+            <a:lvl5pPr>
+              <a:defRPr sz="2175" b="0">
+                <a:solidFill>
+                  <a:srgbClr val="063E5F"/>
+                </a:solidFill>
+                <a:latin typeface="Arial"/>
+                <a:ea typeface="Arial"/>
+                <a:cs typeface="Arial"/>
+              </a:defRPr>
+            </a:lvl5pPr>
+            <a:lvl6pPr>
+              <a:defRPr sz="2175" b="0">
+                <a:solidFill>
+                  <a:srgbClr val="063E5F"/>
+                </a:solidFill>
+                <a:latin typeface="Arial"/>
+                <a:ea typeface="Arial"/>
+                <a:cs typeface="Arial"/>
+              </a:defRPr>
+            </a:lvl6pPr>
+            <a:lvl7pPr>
+              <a:defRPr sz="2175" b="0">
+                <a:solidFill>
+                  <a:srgbClr val="063E5F"/>
+                </a:solidFill>
+                <a:latin typeface="Arial"/>
+                <a:ea typeface="Arial"/>
+                <a:cs typeface="Arial"/>
+              </a:defRPr>
+            </a:lvl7pPr>
+            <a:lvl8pPr>
+              <a:defRPr sz="2175" b="0">
+                <a:solidFill>
+                  <a:srgbClr val="063E5F"/>
+                </a:solidFill>
+                <a:latin typeface="Arial"/>
+                <a:ea typeface="Arial"/>
+                <a:cs typeface="Arial"/>
+              </a:defRPr>
+            </a:lvl8pPr>
+            <a:lvl9pPr>
+              <a:defRPr sz="2175" b="0">
+                <a:solidFill>
+                  <a:srgbClr val="063E5F"/>
+                </a:solidFill>
+                <a:latin typeface="Arial"/>
+                <a:ea typeface="Arial"/>
+                <a:cs typeface="Arial"/>
+              </a:defRPr>
+            </a:lvl9pPr>
           </a:lstStyle>
           <a:p xmlns:a="http://schemas.openxmlformats.org/drawingml/2006/main">
             <a:pPr>
@@ -9557,7 +15587,7 @@
           <p:cNvPr id="5" name="">
             <a:extLst xmlns:a="http://schemas.openxmlformats.org/drawingml/2006/main">
               <a:ext uri="{FF2B5EF4-FFF2-40B4-BE49-F238E27FC236}">
-                <a16:creationId xmlns:a16="http://schemas.microsoft.com/office/drawing/2014/main" id="{EC784A7D-91D0-467A-B609-9186C9FCB4A6}"/>
+                <a16:creationId xmlns:a16="http://schemas.microsoft.com/office/drawing/2014/main" id="{F364189B-D564-4D44-BB98-D49608652903}"/>
               </a:ext>
             </a:extLst>
           </p:cNvPr>
@@ -9594,6 +15624,96 @@
                 <a:cs typeface="Arial"/>
               </a:defRPr>
             </a:defPPr>
+            <a:lvl1pPr>
+              <a:defRPr sz="2175" b="0">
+                <a:solidFill>
+                  <a:srgbClr val="063E5F"/>
+                </a:solidFill>
+                <a:latin typeface="Arial"/>
+                <a:ea typeface="Arial"/>
+                <a:cs typeface="Arial"/>
+              </a:defRPr>
+            </a:lvl1pPr>
+            <a:lvl2pPr>
+              <a:defRPr sz="2175" b="0">
+                <a:solidFill>
+                  <a:srgbClr val="063E5F"/>
+                </a:solidFill>
+                <a:latin typeface="Arial"/>
+                <a:ea typeface="Arial"/>
+                <a:cs typeface="Arial"/>
+              </a:defRPr>
+            </a:lvl2pPr>
+            <a:lvl3pPr>
+              <a:defRPr sz="2175" b="0">
+                <a:solidFill>
+                  <a:srgbClr val="063E5F"/>
+                </a:solidFill>
+                <a:latin typeface="Arial"/>
+                <a:ea typeface="Arial"/>
+                <a:cs typeface="Arial"/>
+              </a:defRPr>
+            </a:lvl3pPr>
+            <a:lvl4pPr>
+              <a:defRPr sz="2175" b="0">
+                <a:solidFill>
+                  <a:srgbClr val="063E5F"/>
+                </a:solidFill>
+                <a:latin typeface="Arial"/>
+                <a:ea typeface="Arial"/>
+                <a:cs typeface="Arial"/>
+              </a:defRPr>
+            </a:lvl4pPr>
+            <a:lvl5pPr>
+              <a:defRPr sz="2175" b="0">
+                <a:solidFill>
+                  <a:srgbClr val="063E5F"/>
+                </a:solidFill>
+                <a:latin typeface="Arial"/>
+                <a:ea typeface="Arial"/>
+                <a:cs typeface="Arial"/>
+              </a:defRPr>
+            </a:lvl5pPr>
+            <a:lvl6pPr>
+              <a:defRPr sz="2175" b="0">
+                <a:solidFill>
+                  <a:srgbClr val="063E5F"/>
+                </a:solidFill>
+                <a:latin typeface="Arial"/>
+                <a:ea typeface="Arial"/>
+                <a:cs typeface="Arial"/>
+              </a:defRPr>
+            </a:lvl6pPr>
+            <a:lvl7pPr>
+              <a:defRPr sz="2175" b="0">
+                <a:solidFill>
+                  <a:srgbClr val="063E5F"/>
+                </a:solidFill>
+                <a:latin typeface="Arial"/>
+                <a:ea typeface="Arial"/>
+                <a:cs typeface="Arial"/>
+              </a:defRPr>
+            </a:lvl7pPr>
+            <a:lvl8pPr>
+              <a:defRPr sz="2175" b="0">
+                <a:solidFill>
+                  <a:srgbClr val="063E5F"/>
+                </a:solidFill>
+                <a:latin typeface="Arial"/>
+                <a:ea typeface="Arial"/>
+                <a:cs typeface="Arial"/>
+              </a:defRPr>
+            </a:lvl8pPr>
+            <a:lvl9pPr>
+              <a:defRPr sz="2175" b="0">
+                <a:solidFill>
+                  <a:srgbClr val="063E5F"/>
+                </a:solidFill>
+                <a:latin typeface="Arial"/>
+                <a:ea typeface="Arial"/>
+                <a:cs typeface="Arial"/>
+              </a:defRPr>
+            </a:lvl9pPr>
           </a:lstStyle>
           <a:p xmlns:a="http://schemas.openxmlformats.org/drawingml/2006/main">
             <a:pPr>
@@ -9625,7 +15745,7 @@
           <p:cNvPr id="6" name="">
             <a:extLst xmlns:a="http://schemas.openxmlformats.org/drawingml/2006/main">
               <a:ext uri="{FF2B5EF4-FFF2-40B4-BE49-F238E27FC236}">
-                <a16:creationId xmlns:a16="http://schemas.microsoft.com/office/drawing/2014/main" id="{3F39DB4C-9EE1-4FA1-AFC1-5EA62DBCBC6A}"/>
+                <a16:creationId xmlns:a16="http://schemas.microsoft.com/office/drawing/2014/main" id="{9F6AB91C-2FB4-4F7E-9B98-558EC45849D7}"/>
               </a:ext>
             </a:extLst>
           </p:cNvPr>
@@ -9662,6 +15782,96 @@
                 <a:cs typeface="Arial"/>
               </a:defRPr>
             </a:defPPr>
+            <a:lvl1pPr>
+              <a:defRPr sz="2175" b="0">
+                <a:solidFill>
+                  <a:srgbClr val="063E5F"/>
+                </a:solidFill>
+                <a:latin typeface="Arial"/>
+                <a:ea typeface="Arial"/>
+                <a:cs typeface="Arial"/>
+              </a:defRPr>
+            </a:lvl1pPr>
+            <a:lvl2pPr>
+              <a:defRPr sz="2175" b="0">
+                <a:solidFill>
+                  <a:srgbClr val="063E5F"/>
+                </a:solidFill>
+                <a:latin typeface="Arial"/>
+                <a:ea typeface="Arial"/>
+                <a:cs typeface="Arial"/>
+              </a:defRPr>
+            </a:lvl2pPr>
+            <a:lvl3pPr>
+              <a:defRPr sz="2175" b="0">
+                <a:solidFill>
+                  <a:srgbClr val="063E5F"/>
+                </a:solidFill>
+                <a:latin typeface="Arial"/>
+                <a:ea typeface="Arial"/>
+                <a:cs typeface="Arial"/>
+              </a:defRPr>
+            </a:lvl3pPr>
+            <a:lvl4pPr>
+              <a:defRPr sz="2175" b="0">
+                <a:solidFill>
+                  <a:srgbClr val="063E5F"/>
+                </a:solidFill>
+                <a:latin typeface="Arial"/>
+                <a:ea typeface="Arial"/>
+                <a:cs typeface="Arial"/>
+              </a:defRPr>
+            </a:lvl4pPr>
+            <a:lvl5pPr>
+              <a:defRPr sz="2175" b="0">
+                <a:solidFill>
+                  <a:srgbClr val="063E5F"/>
+                </a:solidFill>
+                <a:latin typeface="Arial"/>
+                <a:ea typeface="Arial"/>
+                <a:cs typeface="Arial"/>
+              </a:defRPr>
+            </a:lvl5pPr>
+            <a:lvl6pPr>
+              <a:defRPr sz="2175" b="0">
+                <a:solidFill>
+                  <a:srgbClr val="063E5F"/>
+                </a:solidFill>
+                <a:latin typeface="Arial"/>
+                <a:ea typeface="Arial"/>
+                <a:cs typeface="Arial"/>
+              </a:defRPr>
+            </a:lvl6pPr>
+            <a:lvl7pPr>
+              <a:defRPr sz="2175" b="0">
+                <a:solidFill>
+                  <a:srgbClr val="063E5F"/>
+                </a:solidFill>
+                <a:latin typeface="Arial"/>
+                <a:ea typeface="Arial"/>
+                <a:cs typeface="Arial"/>
+              </a:defRPr>
+            </a:lvl7pPr>
+            <a:lvl8pPr>
+              <a:defRPr sz="2175" b="0">
+                <a:solidFill>
+                  <a:srgbClr val="063E5F"/>
+                </a:solidFill>
+                <a:latin typeface="Arial"/>
+                <a:ea typeface="Arial"/>
+                <a:cs typeface="Arial"/>
+              </a:defRPr>
+            </a:lvl8pPr>
+            <a:lvl9pPr>
+              <a:defRPr sz="2175" b="0">
+                <a:solidFill>
+                  <a:srgbClr val="063E5F"/>
+                </a:solidFill>
+                <a:latin typeface="Arial"/>
+                <a:ea typeface="Arial"/>
+                <a:cs typeface="Arial"/>
+              </a:defRPr>
+            </a:lvl9pPr>
           </a:lstStyle>
           <a:p xmlns:a="http://schemas.openxmlformats.org/drawingml/2006/main">
             <a:pPr>
@@ -9693,7 +15903,7 @@
           <p:cNvPr id="7" name="">
             <a:extLst xmlns:a="http://schemas.openxmlformats.org/drawingml/2006/main">
               <a:ext uri="{FF2B5EF4-FFF2-40B4-BE49-F238E27FC236}">
-                <a16:creationId xmlns:a16="http://schemas.microsoft.com/office/drawing/2014/main" id="{1791F073-9478-498E-91C5-6CE149120363}"/>
+                <a16:creationId xmlns:a16="http://schemas.microsoft.com/office/drawing/2014/main" id="{2717C8A1-3185-46B3-A043-DF790F8B3EBB}"/>
               </a:ext>
             </a:extLst>
           </p:cNvPr>
@@ -9730,6 +15940,96 @@
                 <a:cs typeface="Arial"/>
               </a:defRPr>
             </a:defPPr>
+            <a:lvl1pPr>
+              <a:defRPr sz="2175" b="0">
+                <a:solidFill>
+                  <a:srgbClr val="063E5F"/>
+                </a:solidFill>
+                <a:latin typeface="Arial"/>
+                <a:ea typeface="Arial"/>
+                <a:cs typeface="Arial"/>
+              </a:defRPr>
+            </a:lvl1pPr>
+            <a:lvl2pPr>
+              <a:defRPr sz="2175" b="0">
+                <a:solidFill>
+                  <a:srgbClr val="063E5F"/>
+                </a:solidFill>
+                <a:latin typeface="Arial"/>
+                <a:ea typeface="Arial"/>
+                <a:cs typeface="Arial"/>
+              </a:defRPr>
+            </a:lvl2pPr>
+            <a:lvl3pPr>
+              <a:defRPr sz="2175" b="0">
+                <a:solidFill>
+                  <a:srgbClr val="063E5F"/>
+                </a:solidFill>
+                <a:latin typeface="Arial"/>
+                <a:ea typeface="Arial"/>
+                <a:cs typeface="Arial"/>
+              </a:defRPr>
+            </a:lvl3pPr>
+            <a:lvl4pPr>
+              <a:defRPr sz="2175" b="0">
+                <a:solidFill>
+                  <a:srgbClr val="063E5F"/>
+                </a:solidFill>
+                <a:latin typeface="Arial"/>
+                <a:ea typeface="Arial"/>
+                <a:cs typeface="Arial"/>
+              </a:defRPr>
+            </a:lvl4pPr>
+            <a:lvl5pPr>
+              <a:defRPr sz="2175" b="0">
+                <a:solidFill>
+                  <a:srgbClr val="063E5F"/>
+                </a:solidFill>
+                <a:latin typeface="Arial"/>
+                <a:ea typeface="Arial"/>
+                <a:cs typeface="Arial"/>
+              </a:defRPr>
+            </a:lvl5pPr>
+            <a:lvl6pPr>
+              <a:defRPr sz="2175" b="0">
+                <a:solidFill>
+                  <a:srgbClr val="063E5F"/>
+                </a:solidFill>
+                <a:latin typeface="Arial"/>
+                <a:ea typeface="Arial"/>
+                <a:cs typeface="Arial"/>
+              </a:defRPr>
+            </a:lvl6pPr>
+            <a:lvl7pPr>
+              <a:defRPr sz="2175" b="0">
+                <a:solidFill>
+                  <a:srgbClr val="063E5F"/>
+                </a:solidFill>
+                <a:latin typeface="Arial"/>
+                <a:ea typeface="Arial"/>
+                <a:cs typeface="Arial"/>
+              </a:defRPr>
+            </a:lvl7pPr>
+            <a:lvl8pPr>
+              <a:defRPr sz="2175" b="0">
+                <a:solidFill>
+                  <a:srgbClr val="063E5F"/>
+                </a:solidFill>
+                <a:latin typeface="Arial"/>
+                <a:ea typeface="Arial"/>
+                <a:cs typeface="Arial"/>
+              </a:defRPr>
+            </a:lvl8pPr>
+            <a:lvl9pPr>
+              <a:defRPr sz="2175" b="0">
+                <a:solidFill>
+                  <a:srgbClr val="063E5F"/>
+                </a:solidFill>
+                <a:latin typeface="Arial"/>
+                <a:ea typeface="Arial"/>
+                <a:cs typeface="Arial"/>
+              </a:defRPr>
+            </a:lvl9pPr>
           </a:lstStyle>
           <a:p xmlns:a="http://schemas.openxmlformats.org/drawingml/2006/main">
             <a:pPr>
@@ -9751,7 +16051,7 @@
                 <a:ea typeface="Arial"/>
                 <a:cs typeface="Arial"/>
               </a:rPr>
-              <a:t>M6: reviewer B and process evidence remain pending</a:t>
+              <a:t>M6: A/B descriptive review, 38 unresolved intent disagreements</a:t>
             </a:r>
           </a:p>
         </p:txBody>
@@ -9761,7 +16061,7 @@
           <p:cNvPr id="8" name="">
             <a:extLst xmlns:a="http://schemas.openxmlformats.org/drawingml/2006/main">
               <a:ext uri="{FF2B5EF4-FFF2-40B4-BE49-F238E27FC236}">
-                <a16:creationId xmlns:a16="http://schemas.microsoft.com/office/drawing/2014/main" id="{BBBA10BC-9CF7-4FE8-975B-18CC95649DE9}"/>
+                <a16:creationId xmlns:a16="http://schemas.microsoft.com/office/drawing/2014/main" id="{D91E683E-32E0-4AB5-8077-2FE8590E07EF}"/>
               </a:ext>
             </a:extLst>
           </p:cNvPr>
@@ -9798,6 +16098,96 @@
                 <a:cs typeface="Arial"/>
               </a:defRPr>
             </a:defPPr>
+            <a:lvl1pPr>
+              <a:defRPr sz="1800" b="0">
+                <a:solidFill>
+                  <a:srgbClr val="536272"/>
+                </a:solidFill>
+                <a:latin typeface="Arial"/>
+                <a:ea typeface="Arial"/>
+                <a:cs typeface="Arial"/>
+              </a:defRPr>
+            </a:lvl1pPr>
+            <a:lvl2pPr>
+              <a:defRPr sz="1800" b="0">
+                <a:solidFill>
+                  <a:srgbClr val="536272"/>
+                </a:solidFill>
+                <a:latin typeface="Arial"/>
+                <a:ea typeface="Arial"/>
+                <a:cs typeface="Arial"/>
+              </a:defRPr>
+            </a:lvl2pPr>
+            <a:lvl3pPr>
+              <a:defRPr sz="1800" b="0">
+                <a:solidFill>
+                  <a:srgbClr val="536272"/>
+                </a:solidFill>
+                <a:latin typeface="Arial"/>
+                <a:ea typeface="Arial"/>
+                <a:cs typeface="Arial"/>
+              </a:defRPr>
+            </a:lvl3pPr>
+            <a:lvl4pPr>
+              <a:defRPr sz="1800" b="0">
+                <a:solidFill>
+                  <a:srgbClr val="536272"/>
+                </a:solidFill>
+                <a:latin typeface="Arial"/>
+                <a:ea typeface="Arial"/>
+                <a:cs typeface="Arial"/>
+              </a:defRPr>
+            </a:lvl4pPr>
+            <a:lvl5pPr>
+              <a:defRPr sz="1800" b="0">
+                <a:solidFill>
+                  <a:srgbClr val="536272"/>
+                </a:solidFill>
+                <a:latin typeface="Arial"/>
+                <a:ea typeface="Arial"/>
+                <a:cs typeface="Arial"/>
+              </a:defRPr>
+            </a:lvl5pPr>
+            <a:lvl6pPr>
+              <a:defRPr sz="1800" b="0">
+                <a:solidFill>
+                  <a:srgbClr val="536272"/>
+                </a:solidFill>
+                <a:latin typeface="Arial"/>
+                <a:ea typeface="Arial"/>
+                <a:cs typeface="Arial"/>
+              </a:defRPr>
+            </a:lvl6pPr>
+            <a:lvl7pPr>
+              <a:defRPr sz="1800" b="0">
+                <a:solidFill>
+                  <a:srgbClr val="536272"/>
+                </a:solidFill>
+                <a:latin typeface="Arial"/>
+                <a:ea typeface="Arial"/>
+                <a:cs typeface="Arial"/>
+              </a:defRPr>
+            </a:lvl7pPr>
+            <a:lvl8pPr>
+              <a:defRPr sz="1800" b="0">
+                <a:solidFill>
+                  <a:srgbClr val="536272"/>
+                </a:solidFill>
+                <a:latin typeface="Arial"/>
+                <a:ea typeface="Arial"/>
+                <a:cs typeface="Arial"/>
+              </a:defRPr>
+            </a:lvl8pPr>
+            <a:lvl9pPr>
+              <a:defRPr sz="1800" b="0">
+                <a:solidFill>
+                  <a:srgbClr val="536272"/>
+                </a:solidFill>
+                <a:latin typeface="Arial"/>
+                <a:ea typeface="Arial"/>
+                <a:cs typeface="Arial"/>
+              </a:defRPr>
+            </a:lvl9pPr>
           </a:lstStyle>
           <a:p xmlns:a="http://schemas.openxmlformats.org/drawingml/2006/main">
             <a:pPr>
@@ -9827,7 +16217,7 @@
     </p:spTree>
     <p:extLst>
       <p:ext uri="{BB962C8B-B14F-4D97-AF65-F5344CB8AC3E}">
-        <p14:creationId xmlns:p14="http://schemas.microsoft.com/office/powerpoint/2010/main" val="1397341903"/>
+        <p14:creationId xmlns:p14="http://schemas.microsoft.com/office/powerpoint/2010/main" val="1171759169"/>
       </p:ext>
     </p:extLst>
   </p:cSld>
